--- a/reports/BDA_Track_B_Presentation.pptx
+++ b/reports/BDA_Track_B_Presentation.pptx
@@ -509,7 +509,7 @@
           <a:lstStyle/>
           <a:p>
             <a:r>
-              <a:t>Introduce the project as a comparison of data-processing technologies using real USDA food data. The numbers on this slide describe the successful development subset, not the entire release.</a:t>
+              <a:t>Our project uses real food data from USDA. We store it, calculate nutrient summaries with different tools, and compare both the answers and the performance. The dashboard brings the evidence together for the demonstration.</a:t>
             </a:r>
           </a:p>
         </p:txBody>
@@ -579,7 +579,7 @@
           <a:lstStyle/>
           <a:p>
             <a:r>
-              <a:t>A food can have many nutrient observations. We group by food type, nutrient ID and unit; we do not add unlike nutrients or units together. Totals are analytical sums across records, not dietary recommendations.</a:t>
+              <a:t>For example, a protein value is not useful without knowing the food, the nutrient name and its unit. Our first job is to link those records. Then we can ask how many foods belong to each type, or what the average recorded protein amount is in a group.</a:t>
             </a:r>
           </a:p>
         </p:txBody>
@@ -649,7 +649,7 @@
           <a:lstStyle/>
           <a:p>
             <a:r>
-              <a:t>The MongoDB subset is exported into prepared files for Hadoop. MapReduce and Pig read the prepared HDFS data in separate branches. Pig does not clean MapReduce output. Hive uses the Pig-cleaned records. During laptop testing services switch to conserve memory; the lab design uses one master and two workers.</a:t>
+              <a:t>Use the WESSON product as a real food-name example from the source. The slide does not invent a nutrient amount for that product. Nutrient ID 1003 means protein; the nutrient table supplies that name and unit. Fifty thousand foods is not fifty thousand nutrient rows, because each food has many linked observations.</a:t>
             </a:r>
           </a:p>
         </p:txBody>
@@ -719,7 +719,7 @@
           <a:lstStyle/>
           <a:p>
             <a:r>
-              <a:t>These operators are used across the implemented pipelines, not necessarily all in one pipeline. Show a few raw MongoDB documents first, then a saved aggregation answer and the adjacent live verification command. executionStats reports documents examined, keys examined and server time.</a:t>
+              <a:t>First we store the CSV records in MongoDB. For the development run, the selected foods and every linked nutrient record are exported and prepared for Hadoop. MapReduce calculates summaries. Separately, Pig cleans the prepared HDFS data and Hive compares two ways of storing it. The branches are reconciled and shown in the dashboard.</a:t>
             </a:r>
           </a:p>
         </p:txBody>
@@ -789,7 +789,7 @@
           <a:lstStyle/>
           <a:p>
             <a:r>
-              <a:t>HDFS is a file system rather than a conventional database. YARN allocates resources for jobs. The HDFS demo also downloads a probe and compares its bytes before deleting it. Mean equals total amount divided by the count of usable observations in that nutrient group.</a:t>
+              <a:t>Do not describe these as unrelated mini projects. All three themes use the same linked dataset. In MongoDB we show before and after aggregation. In Hadoop we show uploaded files and MapReduce results. In Pig and Hive we show cleaned records, equal query answers, timings and file sizes.</a:t>
             </a:r>
           </a:p>
         </p:txBody>
@@ -859,7 +859,7 @@
           <a:lstStyle/>
           <a:p>
             <a:r>
-              <a:t>The Text table points to the cleaned Pig output; the RCFile table stores a converted copy of the same rows. RCFile is not a new answer file for each query. Faster performance depends on the data and workload, so we report measurements rather than promising RCFile always wins.</a:t>
+              <a:t>The measured query returns one result in either plan. Without the index MongoDB examines fifty thousand documents; with the index it examines one. This is direct evidence of reduced search work. Do not claim a universal speedup or invent Hive timing values: open the saved dashboard run to show the actual measurements.</a:t>
             </a:r>
           </a:p>
         </p:txBody>
@@ -929,7 +929,7 @@
           <a:lstStyle/>
           <a:p>
             <a:r>
-              <a:t>For the demonstration, finish the analysis first. Show MongoDB data with MongoDB running, then switch to Hadoop and Hive. The dashboard labels saved evidence, source identity and development scope. The native college deployment uses the dashboard in view-only mode.</a:t>
+              <a:t>Open the dashboard here. Select the successful fifty-thousand-food run. Start with raw data, then show calculated answers. Use one copied MongoDB command to demonstrate that the data exists in the database. Switch services only after analysis has finished; Hadoop commands require Hadoop running.</a:t>
             </a:r>
           </a:p>
         </p:txBody>
@@ -999,7 +999,7 @@
           <a:lstStyle/>
           <a:p>
             <a:r>
-              <a:t>The successful 50,000-food run is development evidence, not a claim of completion on the required three physical systems. The full release was prepared and raw-imported separately. Explain that scanning fewer documents is stronger evidence of the index benefit than treating a zero-millisecond timer reading as zero work. End by opening the saved dashboard run for the live demonstration.</a:t>
+              <a:t>Conclude that the contribution is the complete, checkable workflow, not just a nutrient average. It connects ingestion, distributed processing, correctness checks, performance measurements and presentation. The successful test used three Docker containers on one laptop. The separate three-physical-system deployment remains the lab execution route.</a:t>
             </a:r>
           </a:p>
         </p:txBody>
@@ -4090,7 +4090,7 @@
               </a:defRPr>
             </a:pPr>
             <a:r>
-              <a:t>BIG DATA ANALYTICS · 2026–2027</a:t>
+              <a:t>BCS714D · BIG DATA ANALYTICS · TRACK B</a:t>
             </a:r>
           </a:p>
         </p:txBody>
@@ -4129,7 +4129,7 @@
               </a:defRPr>
             </a:pPr>
             <a:r>
-              <a:t>USDA FoodData Central</a:t>
+              <a:t>Food &amp; Nutrient Analytics</a:t>
             </a:r>
           </a:p>
         </p:txBody>
@@ -4263,8 +4263,8 @@
         </p:nvSpPr>
         <p:spPr>
           <a:xfrm>
-            <a:off x="548640" y="1847088"/>
-            <a:ext cx="6766560" cy="1005840"/>
+            <a:off x="594360" y="1828800"/>
+            <a:ext cx="7772400" cy="960120"/>
           </a:xfrm>
           <a:prstGeom prst="rect">
             <a:avLst/>
@@ -4281,7 +4281,7 @@
               <a:spcAft>
                 <a:spcPts val="1000"/>
               </a:spcAft>
-              <a:defRPr sz="3400" b="1">
+              <a:defRPr sz="3000" b="1">
                 <a:solidFill>
                   <a:srgbClr val="194F8E"/>
                 </a:solidFill>
@@ -4289,7 +4289,7 @@
               </a:defRPr>
             </a:pPr>
             <a:r>
-              <a:t>Food &amp; Nutrient Analytics</a:t>
+              <a:t>Using USDA FoodData Central</a:t>
             </a:r>
           </a:p>
         </p:txBody>
@@ -4302,8 +4302,8 @@
         </p:nvSpPr>
         <p:spPr>
           <a:xfrm>
-            <a:off x="548640" y="2880360"/>
-            <a:ext cx="6583680" cy="777240"/>
+            <a:off x="594360" y="2788920"/>
+            <a:ext cx="7406640" cy="822960"/>
           </a:xfrm>
           <a:prstGeom prst="rect">
             <a:avLst/>
@@ -4328,7 +4328,7 @@
               </a:defRPr>
             </a:pPr>
             <a:r>
-              <a:t>MongoDB · Hadoop MapReduce · Pig · Hive</a:t>
+              <a:t>Processing food data across MongoDB and Hadoop,</a:t>
             </a:r>
           </a:p>
           <a:p>
@@ -4344,153 +4344,27 @@
               </a:defRPr>
             </a:pPr>
             <a:r>
-              <a:t>Flask dashboard</a:t>
-            </a:r>
-          </a:p>
-        </p:txBody>
-      </p:sp>
-      <p:sp>
-        <p:nvSpPr>
-          <p:cNvPr id="10" name="TextBox 9"/>
-          <p:cNvSpPr txBox="1"/>
-          <p:nvPr/>
-        </p:nvSpPr>
-        <p:spPr>
-          <a:xfrm>
-            <a:off x="548640" y="4096512"/>
-            <a:ext cx="7132320" cy="1261872"/>
-          </a:xfrm>
-          <a:prstGeom prst="rect">
-            <a:avLst/>
-          </a:prstGeom>
-          <a:noFill/>
-        </p:spPr>
-        <p:txBody>
-          <a:bodyPr wrap="square" lIns="18288" rIns="18288" tIns="27432" bIns="0">
-            <a:spAutoFit/>
-          </a:bodyPr>
-          <a:lstStyle/>
-          <a:p>
-            <a:pPr>
-              <a:spcAft>
-                <a:spcPts val="1000"/>
-              </a:spcAft>
-              <a:defRPr sz="1800" b="0">
-                <a:solidFill>
-                  <a:srgbClr val="2A3140"/>
-                </a:solidFill>
-                <a:latin typeface="Aptos"/>
-              </a:defRPr>
-            </a:pPr>
-            <a:r>
-              <a:t>Abhishek R — 1JS23CS004</a:t>
-            </a:r>
-          </a:p>
-          <a:p>
-            <a:pPr>
-              <a:spcAft>
-                <a:spcPts val="1000"/>
-              </a:spcAft>
-              <a:defRPr sz="1800" b="0">
-                <a:solidFill>
-                  <a:srgbClr val="2A3140"/>
-                </a:solidFill>
-                <a:latin typeface="Aptos"/>
-              </a:defRPr>
-            </a:pPr>
-            <a:r>
-              <a:t>Adithya V — 1JS23CS005</a:t>
-            </a:r>
-          </a:p>
-          <a:p>
-            <a:pPr>
-              <a:spcAft>
-                <a:spcPts val="1000"/>
-              </a:spcAft>
-              <a:defRPr sz="1800" b="0">
-                <a:solidFill>
-                  <a:srgbClr val="2A3140"/>
-                </a:solidFill>
-                <a:latin typeface="Aptos"/>
-              </a:defRPr>
-            </a:pPr>
-            <a:r>
-              <a:t>Dhanush Singh G — 1JS23CS048</a:t>
-            </a:r>
-          </a:p>
-        </p:txBody>
-      </p:sp>
-      <p:sp>
-        <p:nvSpPr>
-          <p:cNvPr id="11" name="TextBox 10"/>
-          <p:cNvSpPr txBox="1"/>
-          <p:nvPr/>
-        </p:nvSpPr>
-        <p:spPr>
-          <a:xfrm>
-            <a:off x="548640" y="5532120"/>
-            <a:ext cx="7315200" cy="594360"/>
-          </a:xfrm>
-          <a:prstGeom prst="rect">
-            <a:avLst/>
-          </a:prstGeom>
-          <a:noFill/>
-        </p:spPr>
-        <p:txBody>
-          <a:bodyPr wrap="square" lIns="18288" rIns="18288" tIns="27432" bIns="0">
-            <a:spAutoFit/>
-          </a:bodyPr>
-          <a:lstStyle/>
-          <a:p>
-            <a:pPr>
-              <a:spcAft>
-                <a:spcPts val="1000"/>
-              </a:spcAft>
-              <a:defRPr sz="1500" b="0">
-                <a:solidFill>
-                  <a:srgbClr val="596678"/>
-                </a:solidFill>
-                <a:latin typeface="Aptos"/>
-              </a:defRPr>
-            </a:pPr>
-            <a:r>
-              <a:t>Guide: Sandhiya B</a:t>
-            </a:r>
-          </a:p>
-          <a:p>
-            <a:pPr>
-              <a:spcAft>
-                <a:spcPts val="1000"/>
-              </a:spcAft>
-              <a:defRPr sz="1500" b="0">
-                <a:solidFill>
-                  <a:srgbClr val="596678"/>
-                </a:solidFill>
-                <a:latin typeface="Aptos"/>
-              </a:defRPr>
-            </a:pPr>
-            <a:r>
-              <a:t>JSS Academy of Technical Education · CSE</a:t>
-            </a:r>
-          </a:p>
-        </p:txBody>
-      </p:sp>
-      <p:sp>
-        <p:nvSpPr>
-          <p:cNvPr id="12" name="Rounded Rectangle 11"/>
+              <a:t>then comparing the results and performance.</a:t>
+            </a:r>
+          </a:p>
+        </p:txBody>
+      </p:sp>
+      <p:sp>
+        <p:nvSpPr>
+          <p:cNvPr id="10" name="Rectangle 9"/>
           <p:cNvSpPr/>
           <p:nvPr/>
         </p:nvSpPr>
         <p:spPr>
           <a:xfrm>
-            <a:off x="8229600" y="1874519"/>
-            <a:ext cx="3383280" cy="4023360"/>
-          </a:xfrm>
-          <a:prstGeom prst="roundRect">
+            <a:off x="594360" y="3904487"/>
+            <a:ext cx="7040880" cy="18288"/>
+          </a:xfrm>
+          <a:prstGeom prst="rect">
             <a:avLst/>
           </a:prstGeom>
           <a:solidFill>
-            <a:srgbClr val="EDF3FA"/>
+            <a:srgbClr val="D8E3EF"/>
           </a:solidFill>
           <a:ln>
             <a:noFill/>
@@ -4520,14 +4394,14 @@
       </p:sp>
       <p:sp>
         <p:nvSpPr>
-          <p:cNvPr id="13" name="TextBox 12"/>
-          <p:cNvSpPr txBox="1"/>
-          <p:nvPr/>
-        </p:nvSpPr>
-        <p:spPr>
-          <a:xfrm>
-            <a:off x="8503920" y="2267712"/>
-            <a:ext cx="2834640" cy="731520"/>
+          <p:cNvPr id="11" name="TextBox 10"/>
+          <p:cNvSpPr txBox="1"/>
+          <p:nvPr/>
+        </p:nvSpPr>
+        <p:spPr>
+          <a:xfrm>
+            <a:off x="594360" y="4206240"/>
+            <a:ext cx="7132320" cy="1371600"/>
           </a:xfrm>
           <a:prstGeom prst="rect">
             <a:avLst/>
@@ -4544,16 +4418,146 @@
               <a:spcAft>
                 <a:spcPts val="1000"/>
               </a:spcAft>
-              <a:defRPr sz="3800" b="1">
-                <a:solidFill>
-                  <a:srgbClr val="194F8E"/>
-                </a:solidFill>
-                <a:latin typeface="Aptos"/>
-              </a:defRPr>
-            </a:pPr>
-            <a:r>
-              <a:t>50,000</a:t>
-            </a:r>
+              <a:defRPr sz="1900" b="0">
+                <a:solidFill>
+                  <a:srgbClr val="2A3140"/>
+                </a:solidFill>
+                <a:latin typeface="Aptos"/>
+              </a:defRPr>
+            </a:pPr>
+            <a:r>
+              <a:t>Abhishek R   ·   1JS23CS004</a:t>
+            </a:r>
+          </a:p>
+          <a:p>
+            <a:pPr>
+              <a:spcAft>
+                <a:spcPts val="1000"/>
+              </a:spcAft>
+              <a:defRPr sz="1900" b="0">
+                <a:solidFill>
+                  <a:srgbClr val="2A3140"/>
+                </a:solidFill>
+                <a:latin typeface="Aptos"/>
+              </a:defRPr>
+            </a:pPr>
+            <a:r>
+              <a:t>Adithya V   ·   1JS23CS005</a:t>
+            </a:r>
+          </a:p>
+          <a:p>
+            <a:pPr>
+              <a:spcAft>
+                <a:spcPts val="1000"/>
+              </a:spcAft>
+              <a:defRPr sz="1900" b="0">
+                <a:solidFill>
+                  <a:srgbClr val="2A3140"/>
+                </a:solidFill>
+                <a:latin typeface="Aptos"/>
+              </a:defRPr>
+            </a:pPr>
+            <a:r>
+              <a:t>Dhanush Singh G   ·   1JS23CS048</a:t>
+            </a:r>
+          </a:p>
+        </p:txBody>
+      </p:sp>
+      <p:sp>
+        <p:nvSpPr>
+          <p:cNvPr id="12" name="TextBox 11"/>
+          <p:cNvSpPr txBox="1"/>
+          <p:nvPr/>
+        </p:nvSpPr>
+        <p:spPr>
+          <a:xfrm>
+            <a:off x="594360" y="5623560"/>
+            <a:ext cx="8229600" cy="548640"/>
+          </a:xfrm>
+          <a:prstGeom prst="rect">
+            <a:avLst/>
+          </a:prstGeom>
+          <a:noFill/>
+        </p:spPr>
+        <p:txBody>
+          <a:bodyPr wrap="square" lIns="18288" rIns="18288" tIns="27432" bIns="0">
+            <a:spAutoFit/>
+          </a:bodyPr>
+          <a:lstStyle/>
+          <a:p>
+            <a:pPr>
+              <a:spcAft>
+                <a:spcPts val="1000"/>
+              </a:spcAft>
+              <a:defRPr sz="1500" b="0">
+                <a:solidFill>
+                  <a:srgbClr val="596678"/>
+                </a:solidFill>
+                <a:latin typeface="Aptos"/>
+              </a:defRPr>
+            </a:pPr>
+            <a:r>
+              <a:t>Guide: Sandhiya B  |  JSS Academy of Technical Education, CSE</a:t>
+            </a:r>
+          </a:p>
+          <a:p>
+            <a:pPr>
+              <a:spcAft>
+                <a:spcPts val="1000"/>
+              </a:spcAft>
+              <a:defRPr sz="1500" b="0">
+                <a:solidFill>
+                  <a:srgbClr val="596678"/>
+                </a:solidFill>
+                <a:latin typeface="Aptos"/>
+              </a:defRPr>
+            </a:pPr>
+            <a:r>
+              <a:t>Academic year 2026–2027</a:t>
+            </a:r>
+          </a:p>
+        </p:txBody>
+      </p:sp>
+      <p:sp>
+        <p:nvSpPr>
+          <p:cNvPr id="13" name="Rectangle 12"/>
+          <p:cNvSpPr/>
+          <p:nvPr/>
+        </p:nvSpPr>
+        <p:spPr>
+          <a:xfrm>
+            <a:off x="8869680" y="1847088"/>
+            <a:ext cx="2697480" cy="3977639"/>
+          </a:xfrm>
+          <a:prstGeom prst="rect">
+            <a:avLst/>
+          </a:prstGeom>
+          <a:solidFill>
+            <a:srgbClr val="14284B"/>
+          </a:solidFill>
+          <a:ln>
+            <a:noFill/>
+          </a:ln>
+        </p:spPr>
+        <p:style>
+          <a:lnRef idx="1">
+            <a:schemeClr val="accent1"/>
+          </a:lnRef>
+          <a:fillRef idx="3">
+            <a:schemeClr val="accent1"/>
+          </a:fillRef>
+          <a:effectRef idx="2">
+            <a:schemeClr val="accent1"/>
+          </a:effectRef>
+          <a:fontRef idx="minor">
+            <a:schemeClr val="lt1"/>
+          </a:fontRef>
+        </p:style>
+        <p:txBody>
+          <a:bodyPr rtlCol="0" anchor="ctr"/>
+          <a:lstStyle/>
+          <a:p>
+            <a:pPr algn="ctr"/>
           </a:p>
         </p:txBody>
       </p:sp>
@@ -4565,8 +4569,8 @@
         </p:nvSpPr>
         <p:spPr>
           <a:xfrm>
-            <a:off x="8503920" y="3017520"/>
-            <a:ext cx="2834640" cy="502920"/>
+            <a:off x="9144000" y="2194560"/>
+            <a:ext cx="2103120" cy="457200"/>
           </a:xfrm>
           <a:prstGeom prst="rect">
             <a:avLst/>
@@ -4583,15 +4587,15 @@
               <a:spcAft>
                 <a:spcPts val="1000"/>
               </a:spcAft>
-              <a:defRPr sz="2000" b="0">
-                <a:solidFill>
-                  <a:srgbClr val="2A3140"/>
-                </a:solidFill>
-                <a:latin typeface="Aptos"/>
-              </a:defRPr>
-            </a:pPr>
-            <a:r>
-              <a:t>foods tested</a:t>
+              <a:defRPr sz="1200" b="1">
+                <a:solidFill>
+                  <a:srgbClr val="FFFFFF"/>
+                </a:solidFill>
+                <a:latin typeface="Aptos"/>
+              </a:defRPr>
+            </a:pPr>
+            <a:r>
+              <a:t>THE PROJECT</a:t>
             </a:r>
           </a:p>
         </p:txBody>
@@ -4604,8 +4608,8 @@
         </p:nvSpPr>
         <p:spPr>
           <a:xfrm>
-            <a:off x="8503920" y="3886200"/>
-            <a:ext cx="2834640" cy="731520"/>
+            <a:off x="9144000" y="2788920"/>
+            <a:ext cx="548640" cy="365760"/>
           </a:xfrm>
           <a:prstGeom prst="rect">
             <a:avLst/>
@@ -4622,15 +4626,15 @@
               <a:spcAft>
                 <a:spcPts val="1000"/>
               </a:spcAft>
-              <a:defRPr sz="2800" b="1">
-                <a:solidFill>
-                  <a:srgbClr val="194F8E"/>
-                </a:solidFill>
-                <a:latin typeface="Aptos"/>
-              </a:defRPr>
-            </a:pPr>
-            <a:r>
-              <a:t>1,126,928</a:t>
+              <a:defRPr sz="1400" b="1">
+                <a:solidFill>
+                  <a:srgbClr val="A8C7EB"/>
+                </a:solidFill>
+                <a:latin typeface="Aptos"/>
+              </a:defRPr>
+            </a:pPr>
+            <a:r>
+              <a:t>01</a:t>
             </a:r>
           </a:p>
         </p:txBody>
@@ -4643,8 +4647,8 @@
         </p:nvSpPr>
         <p:spPr>
           <a:xfrm>
-            <a:off x="8503920" y="4663440"/>
-            <a:ext cx="2834640" cy="731520"/>
+            <a:off x="9738360" y="2788920"/>
+            <a:ext cx="1691640" cy="548640"/>
           </a:xfrm>
           <a:prstGeom prst="rect">
             <a:avLst/>
@@ -4661,31 +4665,171 @@
               <a:spcAft>
                 <a:spcPts val="1000"/>
               </a:spcAft>
-              <a:defRPr sz="2000" b="0">
-                <a:solidFill>
-                  <a:srgbClr val="2A3140"/>
-                </a:solidFill>
-                <a:latin typeface="Aptos"/>
-              </a:defRPr>
-            </a:pPr>
-            <a:r>
-              <a:t>linked nutrient</a:t>
-            </a:r>
-          </a:p>
+              <a:defRPr sz="2200" b="1">
+                <a:solidFill>
+                  <a:srgbClr val="FFFFFF"/>
+                </a:solidFill>
+                <a:latin typeface="Aptos"/>
+              </a:defRPr>
+            </a:pPr>
+            <a:r>
+              <a:t>Store</a:t>
+            </a:r>
+          </a:p>
+        </p:txBody>
+      </p:sp>
+      <p:sp>
+        <p:nvSpPr>
+          <p:cNvPr id="17" name="TextBox 16"/>
+          <p:cNvSpPr txBox="1"/>
+          <p:nvPr/>
+        </p:nvSpPr>
+        <p:spPr>
+          <a:xfrm>
+            <a:off x="9144000" y="3703320"/>
+            <a:ext cx="548640" cy="365760"/>
+          </a:xfrm>
+          <a:prstGeom prst="rect">
+            <a:avLst/>
+          </a:prstGeom>
+          <a:noFill/>
+        </p:spPr>
+        <p:txBody>
+          <a:bodyPr wrap="square" lIns="18288" rIns="18288" tIns="27432" bIns="0">
+            <a:spAutoFit/>
+          </a:bodyPr>
+          <a:lstStyle/>
           <a:p>
             <a:pPr>
               <a:spcAft>
                 <a:spcPts val="1000"/>
               </a:spcAft>
-              <a:defRPr sz="2000" b="0">
-                <a:solidFill>
-                  <a:srgbClr val="2A3140"/>
-                </a:solidFill>
-                <a:latin typeface="Aptos"/>
-              </a:defRPr>
-            </a:pPr>
-            <a:r>
-              <a:t>records</a:t>
+              <a:defRPr sz="1400" b="1">
+                <a:solidFill>
+                  <a:srgbClr val="A8C7EB"/>
+                </a:solidFill>
+                <a:latin typeface="Aptos"/>
+              </a:defRPr>
+            </a:pPr>
+            <a:r>
+              <a:t>02</a:t>
+            </a:r>
+          </a:p>
+        </p:txBody>
+      </p:sp>
+      <p:sp>
+        <p:nvSpPr>
+          <p:cNvPr id="18" name="TextBox 17"/>
+          <p:cNvSpPr txBox="1"/>
+          <p:nvPr/>
+        </p:nvSpPr>
+        <p:spPr>
+          <a:xfrm>
+            <a:off x="9738360" y="3703320"/>
+            <a:ext cx="1691640" cy="548640"/>
+          </a:xfrm>
+          <a:prstGeom prst="rect">
+            <a:avLst/>
+          </a:prstGeom>
+          <a:noFill/>
+        </p:spPr>
+        <p:txBody>
+          <a:bodyPr wrap="square" lIns="18288" rIns="18288" tIns="27432" bIns="0">
+            <a:spAutoFit/>
+          </a:bodyPr>
+          <a:lstStyle/>
+          <a:p>
+            <a:pPr>
+              <a:spcAft>
+                <a:spcPts val="1000"/>
+              </a:spcAft>
+              <a:defRPr sz="2200" b="1">
+                <a:solidFill>
+                  <a:srgbClr val="FFFFFF"/>
+                </a:solidFill>
+                <a:latin typeface="Aptos"/>
+              </a:defRPr>
+            </a:pPr>
+            <a:r>
+              <a:t>Analyse</a:t>
+            </a:r>
+          </a:p>
+        </p:txBody>
+      </p:sp>
+      <p:sp>
+        <p:nvSpPr>
+          <p:cNvPr id="19" name="TextBox 18"/>
+          <p:cNvSpPr txBox="1"/>
+          <p:nvPr/>
+        </p:nvSpPr>
+        <p:spPr>
+          <a:xfrm>
+            <a:off x="9144000" y="4617720"/>
+            <a:ext cx="548640" cy="365760"/>
+          </a:xfrm>
+          <a:prstGeom prst="rect">
+            <a:avLst/>
+          </a:prstGeom>
+          <a:noFill/>
+        </p:spPr>
+        <p:txBody>
+          <a:bodyPr wrap="square" lIns="18288" rIns="18288" tIns="27432" bIns="0">
+            <a:spAutoFit/>
+          </a:bodyPr>
+          <a:lstStyle/>
+          <a:p>
+            <a:pPr>
+              <a:spcAft>
+                <a:spcPts val="1000"/>
+              </a:spcAft>
+              <a:defRPr sz="1400" b="1">
+                <a:solidFill>
+                  <a:srgbClr val="A8C7EB"/>
+                </a:solidFill>
+                <a:latin typeface="Aptos"/>
+              </a:defRPr>
+            </a:pPr>
+            <a:r>
+              <a:t>03</a:t>
+            </a:r>
+          </a:p>
+        </p:txBody>
+      </p:sp>
+      <p:sp>
+        <p:nvSpPr>
+          <p:cNvPr id="20" name="TextBox 19"/>
+          <p:cNvSpPr txBox="1"/>
+          <p:nvPr/>
+        </p:nvSpPr>
+        <p:spPr>
+          <a:xfrm>
+            <a:off x="9738360" y="4617720"/>
+            <a:ext cx="1691640" cy="548640"/>
+          </a:xfrm>
+          <a:prstGeom prst="rect">
+            <a:avLst/>
+          </a:prstGeom>
+          <a:noFill/>
+        </p:spPr>
+        <p:txBody>
+          <a:bodyPr wrap="square" lIns="18288" rIns="18288" tIns="27432" bIns="0">
+            <a:spAutoFit/>
+          </a:bodyPr>
+          <a:lstStyle/>
+          <a:p>
+            <a:pPr>
+              <a:spcAft>
+                <a:spcPts val="1000"/>
+              </a:spcAft>
+              <a:defRPr sz="2200" b="1">
+                <a:solidFill>
+                  <a:srgbClr val="FFFFFF"/>
+                </a:solidFill>
+                <a:latin typeface="Aptos"/>
+              </a:defRPr>
+            </a:pPr>
+            <a:r>
+              <a:t>Compare</a:t>
             </a:r>
           </a:p>
         </p:txBody>
@@ -4793,7 +4937,7 @@
               </a:defRPr>
             </a:pPr>
             <a:r>
-              <a:t>PROJECT OBJECTIVE</a:t>
+              <a:t>PROBLEM STATEMENT &amp; OBJECTIVES</a:t>
             </a:r>
           </a:p>
         </p:txBody>
@@ -4832,7 +4976,7 @@
               </a:defRPr>
             </a:pPr>
             <a:r>
-              <a:t>Turn food records into useful, checked answers</a:t>
+              <a:t>The data is large, and the facts are split across files</a:t>
             </a:r>
           </a:p>
         </p:txBody>
@@ -4960,44 +5104,40 @@
       </p:sp>
       <p:sp>
         <p:nvSpPr>
-          <p:cNvPr id="8" name="Rounded Rectangle 7"/>
-          <p:cNvSpPr/>
-          <p:nvPr/>
-        </p:nvSpPr>
-        <p:spPr>
-          <a:xfrm>
-            <a:off x="548640" y="1965960"/>
-            <a:ext cx="3566160" cy="3383280"/>
-          </a:xfrm>
-          <a:prstGeom prst="roundRect">
-            <a:avLst/>
-          </a:prstGeom>
-          <a:solidFill>
-            <a:srgbClr val="EDF3FA"/>
-          </a:solidFill>
-          <a:ln>
-            <a:noFill/>
-          </a:ln>
-        </p:spPr>
-        <p:style>
-          <a:lnRef idx="1">
-            <a:schemeClr val="accent1"/>
-          </a:lnRef>
-          <a:fillRef idx="3">
-            <a:schemeClr val="accent1"/>
-          </a:fillRef>
-          <a:effectRef idx="2">
-            <a:schemeClr val="accent1"/>
-          </a:effectRef>
-          <a:fontRef idx="minor">
-            <a:schemeClr val="lt1"/>
-          </a:fontRef>
-        </p:style>
-        <p:txBody>
-          <a:bodyPr rtlCol="0" anchor="ctr"/>
-          <a:lstStyle/>
-          <a:p>
-            <a:pPr algn="ctr"/>
+          <p:cNvPr id="8" name="TextBox 7"/>
+          <p:cNvSpPr txBox="1"/>
+          <p:nvPr/>
+        </p:nvSpPr>
+        <p:spPr>
+          <a:xfrm>
+            <a:off x="594360" y="1783080"/>
+            <a:ext cx="10789920" cy="822960"/>
+          </a:xfrm>
+          <a:prstGeom prst="rect">
+            <a:avLst/>
+          </a:prstGeom>
+          <a:noFill/>
+        </p:spPr>
+        <p:txBody>
+          <a:bodyPr wrap="square" lIns="18288" rIns="18288" tIns="27432" bIns="0">
+            <a:spAutoFit/>
+          </a:bodyPr>
+          <a:lstStyle/>
+          <a:p>
+            <a:pPr>
+              <a:spcAft>
+                <a:spcPts val="1000"/>
+              </a:spcAft>
+              <a:defRPr sz="2300" b="0">
+                <a:solidFill>
+                  <a:srgbClr val="2A3140"/>
+                </a:solidFill>
+                <a:latin typeface="Aptos"/>
+              </a:defRPr>
+            </a:pPr>
+            <a:r>
+              <a:t>A food name, its nutrient amounts and the nutrient definitions are stored separately. We need to connect them before answering useful questions.</a:t>
+            </a:r>
           </a:p>
         </p:txBody>
       </p:sp>
@@ -5009,8 +5149,8 @@
         </p:nvSpPr>
         <p:spPr>
           <a:xfrm>
-            <a:off x="749808" y="2148840"/>
-            <a:ext cx="3163824" cy="320040"/>
+            <a:off x="594360" y="2926080"/>
+            <a:ext cx="594360" cy="594360"/>
           </a:xfrm>
           <a:prstGeom prst="rect">
             <a:avLst/>
@@ -5027,7 +5167,7 @@
               <a:spcAft>
                 <a:spcPts val="1000"/>
               </a:spcAft>
-              <a:defRPr sz="1100" b="1">
+              <a:defRPr sz="2700" b="1">
                 <a:solidFill>
                   <a:srgbClr val="194F8E"/>
                 </a:solidFill>
@@ -5035,7 +5175,7 @@
               </a:defRPr>
             </a:pPr>
             <a:r>
-              <a:t>01 / DATA</a:t>
+              <a:t>01</a:t>
             </a:r>
           </a:p>
         </p:txBody>
@@ -5048,8 +5188,8 @@
         </p:nvSpPr>
         <p:spPr>
           <a:xfrm>
-            <a:off x="749808" y="2560320"/>
-            <a:ext cx="3163824" cy="594360"/>
+            <a:off x="1371600" y="2926080"/>
+            <a:ext cx="9875520" cy="457200"/>
           </a:xfrm>
           <a:prstGeom prst="rect">
             <a:avLst/>
@@ -5066,7 +5206,7 @@
               <a:spcAft>
                 <a:spcPts val="1000"/>
               </a:spcAft>
-              <a:defRPr sz="2200" b="1">
+              <a:defRPr sz="2400" b="1">
                 <a:solidFill>
                   <a:srgbClr val="14284B"/>
                 </a:solidFill>
@@ -5074,7 +5214,7 @@
               </a:defRPr>
             </a:pPr>
             <a:r>
-              <a:t>What is in the data?</a:t>
+              <a:t>Organise the records</a:t>
             </a:r>
           </a:p>
         </p:txBody>
@@ -5087,8 +5227,8 @@
         </p:nvSpPr>
         <p:spPr>
           <a:xfrm>
-            <a:off x="749808" y="3429000"/>
-            <a:ext cx="3163824" cy="1874520"/>
+            <a:off x="1371600" y="3538728"/>
+            <a:ext cx="9784080" cy="640080"/>
           </a:xfrm>
           <a:prstGeom prst="rect">
             <a:avLst/>
@@ -5105,7 +5245,7 @@
               <a:spcAft>
                 <a:spcPts val="1000"/>
               </a:spcAft>
-              <a:defRPr sz="1700" b="0">
+              <a:defRPr sz="2000" b="0">
                 <a:solidFill>
                   <a:srgbClr val="2A3140"/>
                 </a:solidFill>
@@ -5113,51 +5253,47 @@
               </a:defRPr>
             </a:pPr>
             <a:r>
-              <a:t>Food names, types and nutrient amounts from USDA’s October 2024 CSV package.</a:t>
-            </a:r>
-          </a:p>
-        </p:txBody>
-      </p:sp>
-      <p:sp>
-        <p:nvSpPr>
-          <p:cNvPr id="12" name="Rounded Rectangle 11"/>
-          <p:cNvSpPr/>
-          <p:nvPr/>
-        </p:nvSpPr>
-        <p:spPr>
-          <a:xfrm>
-            <a:off x="4325112" y="1965960"/>
-            <a:ext cx="3566160" cy="3383280"/>
-          </a:xfrm>
-          <a:prstGeom prst="roundRect">
-            <a:avLst/>
-          </a:prstGeom>
-          <a:solidFill>
-            <a:srgbClr val="EDF3FA"/>
-          </a:solidFill>
-          <a:ln>
-            <a:noFill/>
-          </a:ln>
-        </p:spPr>
-        <p:style>
-          <a:lnRef idx="1">
-            <a:schemeClr val="accent1"/>
-          </a:lnRef>
-          <a:fillRef idx="3">
-            <a:schemeClr val="accent1"/>
-          </a:fillRef>
-          <a:effectRef idx="2">
-            <a:schemeClr val="accent1"/>
-          </a:effectRef>
-          <a:fontRef idx="minor">
-            <a:schemeClr val="lt1"/>
-          </a:fontRef>
-        </p:style>
-        <p:txBody>
-          <a:bodyPr rtlCol="0" anchor="ctr"/>
-          <a:lstStyle/>
-          <a:p>
-            <a:pPr algn="ctr"/>
+              <a:t>Link foods to their nutrients without losing the source identity.</a:t>
+            </a:r>
+          </a:p>
+        </p:txBody>
+      </p:sp>
+      <p:sp>
+        <p:nvSpPr>
+          <p:cNvPr id="12" name="TextBox 11"/>
+          <p:cNvSpPr txBox="1"/>
+          <p:nvPr/>
+        </p:nvSpPr>
+        <p:spPr>
+          <a:xfrm>
+            <a:off x="594360" y="4041648"/>
+            <a:ext cx="594360" cy="594360"/>
+          </a:xfrm>
+          <a:prstGeom prst="rect">
+            <a:avLst/>
+          </a:prstGeom>
+          <a:noFill/>
+        </p:spPr>
+        <p:txBody>
+          <a:bodyPr wrap="square" lIns="18288" rIns="18288" tIns="27432" bIns="0">
+            <a:spAutoFit/>
+          </a:bodyPr>
+          <a:lstStyle/>
+          <a:p>
+            <a:pPr>
+              <a:spcAft>
+                <a:spcPts val="1000"/>
+              </a:spcAft>
+              <a:defRPr sz="2700" b="1">
+                <a:solidFill>
+                  <a:srgbClr val="194F8E"/>
+                </a:solidFill>
+                <a:latin typeface="Aptos"/>
+              </a:defRPr>
+            </a:pPr>
+            <a:r>
+              <a:t>02</a:t>
+            </a:r>
           </a:p>
         </p:txBody>
       </p:sp>
@@ -5169,8 +5305,8 @@
         </p:nvSpPr>
         <p:spPr>
           <a:xfrm>
-            <a:off x="4526280" y="2148840"/>
-            <a:ext cx="3163824" cy="320040"/>
+            <a:off x="1371600" y="4041648"/>
+            <a:ext cx="9875520" cy="457200"/>
           </a:xfrm>
           <a:prstGeom prst="rect">
             <a:avLst/>
@@ -5187,7 +5323,85 @@
               <a:spcAft>
                 <a:spcPts val="1000"/>
               </a:spcAft>
-              <a:defRPr sz="1100" b="1">
+              <a:defRPr sz="2400" b="1">
+                <a:solidFill>
+                  <a:srgbClr val="14284B"/>
+                </a:solidFill>
+                <a:latin typeface="Aptos"/>
+              </a:defRPr>
+            </a:pPr>
+            <a:r>
+              <a:t>Calculate useful summaries</a:t>
+            </a:r>
+          </a:p>
+        </p:txBody>
+      </p:sp>
+      <p:sp>
+        <p:nvSpPr>
+          <p:cNvPr id="14" name="TextBox 13"/>
+          <p:cNvSpPr txBox="1"/>
+          <p:nvPr/>
+        </p:nvSpPr>
+        <p:spPr>
+          <a:xfrm>
+            <a:off x="1371600" y="4654296"/>
+            <a:ext cx="9784080" cy="640080"/>
+          </a:xfrm>
+          <a:prstGeom prst="rect">
+            <a:avLst/>
+          </a:prstGeom>
+          <a:noFill/>
+        </p:spPr>
+        <p:txBody>
+          <a:bodyPr wrap="square" lIns="18288" rIns="18288" tIns="27432" bIns="0">
+            <a:spAutoFit/>
+          </a:bodyPr>
+          <a:lstStyle/>
+          <a:p>
+            <a:pPr>
+              <a:spcAft>
+                <a:spcPts val="1000"/>
+              </a:spcAft>
+              <a:defRPr sz="2000" b="0">
+                <a:solidFill>
+                  <a:srgbClr val="2A3140"/>
+                </a:solidFill>
+                <a:latin typeface="Aptos"/>
+              </a:defRPr>
+            </a:pPr>
+            <a:r>
+              <a:t>Count foods and calculate nutrient totals and averages by food type.</a:t>
+            </a:r>
+          </a:p>
+        </p:txBody>
+      </p:sp>
+      <p:sp>
+        <p:nvSpPr>
+          <p:cNvPr id="15" name="TextBox 14"/>
+          <p:cNvSpPr txBox="1"/>
+          <p:nvPr/>
+        </p:nvSpPr>
+        <p:spPr>
+          <a:xfrm>
+            <a:off x="594360" y="5157216"/>
+            <a:ext cx="594360" cy="594360"/>
+          </a:xfrm>
+          <a:prstGeom prst="rect">
+            <a:avLst/>
+          </a:prstGeom>
+          <a:noFill/>
+        </p:spPr>
+        <p:txBody>
+          <a:bodyPr wrap="square" lIns="18288" rIns="18288" tIns="27432" bIns="0">
+            <a:spAutoFit/>
+          </a:bodyPr>
+          <a:lstStyle/>
+          <a:p>
+            <a:pPr>
+              <a:spcAft>
+                <a:spcPts val="1000"/>
+              </a:spcAft>
+              <a:defRPr sz="2700" b="1">
                 <a:solidFill>
                   <a:srgbClr val="194F8E"/>
                 </a:solidFill>
@@ -5195,21 +5409,21 @@
               </a:defRPr>
             </a:pPr>
             <a:r>
-              <a:t>02 / ANALYSIS</a:t>
-            </a:r>
-          </a:p>
-        </p:txBody>
-      </p:sp>
-      <p:sp>
-        <p:nvSpPr>
-          <p:cNvPr id="14" name="TextBox 13"/>
-          <p:cNvSpPr txBox="1"/>
-          <p:nvPr/>
-        </p:nvSpPr>
-        <p:spPr>
-          <a:xfrm>
-            <a:off x="4526280" y="2560320"/>
-            <a:ext cx="3163824" cy="594360"/>
+              <a:t>03</a:t>
+            </a:r>
+          </a:p>
+        </p:txBody>
+      </p:sp>
+      <p:sp>
+        <p:nvSpPr>
+          <p:cNvPr id="16" name="TextBox 15"/>
+          <p:cNvSpPr txBox="1"/>
+          <p:nvPr/>
+        </p:nvSpPr>
+        <p:spPr>
+          <a:xfrm>
+            <a:off x="1371600" y="5157216"/>
+            <a:ext cx="9875520" cy="457200"/>
           </a:xfrm>
           <a:prstGeom prst="rect">
             <a:avLst/>
@@ -5226,7 +5440,7 @@
               <a:spcAft>
                 <a:spcPts val="1000"/>
               </a:spcAft>
-              <a:defRPr sz="2200" b="1">
+              <a:defRPr sz="2400" b="1">
                 <a:solidFill>
                   <a:srgbClr val="14284B"/>
                 </a:solidFill>
@@ -5234,21 +5448,21 @@
               </a:defRPr>
             </a:pPr>
             <a:r>
-              <a:t>What do we calculate?</a:t>
-            </a:r>
-          </a:p>
-        </p:txBody>
-      </p:sp>
-      <p:sp>
-        <p:nvSpPr>
-          <p:cNvPr id="15" name="TextBox 14"/>
-          <p:cNvSpPr txBox="1"/>
-          <p:nvPr/>
-        </p:nvSpPr>
-        <p:spPr>
-          <a:xfrm>
-            <a:off x="4526280" y="3429000"/>
-            <a:ext cx="3163824" cy="1874520"/>
+              <a:t>Check correctness and performance</a:t>
+            </a:r>
+          </a:p>
+        </p:txBody>
+      </p:sp>
+      <p:sp>
+        <p:nvSpPr>
+          <p:cNvPr id="17" name="TextBox 16"/>
+          <p:cNvSpPr txBox="1"/>
+          <p:nvPr/>
+        </p:nvSpPr>
+        <p:spPr>
+          <a:xfrm>
+            <a:off x="1371600" y="5769864"/>
+            <a:ext cx="9784080" cy="640080"/>
           </a:xfrm>
           <a:prstGeom prst="rect">
             <a:avLst/>
@@ -5265,7 +5479,7 @@
               <a:spcAft>
                 <a:spcPts val="1000"/>
               </a:spcAft>
-              <a:defRPr sz="1700" b="0">
+              <a:defRPr sz="2000" b="0">
                 <a:solidFill>
                   <a:srgbClr val="2A3140"/>
                 </a:solidFill>
@@ -5273,206 +5487,7 @@
               </a:defRPr>
             </a:pPr>
             <a:r>
-              <a:t>Food counts and nutrient totals, averages and observation counts, grouped by food type.</a:t>
-            </a:r>
-          </a:p>
-        </p:txBody>
-      </p:sp>
-      <p:sp>
-        <p:nvSpPr>
-          <p:cNvPr id="16" name="Rounded Rectangle 15"/>
-          <p:cNvSpPr/>
-          <p:nvPr/>
-        </p:nvSpPr>
-        <p:spPr>
-          <a:xfrm>
-            <a:off x="8101583" y="1965960"/>
-            <a:ext cx="3538728" cy="3383280"/>
-          </a:xfrm>
-          <a:prstGeom prst="roundRect">
-            <a:avLst/>
-          </a:prstGeom>
-          <a:solidFill>
-            <a:srgbClr val="EDF3FA"/>
-          </a:solidFill>
-          <a:ln>
-            <a:noFill/>
-          </a:ln>
-        </p:spPr>
-        <p:style>
-          <a:lnRef idx="1">
-            <a:schemeClr val="accent1"/>
-          </a:lnRef>
-          <a:fillRef idx="3">
-            <a:schemeClr val="accent1"/>
-          </a:fillRef>
-          <a:effectRef idx="2">
-            <a:schemeClr val="accent1"/>
-          </a:effectRef>
-          <a:fontRef idx="minor">
-            <a:schemeClr val="lt1"/>
-          </a:fontRef>
-        </p:style>
-        <p:txBody>
-          <a:bodyPr rtlCol="0" anchor="ctr"/>
-          <a:lstStyle/>
-          <a:p>
-            <a:pPr algn="ctr"/>
-          </a:p>
-        </p:txBody>
-      </p:sp>
-      <p:sp>
-        <p:nvSpPr>
-          <p:cNvPr id="17" name="TextBox 16"/>
-          <p:cNvSpPr txBox="1"/>
-          <p:nvPr/>
-        </p:nvSpPr>
-        <p:spPr>
-          <a:xfrm>
-            <a:off x="8302752" y="2148840"/>
-            <a:ext cx="3136392" cy="320040"/>
-          </a:xfrm>
-          <a:prstGeom prst="rect">
-            <a:avLst/>
-          </a:prstGeom>
-          <a:noFill/>
-        </p:spPr>
-        <p:txBody>
-          <a:bodyPr wrap="square" lIns="18288" rIns="18288" tIns="27432" bIns="0">
-            <a:spAutoFit/>
-          </a:bodyPr>
-          <a:lstStyle/>
-          <a:p>
-            <a:pPr>
-              <a:spcAft>
-                <a:spcPts val="1000"/>
-              </a:spcAft>
-              <a:defRPr sz="1100" b="1">
-                <a:solidFill>
-                  <a:srgbClr val="194F8E"/>
-                </a:solidFill>
-                <a:latin typeface="Aptos"/>
-              </a:defRPr>
-            </a:pPr>
-            <a:r>
-              <a:t>03 / COMPARISON</a:t>
-            </a:r>
-          </a:p>
-        </p:txBody>
-      </p:sp>
-      <p:sp>
-        <p:nvSpPr>
-          <p:cNvPr id="18" name="TextBox 17"/>
-          <p:cNvSpPr txBox="1"/>
-          <p:nvPr/>
-        </p:nvSpPr>
-        <p:spPr>
-          <a:xfrm>
-            <a:off x="8302752" y="2560320"/>
-            <a:ext cx="3136392" cy="594360"/>
-          </a:xfrm>
-          <a:prstGeom prst="rect">
-            <a:avLst/>
-          </a:prstGeom>
-          <a:noFill/>
-        </p:spPr>
-        <p:txBody>
-          <a:bodyPr wrap="square" lIns="18288" rIns="18288" tIns="27432" bIns="0">
-            <a:spAutoFit/>
-          </a:bodyPr>
-          <a:lstStyle/>
-          <a:p>
-            <a:pPr>
-              <a:spcAft>
-                <a:spcPts val="1000"/>
-              </a:spcAft>
-              <a:defRPr sz="2200" b="1">
-                <a:solidFill>
-                  <a:srgbClr val="14284B"/>
-                </a:solidFill>
-                <a:latin typeface="Aptos"/>
-              </a:defRPr>
-            </a:pPr>
-            <a:r>
-              <a:t>What do we compare?</a:t>
-            </a:r>
-          </a:p>
-        </p:txBody>
-      </p:sp>
-      <p:sp>
-        <p:nvSpPr>
-          <p:cNvPr id="19" name="TextBox 18"/>
-          <p:cNvSpPr txBox="1"/>
-          <p:nvPr/>
-        </p:nvSpPr>
-        <p:spPr>
-          <a:xfrm>
-            <a:off x="8302752" y="3429000"/>
-            <a:ext cx="3136392" cy="1874520"/>
-          </a:xfrm>
-          <a:prstGeom prst="rect">
-            <a:avLst/>
-          </a:prstGeom>
-          <a:noFill/>
-        </p:spPr>
-        <p:txBody>
-          <a:bodyPr wrap="square" lIns="18288" rIns="18288" tIns="27432" bIns="0">
-            <a:spAutoFit/>
-          </a:bodyPr>
-          <a:lstStyle/>
-          <a:p>
-            <a:pPr>
-              <a:spcAft>
-                <a:spcPts val="1000"/>
-              </a:spcAft>
-              <a:defRPr sz="1700" b="0">
-                <a:solidFill>
-                  <a:srgbClr val="2A3140"/>
-                </a:solidFill>
-                <a:latin typeface="Aptos"/>
-              </a:defRPr>
-            </a:pPr>
-            <a:r>
-              <a:t>Indexed vs unindexed searches; Hive Text vs RCFile query time and storage.</a:t>
-            </a:r>
-          </a:p>
-        </p:txBody>
-      </p:sp>
-      <p:sp>
-        <p:nvSpPr>
-          <p:cNvPr id="20" name="TextBox 19"/>
-          <p:cNvSpPr txBox="1"/>
-          <p:nvPr/>
-        </p:nvSpPr>
-        <p:spPr>
-          <a:xfrm>
-            <a:off x="640080" y="5669280"/>
-            <a:ext cx="10972800" cy="457200"/>
-          </a:xfrm>
-          <a:prstGeom prst="rect">
-            <a:avLst/>
-          </a:prstGeom>
-          <a:noFill/>
-        </p:spPr>
-        <p:txBody>
-          <a:bodyPr wrap="square" lIns="18288" rIns="18288" tIns="27432" bIns="0">
-            <a:spAutoFit/>
-          </a:bodyPr>
-          <a:lstStyle/>
-          <a:p>
-            <a:pPr>
-              <a:spcAft>
-                <a:spcPts val="1000"/>
-              </a:spcAft>
-              <a:defRPr sz="1800" b="0">
-                <a:solidFill>
-                  <a:srgbClr val="596678"/>
-                </a:solidFill>
-                <a:latin typeface="Aptos"/>
-              </a:defRPr>
-            </a:pPr>
-            <a:r>
-              <a:t>Full source: 2,063,876 foods and 26,848,323 food–nutrient records.</a:t>
+              <a:t>Compare the answers across tools and measure search and storage efficiency.</a:t>
             </a:r>
           </a:p>
         </p:txBody>
@@ -5580,7 +5595,7 @@
               </a:defRPr>
             </a:pPr>
             <a:r>
-              <a:t>END-TO-END ARCHITECTURE</a:t>
+              <a:t>DATASET &amp; RECORD LINKAGE</a:t>
             </a:r>
           </a:p>
         </p:txBody>
@@ -5619,7 +5634,7 @@
               </a:defRPr>
             </a:pPr>
             <a:r>
-              <a:t>One dataset, two processing branches</a:t>
+              <a:t>One food can have many nutrient records</a:t>
             </a:r>
           </a:p>
         </p:txBody>
@@ -5747,16 +5762,16 @@
       </p:sp>
       <p:sp>
         <p:nvSpPr>
-          <p:cNvPr id="8" name="Rounded Rectangle 7"/>
+          <p:cNvPr id="8" name="Rectangle 7"/>
           <p:cNvSpPr/>
           <p:nvPr/>
         </p:nvSpPr>
         <p:spPr>
           <a:xfrm>
-            <a:off x="4297680" y="1783080"/>
-            <a:ext cx="3566160" cy="594360"/>
-          </a:xfrm>
-          <a:prstGeom prst="roundRect">
+            <a:off x="594360" y="1828800"/>
+            <a:ext cx="10972800" cy="566928"/>
+          </a:xfrm>
+          <a:prstGeom prst="rect">
             <a:avLst/>
           </a:prstGeom>
           <a:solidFill>
@@ -5796,25 +5811,25 @@
         </p:nvSpPr>
         <p:spPr>
           <a:xfrm>
-            <a:off x="4434840" y="1856231"/>
-            <a:ext cx="3291840" cy="411480"/>
-          </a:xfrm>
-          <a:prstGeom prst="rect">
-            <a:avLst/>
-          </a:prstGeom>
-          <a:noFill/>
-        </p:spPr>
-        <p:txBody>
-          <a:bodyPr wrap="square" lIns="18288" rIns="18288" tIns="27432" bIns="0">
-            <a:spAutoFit/>
-          </a:bodyPr>
-          <a:lstStyle/>
-          <a:p>
-            <a:pPr algn="ctr">
-              <a:spcAft>
-                <a:spcPts val="1000"/>
-              </a:spcAft>
-              <a:defRPr sz="2200" b="1">
+            <a:off x="731520" y="1920240"/>
+            <a:ext cx="2926080" cy="438912"/>
+          </a:xfrm>
+          <a:prstGeom prst="rect">
+            <a:avLst/>
+          </a:prstGeom>
+          <a:noFill/>
+        </p:spPr>
+        <p:txBody>
+          <a:bodyPr wrap="square" lIns="18288" rIns="18288" tIns="27432" bIns="0">
+            <a:spAutoFit/>
+          </a:bodyPr>
+          <a:lstStyle/>
+          <a:p>
+            <a:pPr>
+              <a:spcAft>
+                <a:spcPts val="1000"/>
+              </a:spcAft>
+              <a:defRPr sz="1700" b="1">
                 <a:solidFill>
                   <a:srgbClr val="FFFFFF"/>
                 </a:solidFill>
@@ -5822,93 +5837,101 @@
               </a:defRPr>
             </a:pPr>
             <a:r>
-              <a:t>USDA CSV ZIP</a:t>
-            </a:r>
-          </a:p>
-        </p:txBody>
-      </p:sp>
-      <p:cxnSp>
-        <p:nvCxnSpPr>
-          <p:cNvPr id="10" name="Connector 9"/>
-          <p:cNvCxnSpPr/>
-          <p:nvPr/>
-        </p:nvCxnSpPr>
-        <p:spPr>
-          <a:xfrm flipH="1">
-            <a:off x="2743200" y="2377440"/>
-            <a:ext cx="1965960" cy="365760"/>
-          </a:xfrm>
-          <a:prstGeom prst="line">
-            <a:avLst/>
-          </a:prstGeom>
-          <a:ln w="25400">
-            <a:solidFill>
-              <a:srgbClr val="194F8E"/>
-            </a:solidFill>
-          </a:ln>
-        </p:spPr>
-        <p:style>
-          <a:lnRef idx="2">
-            <a:schemeClr val="accent1"/>
-          </a:lnRef>
-          <a:fillRef idx="0">
-            <a:schemeClr val="accent1"/>
-          </a:fillRef>
-          <a:effectRef idx="1">
-            <a:schemeClr val="accent1"/>
-          </a:effectRef>
-          <a:fontRef idx="minor">
-            <a:schemeClr val="tx1"/>
-          </a:fontRef>
-        </p:style>
-      </p:cxnSp>
-      <p:cxnSp>
-        <p:nvCxnSpPr>
-          <p:cNvPr id="11" name="Connector 10"/>
-          <p:cNvCxnSpPr/>
-          <p:nvPr/>
-        </p:nvCxnSpPr>
-        <p:spPr>
-          <a:xfrm>
-            <a:off x="7452360" y="2377440"/>
-            <a:ext cx="1874520" cy="365760"/>
-          </a:xfrm>
-          <a:prstGeom prst="line">
-            <a:avLst/>
-          </a:prstGeom>
-          <a:ln w="25400">
-            <a:solidFill>
-              <a:srgbClr val="194F8E"/>
-            </a:solidFill>
-          </a:ln>
-        </p:spPr>
-        <p:style>
-          <a:lnRef idx="2">
-            <a:schemeClr val="accent1"/>
-          </a:lnRef>
-          <a:fillRef idx="0">
-            <a:schemeClr val="accent1"/>
-          </a:fillRef>
-          <a:effectRef idx="1">
-            <a:schemeClr val="accent1"/>
-          </a:effectRef>
-          <a:fontRef idx="minor">
-            <a:schemeClr val="tx1"/>
-          </a:fontRef>
-        </p:style>
-      </p:cxnSp>
-      <p:sp>
-        <p:nvSpPr>
-          <p:cNvPr id="12" name="Rounded Rectangle 11"/>
+              <a:t>Source file</a:t>
+            </a:r>
+          </a:p>
+        </p:txBody>
+      </p:sp>
+      <p:sp>
+        <p:nvSpPr>
+          <p:cNvPr id="10" name="TextBox 9"/>
+          <p:cNvSpPr txBox="1"/>
+          <p:nvPr/>
+        </p:nvSpPr>
+        <p:spPr>
+          <a:xfrm>
+            <a:off x="3886200" y="1920240"/>
+            <a:ext cx="4297680" cy="438912"/>
+          </a:xfrm>
+          <a:prstGeom prst="rect">
+            <a:avLst/>
+          </a:prstGeom>
+          <a:noFill/>
+        </p:spPr>
+        <p:txBody>
+          <a:bodyPr wrap="square" lIns="18288" rIns="18288" tIns="27432" bIns="0">
+            <a:spAutoFit/>
+          </a:bodyPr>
+          <a:lstStyle/>
+          <a:p>
+            <a:pPr>
+              <a:spcAft>
+                <a:spcPts val="1000"/>
+              </a:spcAft>
+              <a:defRPr sz="1700" b="1">
+                <a:solidFill>
+                  <a:srgbClr val="FFFFFF"/>
+                </a:solidFill>
+                <a:latin typeface="Aptos"/>
+              </a:defRPr>
+            </a:pPr>
+            <a:r>
+              <a:t>What it contains</a:t>
+            </a:r>
+          </a:p>
+        </p:txBody>
+      </p:sp>
+      <p:sp>
+        <p:nvSpPr>
+          <p:cNvPr id="11" name="TextBox 10"/>
+          <p:cNvSpPr txBox="1"/>
+          <p:nvPr/>
+        </p:nvSpPr>
+        <p:spPr>
+          <a:xfrm>
+            <a:off x="8412480" y="1920240"/>
+            <a:ext cx="3063240" cy="438912"/>
+          </a:xfrm>
+          <a:prstGeom prst="rect">
+            <a:avLst/>
+          </a:prstGeom>
+          <a:noFill/>
+        </p:spPr>
+        <p:txBody>
+          <a:bodyPr wrap="square" lIns="18288" rIns="18288" tIns="27432" bIns="0">
+            <a:spAutoFit/>
+          </a:bodyPr>
+          <a:lstStyle/>
+          <a:p>
+            <a:pPr>
+              <a:spcAft>
+                <a:spcPts val="1000"/>
+              </a:spcAft>
+              <a:defRPr sz="1700" b="1">
+                <a:solidFill>
+                  <a:srgbClr val="FFFFFF"/>
+                </a:solidFill>
+                <a:latin typeface="Aptos"/>
+              </a:defRPr>
+            </a:pPr>
+            <a:r>
+              <a:t>How it connects</a:t>
+            </a:r>
+          </a:p>
+        </p:txBody>
+      </p:sp>
+      <p:sp>
+        <p:nvSpPr>
+          <p:cNvPr id="12" name="Rectangle 11"/>
           <p:cNvSpPr/>
           <p:nvPr/>
         </p:nvSpPr>
         <p:spPr>
           <a:xfrm>
-            <a:off x="548640" y="2743200"/>
-            <a:ext cx="5349240" cy="2377440"/>
-          </a:xfrm>
-          <a:prstGeom prst="roundRect">
+            <a:off x="594360" y="2395728"/>
+            <a:ext cx="10972800" cy="566928"/>
+          </a:xfrm>
+          <a:prstGeom prst="rect">
             <a:avLst/>
           </a:prstGeom>
           <a:solidFill>
@@ -5948,8 +5971,8 @@
         </p:nvSpPr>
         <p:spPr>
           <a:xfrm>
-            <a:off x="749808" y="2926080"/>
-            <a:ext cx="4946903" cy="320040"/>
+            <a:off x="731520" y="2487168"/>
+            <a:ext cx="2926080" cy="438912"/>
           </a:xfrm>
           <a:prstGeom prst="rect">
             <a:avLst/>
@@ -5966,15 +5989,15 @@
               <a:spcAft>
                 <a:spcPts val="1000"/>
               </a:spcAft>
-              <a:defRPr sz="1100" b="1">
-                <a:solidFill>
-                  <a:srgbClr val="194F8E"/>
-                </a:solidFill>
-                <a:latin typeface="Aptos"/>
-              </a:defRPr>
-            </a:pPr>
-            <a:r>
-              <a:t>THEME 1</a:t>
+              <a:defRPr sz="1700" b="0">
+                <a:solidFill>
+                  <a:srgbClr val="2A3140"/>
+                </a:solidFill>
+                <a:latin typeface="Aptos"/>
+              </a:defRPr>
+            </a:pPr>
+            <a:r>
+              <a:t>food.csv</a:t>
             </a:r>
           </a:p>
         </p:txBody>
@@ -5987,8 +6010,8 @@
         </p:nvSpPr>
         <p:spPr>
           <a:xfrm>
-            <a:off x="749808" y="3337560"/>
-            <a:ext cx="4946903" cy="594360"/>
+            <a:off x="3886200" y="2487168"/>
+            <a:ext cx="4297680" cy="438912"/>
           </a:xfrm>
           <a:prstGeom prst="rect">
             <a:avLst/>
@@ -6005,15 +6028,15 @@
               <a:spcAft>
                 <a:spcPts val="1000"/>
               </a:spcAft>
-              <a:defRPr sz="2200" b="1">
-                <a:solidFill>
-                  <a:srgbClr val="14284B"/>
-                </a:solidFill>
-                <a:latin typeface="Aptos"/>
-              </a:defRPr>
-            </a:pPr>
-            <a:r>
-              <a:t>MongoDB</a:t>
+              <a:defRPr sz="1700" b="0">
+                <a:solidFill>
+                  <a:srgbClr val="2A3140"/>
+                </a:solidFill>
+                <a:latin typeface="Aptos"/>
+              </a:defRPr>
+            </a:pPr>
+            <a:r>
+              <a:t>Food ID, name, food type</a:t>
             </a:r>
           </a:p>
         </p:txBody>
@@ -6026,8 +6049,8 @@
         </p:nvSpPr>
         <p:spPr>
           <a:xfrm>
-            <a:off x="749808" y="4206240"/>
-            <a:ext cx="4946903" cy="868680"/>
+            <a:off x="8412480" y="2487168"/>
+            <a:ext cx="3063240" cy="438912"/>
           </a:xfrm>
           <a:prstGeom prst="rect">
             <a:avLst/>
@@ -6052,27 +6075,27 @@
               </a:defRPr>
             </a:pPr>
             <a:r>
-              <a:t>Ingest → index → aggregate → profile</a:t>
-            </a:r>
-          </a:p>
-        </p:txBody>
-      </p:sp>
-      <p:sp>
-        <p:nvSpPr>
-          <p:cNvPr id="16" name="Rounded Rectangle 15"/>
+              <a:t>fdc_id</a:t>
+            </a:r>
+          </a:p>
+        </p:txBody>
+      </p:sp>
+      <p:sp>
+        <p:nvSpPr>
+          <p:cNvPr id="16" name="Rectangle 15"/>
           <p:cNvSpPr/>
           <p:nvPr/>
         </p:nvSpPr>
         <p:spPr>
           <a:xfrm>
-            <a:off x="6263640" y="2743200"/>
-            <a:ext cx="5349240" cy="2377440"/>
-          </a:xfrm>
-          <a:prstGeom prst="roundRect">
+            <a:off x="594360" y="2962656"/>
+            <a:ext cx="10972800" cy="566928"/>
+          </a:xfrm>
+          <a:prstGeom prst="rect">
             <a:avLst/>
           </a:prstGeom>
           <a:solidFill>
-            <a:srgbClr val="EDF3FA"/>
+            <a:srgbClr val="F7F9FC"/>
           </a:solidFill>
           <a:ln>
             <a:noFill/>
@@ -6108,8 +6131,8 @@
         </p:nvSpPr>
         <p:spPr>
           <a:xfrm>
-            <a:off x="6464807" y="2926080"/>
-            <a:ext cx="4946903" cy="320040"/>
+            <a:off x="731520" y="3054096"/>
+            <a:ext cx="2926080" cy="438912"/>
           </a:xfrm>
           <a:prstGeom prst="rect">
             <a:avLst/>
@@ -6126,15 +6149,15 @@
               <a:spcAft>
                 <a:spcPts val="1000"/>
               </a:spcAft>
-              <a:defRPr sz="1100" b="1">
-                <a:solidFill>
-                  <a:srgbClr val="194F8E"/>
-                </a:solidFill>
-                <a:latin typeface="Aptos"/>
-              </a:defRPr>
-            </a:pPr>
-            <a:r>
-              <a:t>THEMES 2 &amp; 3</a:t>
+              <a:defRPr sz="1700" b="0">
+                <a:solidFill>
+                  <a:srgbClr val="2A3140"/>
+                </a:solidFill>
+                <a:latin typeface="Aptos"/>
+              </a:defRPr>
+            </a:pPr>
+            <a:r>
+              <a:t>food_nutrient.csv</a:t>
             </a:r>
           </a:p>
         </p:txBody>
@@ -6147,8 +6170,8 @@
         </p:nvSpPr>
         <p:spPr>
           <a:xfrm>
-            <a:off x="6464807" y="3337560"/>
-            <a:ext cx="4946903" cy="594360"/>
+            <a:off x="3886200" y="3054096"/>
+            <a:ext cx="4297680" cy="438912"/>
           </a:xfrm>
           <a:prstGeom prst="rect">
             <a:avLst/>
@@ -6165,15 +6188,15 @@
               <a:spcAft>
                 <a:spcPts val="1000"/>
               </a:spcAft>
-              <a:defRPr sz="2200" b="1">
-                <a:solidFill>
-                  <a:srgbClr val="14284B"/>
-                </a:solidFill>
-                <a:latin typeface="Aptos"/>
-              </a:defRPr>
-            </a:pPr>
-            <a:r>
-              <a:t>Prepared files in HDFS</a:t>
+              <a:defRPr sz="1700" b="0">
+                <a:solidFill>
+                  <a:srgbClr val="2A3140"/>
+                </a:solidFill>
+                <a:latin typeface="Aptos"/>
+              </a:defRPr>
+            </a:pPr>
+            <a:r>
+              <a:t>Food ID, nutrient ID, amount</a:t>
             </a:r>
           </a:p>
         </p:txBody>
@@ -6186,8 +6209,8 @@
         </p:nvSpPr>
         <p:spPr>
           <a:xfrm>
-            <a:off x="6464807" y="4206240"/>
-            <a:ext cx="4946903" cy="868680"/>
+            <a:off x="8412480" y="3054096"/>
+            <a:ext cx="3063240" cy="438912"/>
           </a:xfrm>
           <a:prstGeom prst="rect">
             <a:avLst/>
@@ -6212,39 +6235,23 @@
               </a:defRPr>
             </a:pPr>
             <a:r>
-              <a:t>MapReduce summaries</a:t>
-            </a:r>
-          </a:p>
-          <a:p>
-            <a:pPr>
-              <a:spcAft>
-                <a:spcPts val="1000"/>
-              </a:spcAft>
-              <a:defRPr sz="1700" b="0">
-                <a:solidFill>
-                  <a:srgbClr val="2A3140"/>
-                </a:solidFill>
-                <a:latin typeface="Aptos"/>
-              </a:defRPr>
-            </a:pPr>
-            <a:r>
-              <a:t>Pig cleaning → Hive Text + RCFile</a:t>
-            </a:r>
-          </a:p>
-        </p:txBody>
-      </p:sp>
-      <p:sp>
-        <p:nvSpPr>
-          <p:cNvPr id="20" name="Rounded Rectangle 19"/>
+              <a:t>fdc_id + nutrient_id</a:t>
+            </a:r>
+          </a:p>
+        </p:txBody>
+      </p:sp>
+      <p:sp>
+        <p:nvSpPr>
+          <p:cNvPr id="20" name="Rectangle 19"/>
           <p:cNvSpPr/>
           <p:nvPr/>
         </p:nvSpPr>
         <p:spPr>
           <a:xfrm>
-            <a:off x="2103120" y="5486400"/>
-            <a:ext cx="7955279" cy="594360"/>
-          </a:xfrm>
-          <a:prstGeom prst="roundRect">
+            <a:off x="594360" y="3529584"/>
+            <a:ext cx="10972800" cy="566928"/>
+          </a:xfrm>
+          <a:prstGeom prst="rect">
             <a:avLst/>
           </a:prstGeom>
           <a:solidFill>
@@ -6284,8 +6291,168 @@
         </p:nvSpPr>
         <p:spPr>
           <a:xfrm>
-            <a:off x="2240280" y="5559552"/>
-            <a:ext cx="7680960" cy="411480"/>
+            <a:off x="731520" y="3621024"/>
+            <a:ext cx="2926080" cy="438912"/>
+          </a:xfrm>
+          <a:prstGeom prst="rect">
+            <a:avLst/>
+          </a:prstGeom>
+          <a:noFill/>
+        </p:spPr>
+        <p:txBody>
+          <a:bodyPr wrap="square" lIns="18288" rIns="18288" tIns="27432" bIns="0">
+            <a:spAutoFit/>
+          </a:bodyPr>
+          <a:lstStyle/>
+          <a:p>
+            <a:pPr>
+              <a:spcAft>
+                <a:spcPts val="1000"/>
+              </a:spcAft>
+              <a:defRPr sz="1700" b="0">
+                <a:solidFill>
+                  <a:srgbClr val="2A3140"/>
+                </a:solidFill>
+                <a:latin typeface="Aptos"/>
+              </a:defRPr>
+            </a:pPr>
+            <a:r>
+              <a:t>nutrient.csv</a:t>
+            </a:r>
+          </a:p>
+        </p:txBody>
+      </p:sp>
+      <p:sp>
+        <p:nvSpPr>
+          <p:cNvPr id="22" name="TextBox 21"/>
+          <p:cNvSpPr txBox="1"/>
+          <p:nvPr/>
+        </p:nvSpPr>
+        <p:spPr>
+          <a:xfrm>
+            <a:off x="3886200" y="3621024"/>
+            <a:ext cx="4297680" cy="438912"/>
+          </a:xfrm>
+          <a:prstGeom prst="rect">
+            <a:avLst/>
+          </a:prstGeom>
+          <a:noFill/>
+        </p:spPr>
+        <p:txBody>
+          <a:bodyPr wrap="square" lIns="18288" rIns="18288" tIns="27432" bIns="0">
+            <a:spAutoFit/>
+          </a:bodyPr>
+          <a:lstStyle/>
+          <a:p>
+            <a:pPr>
+              <a:spcAft>
+                <a:spcPts val="1000"/>
+              </a:spcAft>
+              <a:defRPr sz="1700" b="0">
+                <a:solidFill>
+                  <a:srgbClr val="2A3140"/>
+                </a:solidFill>
+                <a:latin typeface="Aptos"/>
+              </a:defRPr>
+            </a:pPr>
+            <a:r>
+              <a:t>Nutrient name and unit</a:t>
+            </a:r>
+          </a:p>
+        </p:txBody>
+      </p:sp>
+      <p:sp>
+        <p:nvSpPr>
+          <p:cNvPr id="23" name="TextBox 22"/>
+          <p:cNvSpPr txBox="1"/>
+          <p:nvPr/>
+        </p:nvSpPr>
+        <p:spPr>
+          <a:xfrm>
+            <a:off x="8412480" y="3621024"/>
+            <a:ext cx="3063240" cy="438912"/>
+          </a:xfrm>
+          <a:prstGeom prst="rect">
+            <a:avLst/>
+          </a:prstGeom>
+          <a:noFill/>
+        </p:spPr>
+        <p:txBody>
+          <a:bodyPr wrap="square" lIns="18288" rIns="18288" tIns="27432" bIns="0">
+            <a:spAutoFit/>
+          </a:bodyPr>
+          <a:lstStyle/>
+          <a:p>
+            <a:pPr>
+              <a:spcAft>
+                <a:spcPts val="1000"/>
+              </a:spcAft>
+              <a:defRPr sz="1700" b="0">
+                <a:solidFill>
+                  <a:srgbClr val="2A3140"/>
+                </a:solidFill>
+                <a:latin typeface="Aptos"/>
+              </a:defRPr>
+            </a:pPr>
+            <a:r>
+              <a:t>nutrient_id</a:t>
+            </a:r>
+          </a:p>
+        </p:txBody>
+      </p:sp>
+      <p:sp>
+        <p:nvSpPr>
+          <p:cNvPr id="24" name="Rectangle 23"/>
+          <p:cNvSpPr/>
+          <p:nvPr/>
+        </p:nvSpPr>
+        <p:spPr>
+          <a:xfrm>
+            <a:off x="594360" y="4480560"/>
+            <a:ext cx="3200400" cy="822960"/>
+          </a:xfrm>
+          <a:prstGeom prst="rect">
+            <a:avLst/>
+          </a:prstGeom>
+          <a:solidFill>
+            <a:srgbClr val="EDF3FA"/>
+          </a:solidFill>
+          <a:ln>
+            <a:noFill/>
+          </a:ln>
+        </p:spPr>
+        <p:style>
+          <a:lnRef idx="1">
+            <a:schemeClr val="accent1"/>
+          </a:lnRef>
+          <a:fillRef idx="3">
+            <a:schemeClr val="accent1"/>
+          </a:fillRef>
+          <a:effectRef idx="2">
+            <a:schemeClr val="accent1"/>
+          </a:effectRef>
+          <a:fontRef idx="minor">
+            <a:schemeClr val="lt1"/>
+          </a:fontRef>
+        </p:style>
+        <p:txBody>
+          <a:bodyPr rtlCol="0" anchor="ctr"/>
+          <a:lstStyle/>
+          <a:p>
+            <a:pPr algn="ctr"/>
+          </a:p>
+        </p:txBody>
+      </p:sp>
+      <p:sp>
+        <p:nvSpPr>
+          <p:cNvPr id="25" name="TextBox 24"/>
+          <p:cNvSpPr txBox="1"/>
+          <p:nvPr/>
+        </p:nvSpPr>
+        <p:spPr>
+          <a:xfrm>
+            <a:off x="704088" y="4626864"/>
+            <a:ext cx="2980944" cy="640080"/>
           </a:xfrm>
           <a:prstGeom prst="rect">
             <a:avLst/>
@@ -6302,7 +6469,46 @@
               <a:spcAft>
                 <a:spcPts val="1000"/>
               </a:spcAft>
-              <a:defRPr sz="2000" b="1">
+              <a:defRPr sz="1900" b="1">
+                <a:solidFill>
+                  <a:srgbClr val="14284B"/>
+                </a:solidFill>
+                <a:latin typeface="Aptos"/>
+              </a:defRPr>
+            </a:pPr>
+            <a:r>
+              <a:t>Food: WESSON Vegetable Oil</a:t>
+            </a:r>
+          </a:p>
+        </p:txBody>
+      </p:sp>
+      <p:sp>
+        <p:nvSpPr>
+          <p:cNvPr id="26" name="TextBox 25"/>
+          <p:cNvSpPr txBox="1"/>
+          <p:nvPr/>
+        </p:nvSpPr>
+        <p:spPr>
+          <a:xfrm>
+            <a:off x="3840480" y="4599432"/>
+            <a:ext cx="457200" cy="548640"/>
+          </a:xfrm>
+          <a:prstGeom prst="rect">
+            <a:avLst/>
+          </a:prstGeom>
+          <a:noFill/>
+        </p:spPr>
+        <p:txBody>
+          <a:bodyPr wrap="square" lIns="18288" rIns="18288" tIns="27432" bIns="0">
+            <a:spAutoFit/>
+          </a:bodyPr>
+          <a:lstStyle/>
+          <a:p>
+            <a:pPr algn="ctr">
+              <a:spcAft>
+                <a:spcPts val="1000"/>
+              </a:spcAft>
+              <a:defRPr sz="2500" b="1">
                 <a:solidFill>
                   <a:srgbClr val="194F8E"/>
                 </a:solidFill>
@@ -6310,7 +6516,265 @@
               </a:defRPr>
             </a:pPr>
             <a:r>
-              <a:t>Reconcile answers → save evidence → Flask dashboard</a:t>
+              <a:t>→</a:t>
+            </a:r>
+          </a:p>
+        </p:txBody>
+      </p:sp>
+      <p:sp>
+        <p:nvSpPr>
+          <p:cNvPr id="27" name="Rectangle 26"/>
+          <p:cNvSpPr/>
+          <p:nvPr/>
+        </p:nvSpPr>
+        <p:spPr>
+          <a:xfrm>
+            <a:off x="4389120" y="4480560"/>
+            <a:ext cx="2971800" cy="822960"/>
+          </a:xfrm>
+          <a:prstGeom prst="rect">
+            <a:avLst/>
+          </a:prstGeom>
+          <a:solidFill>
+            <a:srgbClr val="EDF3FA"/>
+          </a:solidFill>
+          <a:ln>
+            <a:noFill/>
+          </a:ln>
+        </p:spPr>
+        <p:style>
+          <a:lnRef idx="1">
+            <a:schemeClr val="accent1"/>
+          </a:lnRef>
+          <a:fillRef idx="3">
+            <a:schemeClr val="accent1"/>
+          </a:fillRef>
+          <a:effectRef idx="2">
+            <a:schemeClr val="accent1"/>
+          </a:effectRef>
+          <a:fontRef idx="minor">
+            <a:schemeClr val="lt1"/>
+          </a:fontRef>
+        </p:style>
+        <p:txBody>
+          <a:bodyPr rtlCol="0" anchor="ctr"/>
+          <a:lstStyle/>
+          <a:p>
+            <a:pPr algn="ctr"/>
+          </a:p>
+        </p:txBody>
+      </p:sp>
+      <p:sp>
+        <p:nvSpPr>
+          <p:cNvPr id="28" name="TextBox 27"/>
+          <p:cNvSpPr txBox="1"/>
+          <p:nvPr/>
+        </p:nvSpPr>
+        <p:spPr>
+          <a:xfrm>
+            <a:off x="4498848" y="4626864"/>
+            <a:ext cx="2752344" cy="640080"/>
+          </a:xfrm>
+          <a:prstGeom prst="rect">
+            <a:avLst/>
+          </a:prstGeom>
+          <a:noFill/>
+        </p:spPr>
+        <p:txBody>
+          <a:bodyPr wrap="square" lIns="18288" rIns="18288" tIns="27432" bIns="0">
+            <a:spAutoFit/>
+          </a:bodyPr>
+          <a:lstStyle/>
+          <a:p>
+            <a:pPr algn="ctr">
+              <a:spcAft>
+                <a:spcPts val="1000"/>
+              </a:spcAft>
+              <a:defRPr sz="1900" b="1">
+                <a:solidFill>
+                  <a:srgbClr val="14284B"/>
+                </a:solidFill>
+                <a:latin typeface="Aptos"/>
+              </a:defRPr>
+            </a:pPr>
+            <a:r>
+              <a:t>fdc_id: 1105904</a:t>
+            </a:r>
+          </a:p>
+        </p:txBody>
+      </p:sp>
+      <p:sp>
+        <p:nvSpPr>
+          <p:cNvPr id="29" name="TextBox 28"/>
+          <p:cNvSpPr txBox="1"/>
+          <p:nvPr/>
+        </p:nvSpPr>
+        <p:spPr>
+          <a:xfrm>
+            <a:off x="7434072" y="4599432"/>
+            <a:ext cx="457200" cy="548640"/>
+          </a:xfrm>
+          <a:prstGeom prst="rect">
+            <a:avLst/>
+          </a:prstGeom>
+          <a:noFill/>
+        </p:spPr>
+        <p:txBody>
+          <a:bodyPr wrap="square" lIns="18288" rIns="18288" tIns="27432" bIns="0">
+            <a:spAutoFit/>
+          </a:bodyPr>
+          <a:lstStyle/>
+          <a:p>
+            <a:pPr algn="ctr">
+              <a:spcAft>
+                <a:spcPts val="1000"/>
+              </a:spcAft>
+              <a:defRPr sz="2500" b="1">
+                <a:solidFill>
+                  <a:srgbClr val="194F8E"/>
+                </a:solidFill>
+                <a:latin typeface="Aptos"/>
+              </a:defRPr>
+            </a:pPr>
+            <a:r>
+              <a:t>→</a:t>
+            </a:r>
+          </a:p>
+        </p:txBody>
+      </p:sp>
+      <p:sp>
+        <p:nvSpPr>
+          <p:cNvPr id="30" name="Rectangle 29"/>
+          <p:cNvSpPr/>
+          <p:nvPr/>
+        </p:nvSpPr>
+        <p:spPr>
+          <a:xfrm>
+            <a:off x="8001000" y="4480560"/>
+            <a:ext cx="3566160" cy="822960"/>
+          </a:xfrm>
+          <a:prstGeom prst="rect">
+            <a:avLst/>
+          </a:prstGeom>
+          <a:solidFill>
+            <a:srgbClr val="EDF3FA"/>
+          </a:solidFill>
+          <a:ln>
+            <a:noFill/>
+          </a:ln>
+        </p:spPr>
+        <p:style>
+          <a:lnRef idx="1">
+            <a:schemeClr val="accent1"/>
+          </a:lnRef>
+          <a:fillRef idx="3">
+            <a:schemeClr val="accent1"/>
+          </a:fillRef>
+          <a:effectRef idx="2">
+            <a:schemeClr val="accent1"/>
+          </a:effectRef>
+          <a:fontRef idx="minor">
+            <a:schemeClr val="lt1"/>
+          </a:fontRef>
+        </p:style>
+        <p:txBody>
+          <a:bodyPr rtlCol="0" anchor="ctr"/>
+          <a:lstStyle/>
+          <a:p>
+            <a:pPr algn="ctr"/>
+          </a:p>
+        </p:txBody>
+      </p:sp>
+      <p:sp>
+        <p:nvSpPr>
+          <p:cNvPr id="31" name="TextBox 30"/>
+          <p:cNvSpPr txBox="1"/>
+          <p:nvPr/>
+        </p:nvSpPr>
+        <p:spPr>
+          <a:xfrm>
+            <a:off x="8110727" y="4626864"/>
+            <a:ext cx="3346704" cy="640080"/>
+          </a:xfrm>
+          <a:prstGeom prst="rect">
+            <a:avLst/>
+          </a:prstGeom>
+          <a:noFill/>
+        </p:spPr>
+        <p:txBody>
+          <a:bodyPr wrap="square" lIns="18288" rIns="18288" tIns="27432" bIns="0">
+            <a:spAutoFit/>
+          </a:bodyPr>
+          <a:lstStyle/>
+          <a:p>
+            <a:pPr algn="ctr">
+              <a:spcAft>
+                <a:spcPts val="1000"/>
+              </a:spcAft>
+              <a:defRPr sz="1900" b="1">
+                <a:solidFill>
+                  <a:srgbClr val="14284B"/>
+                </a:solidFill>
+                <a:latin typeface="Aptos"/>
+              </a:defRPr>
+            </a:pPr>
+            <a:r>
+              <a:t>Its linked nutrient records</a:t>
+            </a:r>
+          </a:p>
+        </p:txBody>
+      </p:sp>
+      <p:sp>
+        <p:nvSpPr>
+          <p:cNvPr id="32" name="TextBox 31"/>
+          <p:cNvSpPr txBox="1"/>
+          <p:nvPr/>
+        </p:nvSpPr>
+        <p:spPr>
+          <a:xfrm>
+            <a:off x="640080" y="5596128"/>
+            <a:ext cx="10881360" cy="594360"/>
+          </a:xfrm>
+          <a:prstGeom prst="rect">
+            <a:avLst/>
+          </a:prstGeom>
+          <a:noFill/>
+        </p:spPr>
+        <p:txBody>
+          <a:bodyPr wrap="square" lIns="18288" rIns="18288" tIns="27432" bIns="0">
+            <a:spAutoFit/>
+          </a:bodyPr>
+          <a:lstStyle/>
+          <a:p>
+            <a:pPr>
+              <a:spcAft>
+                <a:spcPts val="1000"/>
+              </a:spcAft>
+              <a:defRPr sz="1800" b="0">
+                <a:solidFill>
+                  <a:srgbClr val="596678"/>
+                </a:solidFill>
+                <a:latin typeface="Aptos"/>
+              </a:defRPr>
+            </a:pPr>
+            <a:r>
+              <a:t>Source: October 2024 USDA CSV package. Full release: 2.06 million foods.</a:t>
+            </a:r>
+          </a:p>
+          <a:p>
+            <a:pPr>
+              <a:spcAft>
+                <a:spcPts val="1000"/>
+              </a:spcAft>
+              <a:defRPr sz="1800" b="0">
+                <a:solidFill>
+                  <a:srgbClr val="596678"/>
+                </a:solidFill>
+                <a:latin typeface="Aptos"/>
+              </a:defRPr>
+            </a:pPr>
+            <a:r>
+              <a:t>Presentation test: 50,000 foods + all 1,126,928 linked nutrient records.</a:t>
             </a:r>
           </a:p>
         </p:txBody>
@@ -6418,7 +6882,7 @@
               </a:defRPr>
             </a:pPr>
             <a:r>
-              <a:t>THEME 1 · MONGODB</a:t>
+              <a:t>SYSTEM ARCHITECTURE</a:t>
             </a:r>
           </a:p>
         </p:txBody>
@@ -6457,7 +6921,7 @@
               </a:defRPr>
             </a:pPr>
             <a:r>
-              <a:t>Store documents, summarize data, measure searches</a:t>
+              <a:t>The same linked data follows two analysis paths</a:t>
             </a:r>
           </a:p>
         </p:txBody>
@@ -6585,16 +7049,16 @@
       </p:sp>
       <p:sp>
         <p:nvSpPr>
-          <p:cNvPr id="8" name="Rounded Rectangle 7"/>
+          <p:cNvPr id="8" name="Rectangle 7"/>
           <p:cNvSpPr/>
           <p:nvPr/>
         </p:nvSpPr>
         <p:spPr>
           <a:xfrm>
-            <a:off x="548640" y="1920240"/>
-            <a:ext cx="5349240" cy="2971800"/>
-          </a:xfrm>
-          <a:prstGeom prst="roundRect">
+            <a:off x="594360" y="1920240"/>
+            <a:ext cx="2148840" cy="777240"/>
+          </a:xfrm>
+          <a:prstGeom prst="rect">
             <a:avLst/>
           </a:prstGeom>
           <a:solidFill>
@@ -6634,25 +7098,64 @@
         </p:nvSpPr>
         <p:spPr>
           <a:xfrm>
-            <a:off x="749808" y="2103120"/>
-            <a:ext cx="4946903" cy="320040"/>
-          </a:xfrm>
-          <a:prstGeom prst="rect">
-            <a:avLst/>
-          </a:prstGeom>
-          <a:noFill/>
-        </p:spPr>
-        <p:txBody>
-          <a:bodyPr wrap="square" lIns="18288" rIns="18288" tIns="27432" bIns="0">
-            <a:spAutoFit/>
-          </a:bodyPr>
-          <a:lstStyle/>
-          <a:p>
-            <a:pPr>
-              <a:spcAft>
-                <a:spcPts val="1000"/>
-              </a:spcAft>
-              <a:defRPr sz="1100" b="1">
+            <a:off x="704088" y="2066544"/>
+            <a:ext cx="1929384" cy="594359"/>
+          </a:xfrm>
+          <a:prstGeom prst="rect">
+            <a:avLst/>
+          </a:prstGeom>
+          <a:noFill/>
+        </p:spPr>
+        <p:txBody>
+          <a:bodyPr wrap="square" lIns="18288" rIns="18288" tIns="27432" bIns="0">
+            <a:spAutoFit/>
+          </a:bodyPr>
+          <a:lstStyle/>
+          <a:p>
+            <a:pPr algn="ctr">
+              <a:spcAft>
+                <a:spcPts val="1000"/>
+              </a:spcAft>
+              <a:defRPr sz="1900" b="1">
+                <a:solidFill>
+                  <a:srgbClr val="14284B"/>
+                </a:solidFill>
+                <a:latin typeface="Aptos"/>
+              </a:defRPr>
+            </a:pPr>
+            <a:r>
+              <a:t>USDA CSV ZIP</a:t>
+            </a:r>
+          </a:p>
+        </p:txBody>
+      </p:sp>
+      <p:sp>
+        <p:nvSpPr>
+          <p:cNvPr id="10" name="TextBox 9"/>
+          <p:cNvSpPr txBox="1"/>
+          <p:nvPr/>
+        </p:nvSpPr>
+        <p:spPr>
+          <a:xfrm>
+            <a:off x="2788920" y="2011680"/>
+            <a:ext cx="457200" cy="548640"/>
+          </a:xfrm>
+          <a:prstGeom prst="rect">
+            <a:avLst/>
+          </a:prstGeom>
+          <a:noFill/>
+        </p:spPr>
+        <p:txBody>
+          <a:bodyPr wrap="square" lIns="18288" rIns="18288" tIns="27432" bIns="0">
+            <a:spAutoFit/>
+          </a:bodyPr>
+          <a:lstStyle/>
+          <a:p>
+            <a:pPr algn="ctr">
+              <a:spcAft>
+                <a:spcPts val="1000"/>
+              </a:spcAft>
+              <a:defRPr sz="2500" b="1">
                 <a:solidFill>
                   <a:srgbClr val="194F8E"/>
                 </a:solidFill>
@@ -6660,117 +7163,23 @@
               </a:defRPr>
             </a:pPr>
             <a:r>
-              <a:t>INGESTION &amp; ANALYTICS</a:t>
-            </a:r>
-          </a:p>
-        </p:txBody>
-      </p:sp>
-      <p:sp>
-        <p:nvSpPr>
-          <p:cNvPr id="10" name="TextBox 9"/>
-          <p:cNvSpPr txBox="1"/>
-          <p:nvPr/>
-        </p:nvSpPr>
-        <p:spPr>
-          <a:xfrm>
-            <a:off x="749808" y="2514600"/>
-            <a:ext cx="4946903" cy="594360"/>
-          </a:xfrm>
-          <a:prstGeom prst="rect">
-            <a:avLst/>
-          </a:prstGeom>
-          <a:noFill/>
-        </p:spPr>
-        <p:txBody>
-          <a:bodyPr wrap="square" lIns="18288" rIns="18288" tIns="27432" bIns="0">
-            <a:spAutoFit/>
-          </a:bodyPr>
-          <a:lstStyle/>
-          <a:p>
-            <a:pPr>
-              <a:spcAft>
-                <a:spcPts val="1000"/>
-              </a:spcAft>
-              <a:defRPr sz="2200" b="1">
-                <a:solidFill>
-                  <a:srgbClr val="14284B"/>
-                </a:solidFill>
-                <a:latin typeface="Aptos"/>
-              </a:defRPr>
-            </a:pPr>
-            <a:r>
-              <a:t>From raw records to summaries</a:t>
-            </a:r>
-          </a:p>
-        </p:txBody>
-      </p:sp>
-      <p:sp>
-        <p:nvSpPr>
-          <p:cNvPr id="11" name="TextBox 10"/>
-          <p:cNvSpPr txBox="1"/>
-          <p:nvPr/>
-        </p:nvSpPr>
-        <p:spPr>
-          <a:xfrm>
-            <a:off x="749808" y="3383280"/>
-            <a:ext cx="4946903" cy="1463040"/>
-          </a:xfrm>
-          <a:prstGeom prst="rect">
-            <a:avLst/>
-          </a:prstGeom>
-          <a:noFill/>
-        </p:spPr>
-        <p:txBody>
-          <a:bodyPr wrap="square" lIns="18288" rIns="18288" tIns="27432" bIns="0">
-            <a:spAutoFit/>
-          </a:bodyPr>
-          <a:lstStyle/>
-          <a:p>
-            <a:pPr>
-              <a:spcAft>
-                <a:spcPts val="1000"/>
-              </a:spcAft>
-              <a:defRPr sz="1700" b="0">
-                <a:solidFill>
-                  <a:srgbClr val="2A3140"/>
-                </a:solidFill>
-                <a:latin typeface="Aptos"/>
-              </a:defRPr>
-            </a:pPr>
-            <a:r>
-              <a:t>Raw collections preserve source records.</a:t>
-            </a:r>
-          </a:p>
-          <a:p>
-            <a:pPr>
-              <a:spcAft>
-                <a:spcPts val="1000"/>
-              </a:spcAft>
-              <a:defRPr sz="1700" b="0">
-                <a:solidFill>
-                  <a:srgbClr val="2A3140"/>
-                </a:solidFill>
-                <a:latin typeface="Aptos"/>
-              </a:defRPr>
-            </a:pPr>
-            <a:r>
-              <a:t>Linked nutrient data supports analytical pipelines.</a:t>
-            </a:r>
-          </a:p>
-        </p:txBody>
-      </p:sp>
-      <p:sp>
-        <p:nvSpPr>
-          <p:cNvPr id="12" name="Rounded Rectangle 11"/>
+              <a:t>→</a:t>
+            </a:r>
+          </a:p>
+        </p:txBody>
+      </p:sp>
+      <p:sp>
+        <p:nvSpPr>
+          <p:cNvPr id="11" name="Rectangle 10"/>
           <p:cNvSpPr/>
           <p:nvPr/>
         </p:nvSpPr>
         <p:spPr>
           <a:xfrm>
-            <a:off x="6263640" y="1920240"/>
-            <a:ext cx="5349240" cy="2971800"/>
-          </a:xfrm>
-          <a:prstGeom prst="roundRect">
+            <a:off x="3337560" y="1920240"/>
+            <a:ext cx="2468880" cy="777240"/>
+          </a:xfrm>
+          <a:prstGeom prst="rect">
             <a:avLst/>
           </a:prstGeom>
           <a:solidFill>
@@ -6804,14 +7213,420 @@
       </p:sp>
       <p:sp>
         <p:nvSpPr>
+          <p:cNvPr id="12" name="TextBox 11"/>
+          <p:cNvSpPr txBox="1"/>
+          <p:nvPr/>
+        </p:nvSpPr>
+        <p:spPr>
+          <a:xfrm>
+            <a:off x="3447288" y="2066544"/>
+            <a:ext cx="2249424" cy="594359"/>
+          </a:xfrm>
+          <a:prstGeom prst="rect">
+            <a:avLst/>
+          </a:prstGeom>
+          <a:noFill/>
+        </p:spPr>
+        <p:txBody>
+          <a:bodyPr wrap="square" lIns="18288" rIns="18288" tIns="27432" bIns="0">
+            <a:spAutoFit/>
+          </a:bodyPr>
+          <a:lstStyle/>
+          <a:p>
+            <a:pPr algn="ctr">
+              <a:spcAft>
+                <a:spcPts val="1000"/>
+              </a:spcAft>
+              <a:defRPr sz="1900" b="1">
+                <a:solidFill>
+                  <a:srgbClr val="14284B"/>
+                </a:solidFill>
+                <a:latin typeface="Aptos"/>
+              </a:defRPr>
+            </a:pPr>
+            <a:r>
+              <a:t>MongoDB</a:t>
+            </a:r>
+          </a:p>
+        </p:txBody>
+      </p:sp>
+      <p:sp>
+        <p:nvSpPr>
           <p:cNvPr id="13" name="TextBox 12"/>
           <p:cNvSpPr txBox="1"/>
           <p:nvPr/>
         </p:nvSpPr>
         <p:spPr>
           <a:xfrm>
-            <a:off x="6464807" y="2103120"/>
-            <a:ext cx="4946903" cy="320040"/>
+            <a:off x="5852160" y="2011680"/>
+            <a:ext cx="457200" cy="548640"/>
+          </a:xfrm>
+          <a:prstGeom prst="rect">
+            <a:avLst/>
+          </a:prstGeom>
+          <a:noFill/>
+        </p:spPr>
+        <p:txBody>
+          <a:bodyPr wrap="square" lIns="18288" rIns="18288" tIns="27432" bIns="0">
+            <a:spAutoFit/>
+          </a:bodyPr>
+          <a:lstStyle/>
+          <a:p>
+            <a:pPr algn="ctr">
+              <a:spcAft>
+                <a:spcPts val="1000"/>
+              </a:spcAft>
+              <a:defRPr sz="2500" b="1">
+                <a:solidFill>
+                  <a:srgbClr val="194F8E"/>
+                </a:solidFill>
+                <a:latin typeface="Aptos"/>
+              </a:defRPr>
+            </a:pPr>
+            <a:r>
+              <a:t>→</a:t>
+            </a:r>
+          </a:p>
+        </p:txBody>
+      </p:sp>
+      <p:sp>
+        <p:nvSpPr>
+          <p:cNvPr id="14" name="Rectangle 13"/>
+          <p:cNvSpPr/>
+          <p:nvPr/>
+        </p:nvSpPr>
+        <p:spPr>
+          <a:xfrm>
+            <a:off x="6400800" y="1920240"/>
+            <a:ext cx="5120640" cy="777240"/>
+          </a:xfrm>
+          <a:prstGeom prst="rect">
+            <a:avLst/>
+          </a:prstGeom>
+          <a:solidFill>
+            <a:srgbClr val="EDF3FA"/>
+          </a:solidFill>
+          <a:ln>
+            <a:noFill/>
+          </a:ln>
+        </p:spPr>
+        <p:style>
+          <a:lnRef idx="1">
+            <a:schemeClr val="accent1"/>
+          </a:lnRef>
+          <a:fillRef idx="3">
+            <a:schemeClr val="accent1"/>
+          </a:fillRef>
+          <a:effectRef idx="2">
+            <a:schemeClr val="accent1"/>
+          </a:effectRef>
+          <a:fontRef idx="minor">
+            <a:schemeClr val="lt1"/>
+          </a:fontRef>
+        </p:style>
+        <p:txBody>
+          <a:bodyPr rtlCol="0" anchor="ctr"/>
+          <a:lstStyle/>
+          <a:p>
+            <a:pPr algn="ctr"/>
+          </a:p>
+        </p:txBody>
+      </p:sp>
+      <p:sp>
+        <p:nvSpPr>
+          <p:cNvPr id="15" name="TextBox 14"/>
+          <p:cNvSpPr txBox="1"/>
+          <p:nvPr/>
+        </p:nvSpPr>
+        <p:spPr>
+          <a:xfrm>
+            <a:off x="6510528" y="2066544"/>
+            <a:ext cx="4901183" cy="594359"/>
+          </a:xfrm>
+          <a:prstGeom prst="rect">
+            <a:avLst/>
+          </a:prstGeom>
+          <a:noFill/>
+        </p:spPr>
+        <p:txBody>
+          <a:bodyPr wrap="square" lIns="18288" rIns="18288" tIns="27432" bIns="0">
+            <a:spAutoFit/>
+          </a:bodyPr>
+          <a:lstStyle/>
+          <a:p>
+            <a:pPr algn="ctr">
+              <a:spcAft>
+                <a:spcPts val="1000"/>
+              </a:spcAft>
+              <a:defRPr sz="1900" b="1">
+                <a:solidFill>
+                  <a:srgbClr val="14284B"/>
+                </a:solidFill>
+                <a:latin typeface="Aptos"/>
+              </a:defRPr>
+            </a:pPr>
+            <a:r>
+              <a:t>Prepared TSV files → HDFS</a:t>
+            </a:r>
+          </a:p>
+        </p:txBody>
+      </p:sp>
+      <p:sp>
+        <p:nvSpPr>
+          <p:cNvPr id="16" name="Rectangle 15"/>
+          <p:cNvSpPr/>
+          <p:nvPr/>
+        </p:nvSpPr>
+        <p:spPr>
+          <a:xfrm>
+            <a:off x="594360" y="3291840"/>
+            <a:ext cx="5212080" cy="914400"/>
+          </a:xfrm>
+          <a:prstGeom prst="rect">
+            <a:avLst/>
+          </a:prstGeom>
+          <a:solidFill>
+            <a:srgbClr val="EDF3FA"/>
+          </a:solidFill>
+          <a:ln>
+            <a:noFill/>
+          </a:ln>
+        </p:spPr>
+        <p:style>
+          <a:lnRef idx="1">
+            <a:schemeClr val="accent1"/>
+          </a:lnRef>
+          <a:fillRef idx="3">
+            <a:schemeClr val="accent1"/>
+          </a:fillRef>
+          <a:effectRef idx="2">
+            <a:schemeClr val="accent1"/>
+          </a:effectRef>
+          <a:fontRef idx="minor">
+            <a:schemeClr val="lt1"/>
+          </a:fontRef>
+        </p:style>
+        <p:txBody>
+          <a:bodyPr rtlCol="0" anchor="ctr"/>
+          <a:lstStyle/>
+          <a:p>
+            <a:pPr algn="ctr"/>
+          </a:p>
+        </p:txBody>
+      </p:sp>
+      <p:sp>
+        <p:nvSpPr>
+          <p:cNvPr id="17" name="TextBox 16"/>
+          <p:cNvSpPr txBox="1"/>
+          <p:nvPr/>
+        </p:nvSpPr>
+        <p:spPr>
+          <a:xfrm>
+            <a:off x="704088" y="3438144"/>
+            <a:ext cx="4992624" cy="731520"/>
+          </a:xfrm>
+          <a:prstGeom prst="rect">
+            <a:avLst/>
+          </a:prstGeom>
+          <a:noFill/>
+        </p:spPr>
+        <p:txBody>
+          <a:bodyPr wrap="square" lIns="18288" rIns="18288" tIns="27432" bIns="0">
+            <a:spAutoFit/>
+          </a:bodyPr>
+          <a:lstStyle/>
+          <a:p>
+            <a:pPr algn="ctr">
+              <a:spcAft>
+                <a:spcPts val="1000"/>
+              </a:spcAft>
+              <a:defRPr sz="1900" b="1">
+                <a:solidFill>
+                  <a:srgbClr val="14284B"/>
+                </a:solidFill>
+                <a:latin typeface="Aptos"/>
+              </a:defRPr>
+            </a:pPr>
+            <a:r>
+              <a:t>MongoDB aggregation + index profiling</a:t>
+            </a:r>
+          </a:p>
+        </p:txBody>
+      </p:sp>
+      <p:sp>
+        <p:nvSpPr>
+          <p:cNvPr id="18" name="Rectangle 17"/>
+          <p:cNvSpPr/>
+          <p:nvPr/>
+        </p:nvSpPr>
+        <p:spPr>
+          <a:xfrm>
+            <a:off x="6400800" y="3291840"/>
+            <a:ext cx="2423160" cy="914400"/>
+          </a:xfrm>
+          <a:prstGeom prst="rect">
+            <a:avLst/>
+          </a:prstGeom>
+          <a:solidFill>
+            <a:srgbClr val="EDF3FA"/>
+          </a:solidFill>
+          <a:ln>
+            <a:noFill/>
+          </a:ln>
+        </p:spPr>
+        <p:style>
+          <a:lnRef idx="1">
+            <a:schemeClr val="accent1"/>
+          </a:lnRef>
+          <a:fillRef idx="3">
+            <a:schemeClr val="accent1"/>
+          </a:fillRef>
+          <a:effectRef idx="2">
+            <a:schemeClr val="accent1"/>
+          </a:effectRef>
+          <a:fontRef idx="minor">
+            <a:schemeClr val="lt1"/>
+          </a:fontRef>
+        </p:style>
+        <p:txBody>
+          <a:bodyPr rtlCol="0" anchor="ctr"/>
+          <a:lstStyle/>
+          <a:p>
+            <a:pPr algn="ctr"/>
+          </a:p>
+        </p:txBody>
+      </p:sp>
+      <p:sp>
+        <p:nvSpPr>
+          <p:cNvPr id="19" name="TextBox 18"/>
+          <p:cNvSpPr txBox="1"/>
+          <p:nvPr/>
+        </p:nvSpPr>
+        <p:spPr>
+          <a:xfrm>
+            <a:off x="6510528" y="3438144"/>
+            <a:ext cx="2203704" cy="731520"/>
+          </a:xfrm>
+          <a:prstGeom prst="rect">
+            <a:avLst/>
+          </a:prstGeom>
+          <a:noFill/>
+        </p:spPr>
+        <p:txBody>
+          <a:bodyPr wrap="square" lIns="18288" rIns="18288" tIns="27432" bIns="0">
+            <a:spAutoFit/>
+          </a:bodyPr>
+          <a:lstStyle/>
+          <a:p>
+            <a:pPr algn="ctr">
+              <a:spcAft>
+                <a:spcPts val="1000"/>
+              </a:spcAft>
+              <a:defRPr sz="1900" b="1">
+                <a:solidFill>
+                  <a:srgbClr val="14284B"/>
+                </a:solidFill>
+                <a:latin typeface="Aptos"/>
+              </a:defRPr>
+            </a:pPr>
+            <a:r>
+              <a:t>MapReduce</a:t>
+            </a:r>
+          </a:p>
+        </p:txBody>
+      </p:sp>
+      <p:sp>
+        <p:nvSpPr>
+          <p:cNvPr id="20" name="Rectangle 19"/>
+          <p:cNvSpPr/>
+          <p:nvPr/>
+        </p:nvSpPr>
+        <p:spPr>
+          <a:xfrm>
+            <a:off x="9098280" y="3291840"/>
+            <a:ext cx="2423160" cy="914400"/>
+          </a:xfrm>
+          <a:prstGeom prst="rect">
+            <a:avLst/>
+          </a:prstGeom>
+          <a:solidFill>
+            <a:srgbClr val="EDF3FA"/>
+          </a:solidFill>
+          <a:ln>
+            <a:noFill/>
+          </a:ln>
+        </p:spPr>
+        <p:style>
+          <a:lnRef idx="1">
+            <a:schemeClr val="accent1"/>
+          </a:lnRef>
+          <a:fillRef idx="3">
+            <a:schemeClr val="accent1"/>
+          </a:fillRef>
+          <a:effectRef idx="2">
+            <a:schemeClr val="accent1"/>
+          </a:effectRef>
+          <a:fontRef idx="minor">
+            <a:schemeClr val="lt1"/>
+          </a:fontRef>
+        </p:style>
+        <p:txBody>
+          <a:bodyPr rtlCol="0" anchor="ctr"/>
+          <a:lstStyle/>
+          <a:p>
+            <a:pPr algn="ctr"/>
+          </a:p>
+        </p:txBody>
+      </p:sp>
+      <p:sp>
+        <p:nvSpPr>
+          <p:cNvPr id="21" name="TextBox 20"/>
+          <p:cNvSpPr txBox="1"/>
+          <p:nvPr/>
+        </p:nvSpPr>
+        <p:spPr>
+          <a:xfrm>
+            <a:off x="9208007" y="3438144"/>
+            <a:ext cx="2203704" cy="731520"/>
+          </a:xfrm>
+          <a:prstGeom prst="rect">
+            <a:avLst/>
+          </a:prstGeom>
+          <a:noFill/>
+        </p:spPr>
+        <p:txBody>
+          <a:bodyPr wrap="square" lIns="18288" rIns="18288" tIns="27432" bIns="0">
+            <a:spAutoFit/>
+          </a:bodyPr>
+          <a:lstStyle/>
+          <a:p>
+            <a:pPr algn="ctr">
+              <a:spcAft>
+                <a:spcPts val="1000"/>
+              </a:spcAft>
+              <a:defRPr sz="1900" b="1">
+                <a:solidFill>
+                  <a:srgbClr val="14284B"/>
+                </a:solidFill>
+                <a:latin typeface="Aptos"/>
+              </a:defRPr>
+            </a:pPr>
+            <a:r>
+              <a:t>Pig cleaning</a:t>
+            </a:r>
+          </a:p>
+        </p:txBody>
+      </p:sp>
+      <p:sp>
+        <p:nvSpPr>
+          <p:cNvPr id="22" name="TextBox 21"/>
+          <p:cNvSpPr txBox="1"/>
+          <p:nvPr/>
+        </p:nvSpPr>
+        <p:spPr>
+          <a:xfrm>
+            <a:off x="4251960" y="2779776"/>
+            <a:ext cx="457200" cy="365760"/>
           </a:xfrm>
           <a:prstGeom prst="rect">
             <a:avLst/>
@@ -6828,7 +7643,7 @@
               <a:spcAft>
                 <a:spcPts val="1000"/>
               </a:spcAft>
-              <a:defRPr sz="1100" b="1">
+              <a:defRPr sz="2100" b="1">
                 <a:solidFill>
                   <a:srgbClr val="194F8E"/>
                 </a:solidFill>
@@ -6836,21 +7651,21 @@
               </a:defRPr>
             </a:pPr>
             <a:r>
-              <a:t>QUERY PROFILING</a:t>
-            </a:r>
-          </a:p>
-        </p:txBody>
-      </p:sp>
-      <p:sp>
-        <p:nvSpPr>
-          <p:cNvPr id="14" name="TextBox 13"/>
-          <p:cNvSpPr txBox="1"/>
-          <p:nvPr/>
-        </p:nvSpPr>
-        <p:spPr>
-          <a:xfrm>
-            <a:off x="6464807" y="2514600"/>
-            <a:ext cx="4946903" cy="594360"/>
+              <a:t>↓</a:t>
+            </a:r>
+          </a:p>
+        </p:txBody>
+      </p:sp>
+      <p:sp>
+        <p:nvSpPr>
+          <p:cNvPr id="23" name="TextBox 22"/>
+          <p:cNvSpPr txBox="1"/>
+          <p:nvPr/>
+        </p:nvSpPr>
+        <p:spPr>
+          <a:xfrm>
+            <a:off x="7315200" y="2779776"/>
+            <a:ext cx="457200" cy="365760"/>
           </a:xfrm>
           <a:prstGeom prst="rect">
             <a:avLst/>
@@ -6867,29 +7682,228 @@
               <a:spcAft>
                 <a:spcPts val="1000"/>
               </a:spcAft>
+              <a:defRPr sz="2100" b="1">
+                <a:solidFill>
+                  <a:srgbClr val="194F8E"/>
+                </a:solidFill>
+                <a:latin typeface="Aptos"/>
+              </a:defRPr>
+            </a:pPr>
+            <a:r>
+              <a:t>↓</a:t>
+            </a:r>
+          </a:p>
+        </p:txBody>
+      </p:sp>
+      <p:sp>
+        <p:nvSpPr>
+          <p:cNvPr id="24" name="TextBox 23"/>
+          <p:cNvSpPr txBox="1"/>
+          <p:nvPr/>
+        </p:nvSpPr>
+        <p:spPr>
+          <a:xfrm>
+            <a:off x="10058400" y="2779776"/>
+            <a:ext cx="457200" cy="365760"/>
+          </a:xfrm>
+          <a:prstGeom prst="rect">
+            <a:avLst/>
+          </a:prstGeom>
+          <a:noFill/>
+        </p:spPr>
+        <p:txBody>
+          <a:bodyPr wrap="square" lIns="18288" rIns="18288" tIns="27432" bIns="0">
+            <a:spAutoFit/>
+          </a:bodyPr>
+          <a:lstStyle/>
+          <a:p>
+            <a:pPr>
+              <a:spcAft>
+                <a:spcPts val="1000"/>
+              </a:spcAft>
+              <a:defRPr sz="2100" b="1">
+                <a:solidFill>
+                  <a:srgbClr val="194F8E"/>
+                </a:solidFill>
+                <a:latin typeface="Aptos"/>
+              </a:defRPr>
+            </a:pPr>
+            <a:r>
+              <a:t>↓</a:t>
+            </a:r>
+          </a:p>
+        </p:txBody>
+      </p:sp>
+      <p:sp>
+        <p:nvSpPr>
+          <p:cNvPr id="25" name="TextBox 24"/>
+          <p:cNvSpPr txBox="1"/>
+          <p:nvPr/>
+        </p:nvSpPr>
+        <p:spPr>
+          <a:xfrm>
+            <a:off x="6400800" y="4407408"/>
+            <a:ext cx="2423160" cy="548640"/>
+          </a:xfrm>
+          <a:prstGeom prst="rect">
+            <a:avLst/>
+          </a:prstGeom>
+          <a:noFill/>
+        </p:spPr>
+        <p:txBody>
+          <a:bodyPr wrap="square" lIns="18288" rIns="18288" tIns="27432" bIns="0">
+            <a:spAutoFit/>
+          </a:bodyPr>
+          <a:lstStyle/>
+          <a:p>
+            <a:pPr algn="ctr">
+              <a:spcAft>
+                <a:spcPts val="1000"/>
+              </a:spcAft>
+              <a:defRPr sz="1700" b="0">
+                <a:solidFill>
+                  <a:srgbClr val="596678"/>
+                </a:solidFill>
+                <a:latin typeface="Aptos"/>
+              </a:defRPr>
+            </a:pPr>
+            <a:r>
+              <a:t>Count · total · mean</a:t>
+            </a:r>
+          </a:p>
+        </p:txBody>
+      </p:sp>
+      <p:sp>
+        <p:nvSpPr>
+          <p:cNvPr id="26" name="TextBox 25"/>
+          <p:cNvSpPr txBox="1"/>
+          <p:nvPr/>
+        </p:nvSpPr>
+        <p:spPr>
+          <a:xfrm>
+            <a:off x="9098280" y="4407408"/>
+            <a:ext cx="2423160" cy="548640"/>
+          </a:xfrm>
+          <a:prstGeom prst="rect">
+            <a:avLst/>
+          </a:prstGeom>
+          <a:noFill/>
+        </p:spPr>
+        <p:txBody>
+          <a:bodyPr wrap="square" lIns="18288" rIns="18288" tIns="27432" bIns="0">
+            <a:spAutoFit/>
+          </a:bodyPr>
+          <a:lstStyle/>
+          <a:p>
+            <a:pPr algn="ctr">
+              <a:spcAft>
+                <a:spcPts val="1000"/>
+              </a:spcAft>
+              <a:defRPr sz="1700" b="1">
+                <a:solidFill>
+                  <a:srgbClr val="194F8E"/>
+                </a:solidFill>
+                <a:latin typeface="Aptos"/>
+              </a:defRPr>
+            </a:pPr>
+            <a:r>
+              <a:t>Hive: Text + RCFile</a:t>
+            </a:r>
+          </a:p>
+        </p:txBody>
+      </p:sp>
+      <p:sp>
+        <p:nvSpPr>
+          <p:cNvPr id="27" name="Rectangle 26"/>
+          <p:cNvSpPr/>
+          <p:nvPr/>
+        </p:nvSpPr>
+        <p:spPr>
+          <a:xfrm>
+            <a:off x="594360" y="5212080"/>
+            <a:ext cx="10927080" cy="731520"/>
+          </a:xfrm>
+          <a:prstGeom prst="rect">
+            <a:avLst/>
+          </a:prstGeom>
+          <a:solidFill>
+            <a:srgbClr val="14284B"/>
+          </a:solidFill>
+          <a:ln>
+            <a:noFill/>
+          </a:ln>
+        </p:spPr>
+        <p:style>
+          <a:lnRef idx="1">
+            <a:schemeClr val="accent1"/>
+          </a:lnRef>
+          <a:fillRef idx="3">
+            <a:schemeClr val="accent1"/>
+          </a:fillRef>
+          <a:effectRef idx="2">
+            <a:schemeClr val="accent1"/>
+          </a:effectRef>
+          <a:fontRef idx="minor">
+            <a:schemeClr val="lt1"/>
+          </a:fontRef>
+        </p:style>
+        <p:txBody>
+          <a:bodyPr rtlCol="0" anchor="ctr"/>
+          <a:lstStyle/>
+          <a:p>
+            <a:pPr algn="ctr"/>
+          </a:p>
+        </p:txBody>
+      </p:sp>
+      <p:sp>
+        <p:nvSpPr>
+          <p:cNvPr id="28" name="TextBox 27"/>
+          <p:cNvSpPr txBox="1"/>
+          <p:nvPr/>
+        </p:nvSpPr>
+        <p:spPr>
+          <a:xfrm>
+            <a:off x="777240" y="5376672"/>
+            <a:ext cx="10561320" cy="457200"/>
+          </a:xfrm>
+          <a:prstGeom prst="rect">
+            <a:avLst/>
+          </a:prstGeom>
+          <a:noFill/>
+        </p:spPr>
+        <p:txBody>
+          <a:bodyPr wrap="square" lIns="18288" rIns="18288" tIns="27432" bIns="0">
+            <a:spAutoFit/>
+          </a:bodyPr>
+          <a:lstStyle/>
+          <a:p>
+            <a:pPr algn="ctr">
+              <a:spcAft>
+                <a:spcPts val="1000"/>
+              </a:spcAft>
               <a:defRPr sz="2200" b="1">
                 <a:solidFill>
-                  <a:srgbClr val="14284B"/>
-                </a:solidFill>
-                <a:latin typeface="Aptos"/>
-              </a:defRPr>
-            </a:pPr>
-            <a:r>
-              <a:t>Prove the effect of an index</a:t>
-            </a:r>
-          </a:p>
-        </p:txBody>
-      </p:sp>
-      <p:sp>
-        <p:nvSpPr>
-          <p:cNvPr id="15" name="TextBox 14"/>
-          <p:cNvSpPr txBox="1"/>
-          <p:nvPr/>
-        </p:nvSpPr>
-        <p:spPr>
-          <a:xfrm>
-            <a:off x="6464807" y="3383280"/>
-            <a:ext cx="4946903" cy="1463040"/>
+                  <a:srgbClr val="FFFFFF"/>
+                </a:solidFill>
+                <a:latin typeface="Aptos"/>
+              </a:defRPr>
+            </a:pPr>
+            <a:r>
+              <a:t>Check matching answers  →  Save results and timings  →  Flask dashboard</a:t>
+            </a:r>
+          </a:p>
+        </p:txBody>
+      </p:sp>
+      <p:sp>
+        <p:nvSpPr>
+          <p:cNvPr id="29" name="TextBox 28"/>
+          <p:cNvSpPr txBox="1"/>
+          <p:nvPr/>
+        </p:nvSpPr>
+        <p:spPr>
+          <a:xfrm>
+            <a:off x="640080" y="6053328"/>
+            <a:ext cx="10972800" cy="274320"/>
           </a:xfrm>
           <a:prstGeom prst="rect">
             <a:avLst/>
@@ -6906,85 +7920,7 @@
               <a:spcAft>
                 <a:spcPts val="1000"/>
               </a:spcAft>
-              <a:defRPr sz="1700" b="0">
-                <a:solidFill>
-                  <a:srgbClr val="2A3140"/>
-                </a:solidFill>
-                <a:latin typeface="Aptos"/>
-              </a:defRPr>
-            </a:pPr>
-            <a:r>
-              <a:t>Run the same lookup with a collection scan and an index; inspect executionStats.</a:t>
-            </a:r>
-          </a:p>
-        </p:txBody>
-      </p:sp>
-      <p:sp>
-        <p:nvSpPr>
-          <p:cNvPr id="16" name="TextBox 15"/>
-          <p:cNvSpPr txBox="1"/>
-          <p:nvPr/>
-        </p:nvSpPr>
-        <p:spPr>
-          <a:xfrm>
-            <a:off x="685800" y="5166360"/>
-            <a:ext cx="10881360" cy="411480"/>
-          </a:xfrm>
-          <a:prstGeom prst="rect">
-            <a:avLst/>
-          </a:prstGeom>
-          <a:noFill/>
-        </p:spPr>
-        <p:txBody>
-          <a:bodyPr wrap="square" lIns="18288" rIns="18288" tIns="27432" bIns="0">
-            <a:spAutoFit/>
-          </a:bodyPr>
-          <a:lstStyle/>
-          <a:p>
-            <a:pPr>
-              <a:spcAft>
-                <a:spcPts val="1000"/>
-              </a:spcAft>
-              <a:defRPr sz="2300" b="1">
-                <a:solidFill>
-                  <a:srgbClr val="194F8E"/>
-                </a:solidFill>
-                <a:latin typeface="Aptos"/>
-              </a:defRPr>
-            </a:pPr>
-            <a:r>
-              <a:t>$match  →  $group  →  $project  ·  $unwind  ·  $facet</a:t>
-            </a:r>
-          </a:p>
-        </p:txBody>
-      </p:sp>
-      <p:sp>
-        <p:nvSpPr>
-          <p:cNvPr id="17" name="TextBox 16"/>
-          <p:cNvSpPr txBox="1"/>
-          <p:nvPr/>
-        </p:nvSpPr>
-        <p:spPr>
-          <a:xfrm>
-            <a:off x="685800" y="5705856"/>
-            <a:ext cx="10881360" cy="365760"/>
-          </a:xfrm>
-          <a:prstGeom prst="rect">
-            <a:avLst/>
-          </a:prstGeom>
-          <a:noFill/>
-        </p:spPr>
-        <p:txBody>
-          <a:bodyPr wrap="square" lIns="18288" rIns="18288" tIns="27432" bIns="0">
-            <a:spAutoFit/>
-          </a:bodyPr>
-          <a:lstStyle/>
-          <a:p>
-            <a:pPr>
-              <a:spcAft>
-                <a:spcPts val="1000"/>
-              </a:spcAft>
-              <a:defRPr sz="1700" b="0">
+              <a:defRPr sz="1400" b="0">
                 <a:solidFill>
                   <a:srgbClr val="596678"/>
                 </a:solidFill>
@@ -6992,7 +7928,7 @@
               </a:defRPr>
             </a:pPr>
             <a:r>
-              <a:t>Filter  ·  summarize  ·  choose fields  ·  expand arrays  ·  return multiple summaries</a:t>
+              <a:t>MapReduce and Pig read the prepared HDFS data as separate branches.</a:t>
             </a:r>
           </a:p>
         </p:txBody>
@@ -7100,7 +8036,7 @@
               </a:defRPr>
             </a:pPr>
             <a:r>
-              <a:t>THEME 2 · HADOOP &amp; MAPREDUCE</a:t>
+              <a:t>IMPLEMENTATION · THE THREE ASSIGNMENT THEMES</a:t>
             </a:r>
           </a:p>
         </p:txBody>
@@ -7139,7 +8075,7 @@
               </a:defRPr>
             </a:pPr>
             <a:r>
-              <a:t>Distribute files and calculate nutrient summaries</a:t>
+              <a:t>Each tool produces a result we can demonstrate</a:t>
             </a:r>
           </a:p>
         </p:txBody>
@@ -7267,20 +8203,20 @@
       </p:sp>
       <p:sp>
         <p:nvSpPr>
-          <p:cNvPr id="8" name="Rounded Rectangle 7"/>
+          <p:cNvPr id="8" name="Rectangle 7"/>
           <p:cNvSpPr/>
           <p:nvPr/>
         </p:nvSpPr>
         <p:spPr>
           <a:xfrm>
-            <a:off x="548640" y="1920240"/>
-            <a:ext cx="5349240" cy="3520440"/>
-          </a:xfrm>
-          <a:prstGeom prst="roundRect">
+            <a:off x="594360" y="1828800"/>
+            <a:ext cx="10972800" cy="566928"/>
+          </a:xfrm>
+          <a:prstGeom prst="rect">
             <a:avLst/>
           </a:prstGeom>
           <a:solidFill>
-            <a:srgbClr val="EDF3FA"/>
+            <a:srgbClr val="14284B"/>
           </a:solidFill>
           <a:ln>
             <a:noFill/>
@@ -7316,8 +8252,8 @@
         </p:nvSpPr>
         <p:spPr>
           <a:xfrm>
-            <a:off x="749808" y="2103120"/>
-            <a:ext cx="4946903" cy="320040"/>
+            <a:off x="731520" y="1920240"/>
+            <a:ext cx="1874519" cy="438912"/>
           </a:xfrm>
           <a:prstGeom prst="rect">
             <a:avLst/>
@@ -7334,15 +8270,15 @@
               <a:spcAft>
                 <a:spcPts val="1000"/>
               </a:spcAft>
-              <a:defRPr sz="1100" b="1">
-                <a:solidFill>
-                  <a:srgbClr val="194F8E"/>
-                </a:solidFill>
-                <a:latin typeface="Aptos"/>
-              </a:defRPr>
-            </a:pPr>
-            <a:r>
-              <a:t>HDFS FILE OPERATIONS</a:t>
+              <a:defRPr sz="1700" b="1">
+                <a:solidFill>
+                  <a:srgbClr val="FFFFFF"/>
+                </a:solidFill>
+                <a:latin typeface="Aptos"/>
+              </a:defRPr>
+            </a:pPr>
+            <a:r>
+              <a:t>Theme</a:t>
             </a:r>
           </a:p>
         </p:txBody>
@@ -7355,8 +8291,8 @@
         </p:nvSpPr>
         <p:spPr>
           <a:xfrm>
-            <a:off x="749808" y="2514600"/>
-            <a:ext cx="4946903" cy="594360"/>
+            <a:off x="2834639" y="1920240"/>
+            <a:ext cx="4434840" cy="438912"/>
           </a:xfrm>
           <a:prstGeom prst="rect">
             <a:avLst/>
@@ -7373,15 +8309,15 @@
               <a:spcAft>
                 <a:spcPts val="1000"/>
               </a:spcAft>
-              <a:defRPr sz="2200" b="1">
-                <a:solidFill>
-                  <a:srgbClr val="14284B"/>
-                </a:solidFill>
-                <a:latin typeface="Aptos"/>
-              </a:defRPr>
-            </a:pPr>
-            <a:r>
-              <a:t>Shared distributed storage</a:t>
+              <a:defRPr sz="1700" b="1">
+                <a:solidFill>
+                  <a:srgbClr val="FFFFFF"/>
+                </a:solidFill>
+                <a:latin typeface="Aptos"/>
+              </a:defRPr>
+            </a:pPr>
+            <a:r>
+              <a:t>What our program does</a:t>
             </a:r>
           </a:p>
         </p:txBody>
@@ -7394,8 +8330,8 @@
         </p:nvSpPr>
         <p:spPr>
           <a:xfrm>
-            <a:off x="749808" y="3383280"/>
-            <a:ext cx="4946903" cy="2011680"/>
+            <a:off x="7498079" y="1920240"/>
+            <a:ext cx="3977639" cy="438912"/>
           </a:xfrm>
           <a:prstGeom prst="rect">
             <a:avLst/>
@@ -7412,79 +8348,31 @@
               <a:spcAft>
                 <a:spcPts val="1000"/>
               </a:spcAft>
-              <a:defRPr sz="1700" b="0">
-                <a:solidFill>
-                  <a:srgbClr val="2A3140"/>
-                </a:solidFill>
-                <a:latin typeface="Aptos"/>
-              </a:defRPr>
-            </a:pPr>
-            <a:r>
-              <a:t>mkdir: create folders</a:t>
-            </a:r>
-          </a:p>
-          <a:p>
-            <a:pPr>
-              <a:spcAft>
-                <a:spcPts val="1000"/>
-              </a:spcAft>
-              <a:defRPr sz="1700" b="0">
-                <a:solidFill>
-                  <a:srgbClr val="2A3140"/>
-                </a:solidFill>
-                <a:latin typeface="Aptos"/>
-              </a:defRPr>
-            </a:pPr>
-            <a:r>
-              <a:t>put: upload files</a:t>
-            </a:r>
-          </a:p>
-          <a:p>
-            <a:pPr>
-              <a:spcAft>
-                <a:spcPts val="1000"/>
-              </a:spcAft>
-              <a:defRPr sz="1700" b="0">
-                <a:solidFill>
-                  <a:srgbClr val="2A3140"/>
-                </a:solidFill>
-                <a:latin typeface="Aptos"/>
-              </a:defRPr>
-            </a:pPr>
-            <a:r>
-              <a:t>cat / get: view or retrieve</a:t>
-            </a:r>
-          </a:p>
-          <a:p>
-            <a:pPr>
-              <a:spcAft>
-                <a:spcPts val="1000"/>
-              </a:spcAft>
-              <a:defRPr sz="1700" b="0">
-                <a:solidFill>
-                  <a:srgbClr val="2A3140"/>
-                </a:solidFill>
-                <a:latin typeface="Aptos"/>
-              </a:defRPr>
-            </a:pPr>
-            <a:r>
-              <a:t>rm -r: delete the demo folder</a:t>
-            </a:r>
-          </a:p>
-        </p:txBody>
-      </p:sp>
-      <p:sp>
-        <p:nvSpPr>
-          <p:cNvPr id="12" name="Rounded Rectangle 11"/>
+              <a:defRPr sz="1700" b="1">
+                <a:solidFill>
+                  <a:srgbClr val="FFFFFF"/>
+                </a:solidFill>
+                <a:latin typeface="Aptos"/>
+              </a:defRPr>
+            </a:pPr>
+            <a:r>
+              <a:t>What we can show</a:t>
+            </a:r>
+          </a:p>
+        </p:txBody>
+      </p:sp>
+      <p:sp>
+        <p:nvSpPr>
+          <p:cNvPr id="12" name="Rectangle 11"/>
           <p:cNvSpPr/>
           <p:nvPr/>
         </p:nvSpPr>
         <p:spPr>
           <a:xfrm>
-            <a:off x="6263640" y="1920240"/>
-            <a:ext cx="5349240" cy="3520440"/>
-          </a:xfrm>
-          <a:prstGeom prst="roundRect">
+            <a:off x="594360" y="2395728"/>
+            <a:ext cx="10972800" cy="566928"/>
+          </a:xfrm>
+          <a:prstGeom prst="rect">
             <a:avLst/>
           </a:prstGeom>
           <a:solidFill>
@@ -7524,8 +8412,8 @@
         </p:nvSpPr>
         <p:spPr>
           <a:xfrm>
-            <a:off x="6464807" y="2103120"/>
-            <a:ext cx="4946903" cy="320040"/>
+            <a:off x="731520" y="2487168"/>
+            <a:ext cx="1874519" cy="438912"/>
           </a:xfrm>
           <a:prstGeom prst="rect">
             <a:avLst/>
@@ -7542,7 +8430,444 @@
               <a:spcAft>
                 <a:spcPts val="1000"/>
               </a:spcAft>
-              <a:defRPr sz="1100" b="1">
+              <a:defRPr sz="1700" b="0">
+                <a:solidFill>
+                  <a:srgbClr val="2A3140"/>
+                </a:solidFill>
+                <a:latin typeface="Aptos"/>
+              </a:defRPr>
+            </a:pPr>
+            <a:r>
+              <a:t>1 · MongoDB</a:t>
+            </a:r>
+          </a:p>
+        </p:txBody>
+      </p:sp>
+      <p:sp>
+        <p:nvSpPr>
+          <p:cNvPr id="14" name="TextBox 13"/>
+          <p:cNvSpPr txBox="1"/>
+          <p:nvPr/>
+        </p:nvSpPr>
+        <p:spPr>
+          <a:xfrm>
+            <a:off x="2834639" y="2487168"/>
+            <a:ext cx="4434840" cy="438912"/>
+          </a:xfrm>
+          <a:prstGeom prst="rect">
+            <a:avLst/>
+          </a:prstGeom>
+          <a:noFill/>
+        </p:spPr>
+        <p:txBody>
+          <a:bodyPr wrap="square" lIns="18288" rIns="18288" tIns="27432" bIns="0">
+            <a:spAutoFit/>
+          </a:bodyPr>
+          <a:lstStyle/>
+          <a:p>
+            <a:pPr>
+              <a:spcAft>
+                <a:spcPts val="1000"/>
+              </a:spcAft>
+              <a:defRPr sz="1700" b="0">
+                <a:solidFill>
+                  <a:srgbClr val="2A3140"/>
+                </a:solidFill>
+                <a:latin typeface="Aptos"/>
+              </a:defRPr>
+            </a:pPr>
+            <a:r>
+              <a:t>Import, index and aggregate documents</a:t>
+            </a:r>
+          </a:p>
+        </p:txBody>
+      </p:sp>
+      <p:sp>
+        <p:nvSpPr>
+          <p:cNvPr id="15" name="TextBox 14"/>
+          <p:cNvSpPr txBox="1"/>
+          <p:nvPr/>
+        </p:nvSpPr>
+        <p:spPr>
+          <a:xfrm>
+            <a:off x="7498079" y="2487168"/>
+            <a:ext cx="3977639" cy="438912"/>
+          </a:xfrm>
+          <a:prstGeom prst="rect">
+            <a:avLst/>
+          </a:prstGeom>
+          <a:noFill/>
+        </p:spPr>
+        <p:txBody>
+          <a:bodyPr wrap="square" lIns="18288" rIns="18288" tIns="27432" bIns="0">
+            <a:spAutoFit/>
+          </a:bodyPr>
+          <a:lstStyle/>
+          <a:p>
+            <a:pPr>
+              <a:spcAft>
+                <a:spcPts val="1000"/>
+              </a:spcAft>
+              <a:defRPr sz="1700" b="0">
+                <a:solidFill>
+                  <a:srgbClr val="2A3140"/>
+                </a:solidFill>
+                <a:latin typeface="Aptos"/>
+              </a:defRPr>
+            </a:pPr>
+            <a:r>
+              <a:t>Raw records → grouped answers</a:t>
+            </a:r>
+          </a:p>
+        </p:txBody>
+      </p:sp>
+      <p:sp>
+        <p:nvSpPr>
+          <p:cNvPr id="16" name="Rectangle 15"/>
+          <p:cNvSpPr/>
+          <p:nvPr/>
+        </p:nvSpPr>
+        <p:spPr>
+          <a:xfrm>
+            <a:off x="594360" y="2962656"/>
+            <a:ext cx="10972800" cy="566928"/>
+          </a:xfrm>
+          <a:prstGeom prst="rect">
+            <a:avLst/>
+          </a:prstGeom>
+          <a:solidFill>
+            <a:srgbClr val="F7F9FC"/>
+          </a:solidFill>
+          <a:ln>
+            <a:noFill/>
+          </a:ln>
+        </p:spPr>
+        <p:style>
+          <a:lnRef idx="1">
+            <a:schemeClr val="accent1"/>
+          </a:lnRef>
+          <a:fillRef idx="3">
+            <a:schemeClr val="accent1"/>
+          </a:fillRef>
+          <a:effectRef idx="2">
+            <a:schemeClr val="accent1"/>
+          </a:effectRef>
+          <a:fontRef idx="minor">
+            <a:schemeClr val="lt1"/>
+          </a:fontRef>
+        </p:style>
+        <p:txBody>
+          <a:bodyPr rtlCol="0" anchor="ctr"/>
+          <a:lstStyle/>
+          <a:p>
+            <a:pPr algn="ctr"/>
+          </a:p>
+        </p:txBody>
+      </p:sp>
+      <p:sp>
+        <p:nvSpPr>
+          <p:cNvPr id="17" name="TextBox 16"/>
+          <p:cNvSpPr txBox="1"/>
+          <p:nvPr/>
+        </p:nvSpPr>
+        <p:spPr>
+          <a:xfrm>
+            <a:off x="731520" y="3054096"/>
+            <a:ext cx="1874519" cy="438912"/>
+          </a:xfrm>
+          <a:prstGeom prst="rect">
+            <a:avLst/>
+          </a:prstGeom>
+          <a:noFill/>
+        </p:spPr>
+        <p:txBody>
+          <a:bodyPr wrap="square" lIns="18288" rIns="18288" tIns="27432" bIns="0">
+            <a:spAutoFit/>
+          </a:bodyPr>
+          <a:lstStyle/>
+          <a:p>
+            <a:pPr>
+              <a:spcAft>
+                <a:spcPts val="1000"/>
+              </a:spcAft>
+              <a:defRPr sz="1700" b="0">
+                <a:solidFill>
+                  <a:srgbClr val="2A3140"/>
+                </a:solidFill>
+                <a:latin typeface="Aptos"/>
+              </a:defRPr>
+            </a:pPr>
+            <a:r>
+              <a:t>2 · Hadoop</a:t>
+            </a:r>
+          </a:p>
+        </p:txBody>
+      </p:sp>
+      <p:sp>
+        <p:nvSpPr>
+          <p:cNvPr id="18" name="TextBox 17"/>
+          <p:cNvSpPr txBox="1"/>
+          <p:nvPr/>
+        </p:nvSpPr>
+        <p:spPr>
+          <a:xfrm>
+            <a:off x="2834639" y="3054096"/>
+            <a:ext cx="4434840" cy="438912"/>
+          </a:xfrm>
+          <a:prstGeom prst="rect">
+            <a:avLst/>
+          </a:prstGeom>
+          <a:noFill/>
+        </p:spPr>
+        <p:txBody>
+          <a:bodyPr wrap="square" lIns="18288" rIns="18288" tIns="27432" bIns="0">
+            <a:spAutoFit/>
+          </a:bodyPr>
+          <a:lstStyle/>
+          <a:p>
+            <a:pPr>
+              <a:spcAft>
+                <a:spcPts val="1000"/>
+              </a:spcAft>
+              <a:defRPr sz="1700" b="0">
+                <a:solidFill>
+                  <a:srgbClr val="2A3140"/>
+                </a:solidFill>
+                <a:latin typeface="Aptos"/>
+              </a:defRPr>
+            </a:pPr>
+            <a:r>
+              <a:t>HDFS files; MapReduce on YARN</a:t>
+            </a:r>
+          </a:p>
+        </p:txBody>
+      </p:sp>
+      <p:sp>
+        <p:nvSpPr>
+          <p:cNvPr id="19" name="TextBox 18"/>
+          <p:cNvSpPr txBox="1"/>
+          <p:nvPr/>
+        </p:nvSpPr>
+        <p:spPr>
+          <a:xfrm>
+            <a:off x="7498079" y="3054096"/>
+            <a:ext cx="3977639" cy="438912"/>
+          </a:xfrm>
+          <a:prstGeom prst="rect">
+            <a:avLst/>
+          </a:prstGeom>
+          <a:noFill/>
+        </p:spPr>
+        <p:txBody>
+          <a:bodyPr wrap="square" lIns="18288" rIns="18288" tIns="27432" bIns="0">
+            <a:spAutoFit/>
+          </a:bodyPr>
+          <a:lstStyle/>
+          <a:p>
+            <a:pPr>
+              <a:spcAft>
+                <a:spcPts val="1000"/>
+              </a:spcAft>
+              <a:defRPr sz="1700" b="0">
+                <a:solidFill>
+                  <a:srgbClr val="2A3140"/>
+                </a:solidFill>
+                <a:latin typeface="Aptos"/>
+              </a:defRPr>
+            </a:pPr>
+            <a:r>
+              <a:t>Files → nutrient summaries</a:t>
+            </a:r>
+          </a:p>
+        </p:txBody>
+      </p:sp>
+      <p:sp>
+        <p:nvSpPr>
+          <p:cNvPr id="20" name="Rectangle 19"/>
+          <p:cNvSpPr/>
+          <p:nvPr/>
+        </p:nvSpPr>
+        <p:spPr>
+          <a:xfrm>
+            <a:off x="594360" y="3529584"/>
+            <a:ext cx="10972800" cy="566928"/>
+          </a:xfrm>
+          <a:prstGeom prst="rect">
+            <a:avLst/>
+          </a:prstGeom>
+          <a:solidFill>
+            <a:srgbClr val="EDF3FA"/>
+          </a:solidFill>
+          <a:ln>
+            <a:noFill/>
+          </a:ln>
+        </p:spPr>
+        <p:style>
+          <a:lnRef idx="1">
+            <a:schemeClr val="accent1"/>
+          </a:lnRef>
+          <a:fillRef idx="3">
+            <a:schemeClr val="accent1"/>
+          </a:fillRef>
+          <a:effectRef idx="2">
+            <a:schemeClr val="accent1"/>
+          </a:effectRef>
+          <a:fontRef idx="minor">
+            <a:schemeClr val="lt1"/>
+          </a:fontRef>
+        </p:style>
+        <p:txBody>
+          <a:bodyPr rtlCol="0" anchor="ctr"/>
+          <a:lstStyle/>
+          <a:p>
+            <a:pPr algn="ctr"/>
+          </a:p>
+        </p:txBody>
+      </p:sp>
+      <p:sp>
+        <p:nvSpPr>
+          <p:cNvPr id="21" name="TextBox 20"/>
+          <p:cNvSpPr txBox="1"/>
+          <p:nvPr/>
+        </p:nvSpPr>
+        <p:spPr>
+          <a:xfrm>
+            <a:off x="731520" y="3621024"/>
+            <a:ext cx="1874519" cy="438912"/>
+          </a:xfrm>
+          <a:prstGeom prst="rect">
+            <a:avLst/>
+          </a:prstGeom>
+          <a:noFill/>
+        </p:spPr>
+        <p:txBody>
+          <a:bodyPr wrap="square" lIns="18288" rIns="18288" tIns="27432" bIns="0">
+            <a:spAutoFit/>
+          </a:bodyPr>
+          <a:lstStyle/>
+          <a:p>
+            <a:pPr>
+              <a:spcAft>
+                <a:spcPts val="1000"/>
+              </a:spcAft>
+              <a:defRPr sz="1700" b="0">
+                <a:solidFill>
+                  <a:srgbClr val="2A3140"/>
+                </a:solidFill>
+                <a:latin typeface="Aptos"/>
+              </a:defRPr>
+            </a:pPr>
+            <a:r>
+              <a:t>3 · Pig + Hive</a:t>
+            </a:r>
+          </a:p>
+        </p:txBody>
+      </p:sp>
+      <p:sp>
+        <p:nvSpPr>
+          <p:cNvPr id="22" name="TextBox 21"/>
+          <p:cNvSpPr txBox="1"/>
+          <p:nvPr/>
+        </p:nvSpPr>
+        <p:spPr>
+          <a:xfrm>
+            <a:off x="2834639" y="3621024"/>
+            <a:ext cx="4434840" cy="438912"/>
+          </a:xfrm>
+          <a:prstGeom prst="rect">
+            <a:avLst/>
+          </a:prstGeom>
+          <a:noFill/>
+        </p:spPr>
+        <p:txBody>
+          <a:bodyPr wrap="square" lIns="18288" rIns="18288" tIns="27432" bIns="0">
+            <a:spAutoFit/>
+          </a:bodyPr>
+          <a:lstStyle/>
+          <a:p>
+            <a:pPr>
+              <a:spcAft>
+                <a:spcPts val="1000"/>
+              </a:spcAft>
+              <a:defRPr sz="1700" b="0">
+                <a:solidFill>
+                  <a:srgbClr val="2A3140"/>
+                </a:solidFill>
+                <a:latin typeface="Aptos"/>
+              </a:defRPr>
+            </a:pPr>
+            <a:r>
+              <a:t>Clean data; compare Text and RCFile</a:t>
+            </a:r>
+          </a:p>
+        </p:txBody>
+      </p:sp>
+      <p:sp>
+        <p:nvSpPr>
+          <p:cNvPr id="23" name="TextBox 22"/>
+          <p:cNvSpPr txBox="1"/>
+          <p:nvPr/>
+        </p:nvSpPr>
+        <p:spPr>
+          <a:xfrm>
+            <a:off x="7498079" y="3621024"/>
+            <a:ext cx="3977639" cy="438912"/>
+          </a:xfrm>
+          <a:prstGeom prst="rect">
+            <a:avLst/>
+          </a:prstGeom>
+          <a:noFill/>
+        </p:spPr>
+        <p:txBody>
+          <a:bodyPr wrap="square" lIns="18288" rIns="18288" tIns="27432" bIns="0">
+            <a:spAutoFit/>
+          </a:bodyPr>
+          <a:lstStyle/>
+          <a:p>
+            <a:pPr>
+              <a:spcAft>
+                <a:spcPts val="1000"/>
+              </a:spcAft>
+              <a:defRPr sz="1700" b="0">
+                <a:solidFill>
+                  <a:srgbClr val="2A3140"/>
+                </a:solidFill>
+                <a:latin typeface="Aptos"/>
+              </a:defRPr>
+            </a:pPr>
+            <a:r>
+              <a:t>Clean rows → query answers</a:t>
+            </a:r>
+          </a:p>
+        </p:txBody>
+      </p:sp>
+      <p:sp>
+        <p:nvSpPr>
+          <p:cNvPr id="24" name="TextBox 23"/>
+          <p:cNvSpPr txBox="1"/>
+          <p:nvPr/>
+        </p:nvSpPr>
+        <p:spPr>
+          <a:xfrm>
+            <a:off x="685800" y="4462272"/>
+            <a:ext cx="10789920" cy="594360"/>
+          </a:xfrm>
+          <a:prstGeom prst="rect">
+            <a:avLst/>
+          </a:prstGeom>
+          <a:noFill/>
+        </p:spPr>
+        <p:txBody>
+          <a:bodyPr wrap="square" lIns="18288" rIns="18288" tIns="27432" bIns="0">
+            <a:spAutoFit/>
+          </a:bodyPr>
+          <a:lstStyle/>
+          <a:p>
+            <a:pPr>
+              <a:spcAft>
+                <a:spcPts val="1000"/>
+              </a:spcAft>
+              <a:defRPr sz="2100" b="1">
                 <a:solidFill>
                   <a:srgbClr val="194F8E"/>
                 </a:solidFill>
@@ -7550,21 +8875,21 @@
               </a:defRPr>
             </a:pPr>
             <a:r>
-              <a:t>PYTHON STREAMING ON YARN</a:t>
-            </a:r>
-          </a:p>
-        </p:txBody>
-      </p:sp>
-      <p:sp>
-        <p:nvSpPr>
-          <p:cNvPr id="14" name="TextBox 13"/>
-          <p:cNvSpPr txBox="1"/>
-          <p:nvPr/>
-        </p:nvSpPr>
-        <p:spPr>
-          <a:xfrm>
-            <a:off x="6464807" y="2514600"/>
-            <a:ext cx="4946903" cy="594360"/>
+              <a:t>MongoDB pipelines use $match, $group, $project, $unwind and $facet.</a:t>
+            </a:r>
+          </a:p>
+        </p:txBody>
+      </p:sp>
+      <p:sp>
+        <p:nvSpPr>
+          <p:cNvPr id="25" name="TextBox 24"/>
+          <p:cNvSpPr txBox="1"/>
+          <p:nvPr/>
+        </p:nvSpPr>
+        <p:spPr>
+          <a:xfrm>
+            <a:off x="685800" y="5166360"/>
+            <a:ext cx="10789920" cy="731520"/>
           </a:xfrm>
           <a:prstGeom prst="rect">
             <a:avLst/>
@@ -7581,46 +8906,23 @@
               <a:spcAft>
                 <a:spcPts val="1000"/>
               </a:spcAft>
-              <a:defRPr sz="2200" b="1">
-                <a:solidFill>
-                  <a:srgbClr val="14284B"/>
-                </a:solidFill>
-                <a:latin typeface="Aptos"/>
-              </a:defRPr>
-            </a:pPr>
-            <a:r>
-              <a:t>Map → shuffle → reduce</a:t>
-            </a:r>
-          </a:p>
-        </p:txBody>
-      </p:sp>
-      <p:sp>
-        <p:nvSpPr>
-          <p:cNvPr id="15" name="TextBox 14"/>
-          <p:cNvSpPr txBox="1"/>
-          <p:nvPr/>
-        </p:nvSpPr>
-        <p:spPr>
-          <a:xfrm>
-            <a:off x="6464807" y="3383280"/>
-            <a:ext cx="4946903" cy="2011680"/>
-          </a:xfrm>
-          <a:prstGeom prst="rect">
-            <a:avLst/>
-          </a:prstGeom>
-          <a:noFill/>
-        </p:spPr>
-        <p:txBody>
-          <a:bodyPr wrap="square" lIns="18288" rIns="18288" tIns="27432" bIns="0">
-            <a:spAutoFit/>
-          </a:bodyPr>
-          <a:lstStyle/>
+              <a:defRPr sz="2000" b="0">
+                <a:solidFill>
+                  <a:srgbClr val="2A3140"/>
+                </a:solidFill>
+                <a:latin typeface="Aptos"/>
+              </a:defRPr>
+            </a:pPr>
+            <a:r>
+              <a:t>HDFS demonstrates mkdir, put, cat, get and rm -r.</a:t>
+            </a:r>
+          </a:p>
           <a:p>
             <a:pPr>
               <a:spcAft>
                 <a:spcPts val="1000"/>
               </a:spcAft>
-              <a:defRPr sz="1700" b="0">
+              <a:defRPr sz="2000" b="0">
                 <a:solidFill>
                   <a:srgbClr val="2A3140"/>
                 </a:solidFill>
@@ -7628,78 +8930,7 @@
               </a:defRPr>
             </a:pPr>
             <a:r>
-              <a:t>Mapper emits nutrient groups and amounts.</a:t>
-            </a:r>
-          </a:p>
-          <a:p>
-            <a:pPr>
-              <a:spcAft>
-                <a:spcPts val="1000"/>
-              </a:spcAft>
-              <a:defRPr sz="1700" b="0">
-                <a:solidFill>
-                  <a:srgbClr val="2A3140"/>
-                </a:solidFill>
-                <a:latin typeface="Aptos"/>
-              </a:defRPr>
-            </a:pPr>
-            <a:r>
-              <a:t>Reducers calculate count, total and mean.</a:t>
-            </a:r>
-          </a:p>
-          <a:p>
-            <a:pPr>
-              <a:spcAft>
-                <a:spcPts val="1000"/>
-              </a:spcAft>
-              <a:defRPr sz="1700" b="0">
-                <a:solidFill>
-                  <a:srgbClr val="2A3140"/>
-                </a:solidFill>
-                <a:latin typeface="Aptos"/>
-              </a:defRPr>
-            </a:pPr>
-            <a:r>
-              <a:t>Results are checked against reference answers.</a:t>
-            </a:r>
-          </a:p>
-        </p:txBody>
-      </p:sp>
-      <p:sp>
-        <p:nvSpPr>
-          <p:cNvPr id="16" name="TextBox 15"/>
-          <p:cNvSpPr txBox="1"/>
-          <p:nvPr/>
-        </p:nvSpPr>
-        <p:spPr>
-          <a:xfrm>
-            <a:off x="685800" y="5669280"/>
-            <a:ext cx="10881360" cy="365760"/>
-          </a:xfrm>
-          <a:prstGeom prst="rect">
-            <a:avLst/>
-          </a:prstGeom>
-          <a:noFill/>
-        </p:spPr>
-        <p:txBody>
-          <a:bodyPr wrap="square" lIns="18288" rIns="18288" tIns="27432" bIns="0">
-            <a:spAutoFit/>
-          </a:bodyPr>
-          <a:lstStyle/>
-          <a:p>
-            <a:pPr>
-              <a:spcAft>
-                <a:spcPts val="1000"/>
-              </a:spcAft>
-              <a:defRPr sz="1700" b="0">
-                <a:solidFill>
-                  <a:srgbClr val="596678"/>
-                </a:solidFill>
-                <a:latin typeface="Aptos"/>
-              </a:defRPr>
-            </a:pPr>
-            <a:r>
-              <a:t>Development: master + two Docker workers. Lab architecture: three physical Ubuntu systems.</a:t>
+              <a:t>Hive runs identical questions on both formats and records time and storage.</a:t>
             </a:r>
           </a:p>
         </p:txBody>
@@ -7807,7 +9038,7 @@
               </a:defRPr>
             </a:pPr>
             <a:r>
-              <a:t>THEME 3 · PIG &amp; HIVE</a:t>
+              <a:t>RESULTS · RECORDED 50,000-FOOD DEVELOPMENT RUN</a:t>
             </a:r>
           </a:p>
         </p:txBody>
@@ -7846,7 +9077,7 @@
               </a:defRPr>
             </a:pPr>
             <a:r>
-              <a:t>Clean once, compare two storage formats</a:t>
+              <a:t>The index checks 1 document instead of 50,000</a:t>
             </a:r>
           </a:p>
         </p:txBody>
@@ -7974,20 +9205,20 @@
       </p:sp>
       <p:sp>
         <p:nvSpPr>
-          <p:cNvPr id="8" name="Rounded Rectangle 7"/>
+          <p:cNvPr id="8" name="Rectangle 7"/>
           <p:cNvSpPr/>
           <p:nvPr/>
         </p:nvSpPr>
         <p:spPr>
           <a:xfrm>
-            <a:off x="548640" y="1901952"/>
-            <a:ext cx="3566160" cy="3611880"/>
-          </a:xfrm>
-          <a:prstGeom prst="roundRect">
+            <a:off x="594360" y="1856231"/>
+            <a:ext cx="10972800" cy="566928"/>
+          </a:xfrm>
+          <a:prstGeom prst="rect">
             <a:avLst/>
           </a:prstGeom>
           <a:solidFill>
-            <a:srgbClr val="EDF3FA"/>
+            <a:srgbClr val="14284B"/>
           </a:solidFill>
           <a:ln>
             <a:noFill/>
@@ -8023,8 +9254,8 @@
         </p:nvSpPr>
         <p:spPr>
           <a:xfrm>
-            <a:off x="749808" y="2084832"/>
-            <a:ext cx="3163824" cy="320040"/>
+            <a:off x="731520" y="1947672"/>
+            <a:ext cx="4434840" cy="438912"/>
           </a:xfrm>
           <a:prstGeom prst="rect">
             <a:avLst/>
@@ -8041,15 +9272,15 @@
               <a:spcAft>
                 <a:spcPts val="1000"/>
               </a:spcAft>
-              <a:defRPr sz="1100" b="1">
-                <a:solidFill>
-                  <a:srgbClr val="194F8E"/>
-                </a:solidFill>
-                <a:latin typeface="Aptos"/>
-              </a:defRPr>
-            </a:pPr>
-            <a:r>
-              <a:t>01 / PIG</a:t>
+              <a:defRPr sz="1700" b="1">
+                <a:solidFill>
+                  <a:srgbClr val="FFFFFF"/>
+                </a:solidFill>
+                <a:latin typeface="Aptos"/>
+              </a:defRPr>
+            </a:pPr>
+            <a:r>
+              <a:t>Same MongoDB lookup</a:t>
             </a:r>
           </a:p>
         </p:txBody>
@@ -8062,8 +9293,8 @@
         </p:nvSpPr>
         <p:spPr>
           <a:xfrm>
-            <a:off x="749808" y="2496312"/>
-            <a:ext cx="3163824" cy="594360"/>
+            <a:off x="5394960" y="1947672"/>
+            <a:ext cx="3108960" cy="438912"/>
           </a:xfrm>
           <a:prstGeom prst="rect">
             <a:avLst/>
@@ -8080,15 +9311,15 @@
               <a:spcAft>
                 <a:spcPts val="1000"/>
               </a:spcAft>
-              <a:defRPr sz="2200" b="1">
-                <a:solidFill>
-                  <a:srgbClr val="14284B"/>
-                </a:solidFill>
-                <a:latin typeface="Aptos"/>
-              </a:defRPr>
-            </a:pPr>
-            <a:r>
-              <a:t>Clean the HDFS data</a:t>
+              <a:defRPr sz="1700" b="1">
+                <a:solidFill>
+                  <a:srgbClr val="FFFFFF"/>
+                </a:solidFill>
+                <a:latin typeface="Aptos"/>
+              </a:defRPr>
+            </a:pPr>
+            <a:r>
+              <a:t>Documents examined</a:t>
             </a:r>
           </a:p>
         </p:txBody>
@@ -8101,8 +9332,8 @@
         </p:nvSpPr>
         <p:spPr>
           <a:xfrm>
-            <a:off x="749808" y="3364992"/>
-            <a:ext cx="3163824" cy="2103120"/>
+            <a:off x="8732520" y="1947672"/>
+            <a:ext cx="2743200" cy="438912"/>
           </a:xfrm>
           <a:prstGeom prst="rect">
             <a:avLst/>
@@ -8119,31 +9350,31 @@
               <a:spcAft>
                 <a:spcPts val="1000"/>
               </a:spcAft>
-              <a:defRPr sz="1700" b="0">
-                <a:solidFill>
-                  <a:srgbClr val="2A3140"/>
-                </a:solidFill>
-                <a:latin typeface="Aptos"/>
-              </a:defRPr>
-            </a:pPr>
-            <a:r>
-              <a:t>Load prepared records; keep usable, nonnegative nutrient amounts. Save cleaned records to HDFS.</a:t>
-            </a:r>
-          </a:p>
-        </p:txBody>
-      </p:sp>
-      <p:sp>
-        <p:nvSpPr>
-          <p:cNvPr id="12" name="Rounded Rectangle 11"/>
+              <a:defRPr sz="1700" b="1">
+                <a:solidFill>
+                  <a:srgbClr val="FFFFFF"/>
+                </a:solidFill>
+                <a:latin typeface="Aptos"/>
+              </a:defRPr>
+            </a:pPr>
+            <a:r>
+              <a:t>Results returned</a:t>
+            </a:r>
+          </a:p>
+        </p:txBody>
+      </p:sp>
+      <p:sp>
+        <p:nvSpPr>
+          <p:cNvPr id="12" name="Rectangle 11"/>
           <p:cNvSpPr/>
           <p:nvPr/>
         </p:nvSpPr>
         <p:spPr>
           <a:xfrm>
-            <a:off x="4325112" y="1901952"/>
-            <a:ext cx="3566160" cy="3611880"/>
-          </a:xfrm>
-          <a:prstGeom prst="roundRect">
+            <a:off x="594360" y="2423160"/>
+            <a:ext cx="10972800" cy="566928"/>
+          </a:xfrm>
+          <a:prstGeom prst="rect">
             <a:avLst/>
           </a:prstGeom>
           <a:solidFill>
@@ -8183,8 +9414,8 @@
         </p:nvSpPr>
         <p:spPr>
           <a:xfrm>
-            <a:off x="4526280" y="2084832"/>
-            <a:ext cx="3163824" cy="320040"/>
+            <a:off x="731520" y="2514600"/>
+            <a:ext cx="4434840" cy="438912"/>
           </a:xfrm>
           <a:prstGeom prst="rect">
             <a:avLst/>
@@ -8201,15 +9432,15 @@
               <a:spcAft>
                 <a:spcPts val="1000"/>
               </a:spcAft>
-              <a:defRPr sz="1100" b="1">
-                <a:solidFill>
-                  <a:srgbClr val="194F8E"/>
-                </a:solidFill>
-                <a:latin typeface="Aptos"/>
-              </a:defRPr>
-            </a:pPr>
-            <a:r>
-              <a:t>02 / HIVE</a:t>
+              <a:defRPr sz="1700" b="0">
+                <a:solidFill>
+                  <a:srgbClr val="2A3140"/>
+                </a:solidFill>
+                <a:latin typeface="Aptos"/>
+              </a:defRPr>
+            </a:pPr>
+            <a:r>
+              <a:t>Collection scan</a:t>
             </a:r>
           </a:p>
         </p:txBody>
@@ -8222,8 +9453,8 @@
         </p:nvSpPr>
         <p:spPr>
           <a:xfrm>
-            <a:off x="4526280" y="2496312"/>
-            <a:ext cx="3163824" cy="594360"/>
+            <a:off x="5394960" y="2514600"/>
+            <a:ext cx="3108960" cy="438912"/>
           </a:xfrm>
           <a:prstGeom prst="rect">
             <a:avLst/>
@@ -8240,15 +9471,15 @@
               <a:spcAft>
                 <a:spcPts val="1000"/>
               </a:spcAft>
-              <a:defRPr sz="2200" b="1">
-                <a:solidFill>
-                  <a:srgbClr val="14284B"/>
-                </a:solidFill>
-                <a:latin typeface="Aptos"/>
-              </a:defRPr>
-            </a:pPr>
-            <a:r>
-              <a:t>Same data, two tables</a:t>
+              <a:defRPr sz="1700" b="0">
+                <a:solidFill>
+                  <a:srgbClr val="2A3140"/>
+                </a:solidFill>
+                <a:latin typeface="Aptos"/>
+              </a:defRPr>
+            </a:pPr>
+            <a:r>
+              <a:t>50,000</a:t>
             </a:r>
           </a:p>
         </p:txBody>
@@ -8261,8 +9492,8 @@
         </p:nvSpPr>
         <p:spPr>
           <a:xfrm>
-            <a:off x="4526280" y="3364992"/>
-            <a:ext cx="3163824" cy="2103120"/>
+            <a:off x="8732520" y="2514600"/>
+            <a:ext cx="2743200" cy="438912"/>
           </a:xfrm>
           <a:prstGeom prst="rect">
             <a:avLst/>
@@ -8287,43 +9518,27 @@
               </a:defRPr>
             </a:pPr>
             <a:r>
-              <a:t>Text: readable row data.</a:t>
-            </a:r>
-          </a:p>
-          <a:p>
-            <a:pPr>
-              <a:spcAft>
-                <a:spcPts val="1000"/>
-              </a:spcAft>
-              <a:defRPr sz="1700" b="0">
-                <a:solidFill>
-                  <a:srgbClr val="2A3140"/>
-                </a:solidFill>
-                <a:latin typeface="Aptos"/>
-              </a:defRPr>
-            </a:pPr>
-            <a:r>
-              <a:t>RCFile: binary column-oriented storage, using compression in this project.</a:t>
-            </a:r>
-          </a:p>
-        </p:txBody>
-      </p:sp>
-      <p:sp>
-        <p:nvSpPr>
-          <p:cNvPr id="16" name="Rounded Rectangle 15"/>
+              <a:t>1</a:t>
+            </a:r>
+          </a:p>
+        </p:txBody>
+      </p:sp>
+      <p:sp>
+        <p:nvSpPr>
+          <p:cNvPr id="16" name="Rectangle 15"/>
           <p:cNvSpPr/>
           <p:nvPr/>
         </p:nvSpPr>
         <p:spPr>
           <a:xfrm>
-            <a:off x="8101583" y="1901952"/>
-            <a:ext cx="3538728" cy="3611880"/>
-          </a:xfrm>
-          <a:prstGeom prst="roundRect">
+            <a:off x="594360" y="2990087"/>
+            <a:ext cx="10972800" cy="566928"/>
+          </a:xfrm>
+          <a:prstGeom prst="rect">
             <a:avLst/>
           </a:prstGeom>
           <a:solidFill>
-            <a:srgbClr val="EDF3FA"/>
+            <a:srgbClr val="F7F9FC"/>
           </a:solidFill>
           <a:ln>
             <a:noFill/>
@@ -8359,8 +9574,8 @@
         </p:nvSpPr>
         <p:spPr>
           <a:xfrm>
-            <a:off x="8302752" y="2084832"/>
-            <a:ext cx="3136392" cy="320040"/>
+            <a:off x="731520" y="3081527"/>
+            <a:ext cx="4434840" cy="438912"/>
           </a:xfrm>
           <a:prstGeom prst="rect">
             <a:avLst/>
@@ -8377,7 +9592,124 @@
               <a:spcAft>
                 <a:spcPts val="1000"/>
               </a:spcAft>
-              <a:defRPr sz="1100" b="1">
+              <a:defRPr sz="1700" b="0">
+                <a:solidFill>
+                  <a:srgbClr val="2A3140"/>
+                </a:solidFill>
+                <a:latin typeface="Aptos"/>
+              </a:defRPr>
+            </a:pPr>
+            <a:r>
+              <a:t>Indexed lookup</a:t>
+            </a:r>
+          </a:p>
+        </p:txBody>
+      </p:sp>
+      <p:sp>
+        <p:nvSpPr>
+          <p:cNvPr id="18" name="TextBox 17"/>
+          <p:cNvSpPr txBox="1"/>
+          <p:nvPr/>
+        </p:nvSpPr>
+        <p:spPr>
+          <a:xfrm>
+            <a:off x="5394960" y="3081527"/>
+            <a:ext cx="3108960" cy="438912"/>
+          </a:xfrm>
+          <a:prstGeom prst="rect">
+            <a:avLst/>
+          </a:prstGeom>
+          <a:noFill/>
+        </p:spPr>
+        <p:txBody>
+          <a:bodyPr wrap="square" lIns="18288" rIns="18288" tIns="27432" bIns="0">
+            <a:spAutoFit/>
+          </a:bodyPr>
+          <a:lstStyle/>
+          <a:p>
+            <a:pPr>
+              <a:spcAft>
+                <a:spcPts val="1000"/>
+              </a:spcAft>
+              <a:defRPr sz="1700" b="0">
+                <a:solidFill>
+                  <a:srgbClr val="2A3140"/>
+                </a:solidFill>
+                <a:latin typeface="Aptos"/>
+              </a:defRPr>
+            </a:pPr>
+            <a:r>
+              <a:t>1</a:t>
+            </a:r>
+          </a:p>
+        </p:txBody>
+      </p:sp>
+      <p:sp>
+        <p:nvSpPr>
+          <p:cNvPr id="19" name="TextBox 18"/>
+          <p:cNvSpPr txBox="1"/>
+          <p:nvPr/>
+        </p:nvSpPr>
+        <p:spPr>
+          <a:xfrm>
+            <a:off x="8732520" y="3081527"/>
+            <a:ext cx="2743200" cy="438912"/>
+          </a:xfrm>
+          <a:prstGeom prst="rect">
+            <a:avLst/>
+          </a:prstGeom>
+          <a:noFill/>
+        </p:spPr>
+        <p:txBody>
+          <a:bodyPr wrap="square" lIns="18288" rIns="18288" tIns="27432" bIns="0">
+            <a:spAutoFit/>
+          </a:bodyPr>
+          <a:lstStyle/>
+          <a:p>
+            <a:pPr>
+              <a:spcAft>
+                <a:spcPts val="1000"/>
+              </a:spcAft>
+              <a:defRPr sz="1700" b="0">
+                <a:solidFill>
+                  <a:srgbClr val="2A3140"/>
+                </a:solidFill>
+                <a:latin typeface="Aptos"/>
+              </a:defRPr>
+            </a:pPr>
+            <a:r>
+              <a:t>1</a:t>
+            </a:r>
+          </a:p>
+        </p:txBody>
+      </p:sp>
+      <p:sp>
+        <p:nvSpPr>
+          <p:cNvPr id="20" name="TextBox 19"/>
+          <p:cNvSpPr txBox="1"/>
+          <p:nvPr/>
+        </p:nvSpPr>
+        <p:spPr>
+          <a:xfrm>
+            <a:off x="685800" y="3886200"/>
+            <a:ext cx="10789920" cy="594360"/>
+          </a:xfrm>
+          <a:prstGeom prst="rect">
+            <a:avLst/>
+          </a:prstGeom>
+          <a:noFill/>
+        </p:spPr>
+        <p:txBody>
+          <a:bodyPr wrap="square" lIns="18288" rIns="18288" tIns="27432" bIns="0">
+            <a:spAutoFit/>
+          </a:bodyPr>
+          <a:lstStyle/>
+          <a:p>
+            <a:pPr>
+              <a:spcAft>
+                <a:spcPts val="1000"/>
+              </a:spcAft>
+              <a:defRPr sz="2600" b="1">
                 <a:solidFill>
                   <a:srgbClr val="194F8E"/>
                 </a:solidFill>
@@ -8385,21 +9717,21 @@
               </a:defRPr>
             </a:pPr>
             <a:r>
-              <a:t>03 / BENCHMARK</a:t>
-            </a:r>
-          </a:p>
-        </p:txBody>
-      </p:sp>
-      <p:sp>
-        <p:nvSpPr>
-          <p:cNvPr id="18" name="TextBox 17"/>
-          <p:cNvSpPr txBox="1"/>
-          <p:nvPr/>
-        </p:nvSpPr>
-        <p:spPr>
-          <a:xfrm>
-            <a:off x="8302752" y="2496312"/>
-            <a:ext cx="3136392" cy="594360"/>
+              <a:t>The answer stays the same; the amount of searching changes.</a:t>
+            </a:r>
+          </a:p>
+        </p:txBody>
+      </p:sp>
+      <p:sp>
+        <p:nvSpPr>
+          <p:cNvPr id="21" name="TextBox 20"/>
+          <p:cNvSpPr txBox="1"/>
+          <p:nvPr/>
+        </p:nvSpPr>
+        <p:spPr>
+          <a:xfrm>
+            <a:off x="685800" y="4645152"/>
+            <a:ext cx="10789920" cy="640080"/>
           </a:xfrm>
           <a:prstGeom prst="rect">
             <a:avLst/>
@@ -8416,79 +9748,72 @@
               <a:spcAft>
                 <a:spcPts val="1000"/>
               </a:spcAft>
-              <a:defRPr sz="2200" b="1">
-                <a:solidFill>
-                  <a:srgbClr val="14284B"/>
-                </a:solidFill>
-                <a:latin typeface="Aptos"/>
-              </a:defRPr>
-            </a:pPr>
-            <a:r>
-              <a:t>Same questions, checked answers</a:t>
-            </a:r>
-          </a:p>
-        </p:txBody>
-      </p:sp>
-      <p:sp>
-        <p:nvSpPr>
-          <p:cNvPr id="19" name="TextBox 18"/>
-          <p:cNvSpPr txBox="1"/>
-          <p:nvPr/>
-        </p:nvSpPr>
-        <p:spPr>
-          <a:xfrm>
-            <a:off x="8302752" y="3364992"/>
-            <a:ext cx="3136392" cy="2103120"/>
-          </a:xfrm>
-          <a:prstGeom prst="rect">
-            <a:avLst/>
-          </a:prstGeom>
-          <a:noFill/>
-        </p:spPr>
-        <p:txBody>
-          <a:bodyPr wrap="square" lIns="18288" rIns="18288" tIns="27432" bIns="0">
-            <a:spAutoFit/>
-          </a:bodyPr>
-          <a:lstStyle/>
+              <a:defRPr sz="2200" b="0">
+                <a:solidFill>
+                  <a:srgbClr val="2A3140"/>
+                </a:solidFill>
+                <a:latin typeface="Aptos"/>
+              </a:defRPr>
+            </a:pPr>
+            <a:r>
+              <a:t>The 50,000-food test also passed cross-system reconciliation for</a:t>
+            </a:r>
+          </a:p>
           <a:p>
             <a:pPr>
               <a:spcAft>
                 <a:spcPts val="1000"/>
               </a:spcAft>
+              <a:defRPr sz="2200" b="0">
+                <a:solidFill>
+                  <a:srgbClr val="2A3140"/>
+                </a:solidFill>
+                <a:latin typeface="Aptos"/>
+              </a:defRPr>
+            </a:pPr>
+            <a:r>
+              <a:t>1,126,928 linked nutrient records.</a:t>
+            </a:r>
+          </a:p>
+        </p:txBody>
+      </p:sp>
+      <p:sp>
+        <p:nvSpPr>
+          <p:cNvPr id="22" name="TextBox 21"/>
+          <p:cNvSpPr txBox="1"/>
+          <p:nvPr/>
+        </p:nvSpPr>
+        <p:spPr>
+          <a:xfrm>
+            <a:off x="685800" y="5596128"/>
+            <a:ext cx="10789920" cy="594360"/>
+          </a:xfrm>
+          <a:prstGeom prst="rect">
+            <a:avLst/>
+          </a:prstGeom>
+          <a:noFill/>
+        </p:spPr>
+        <p:txBody>
+          <a:bodyPr wrap="square" lIns="18288" rIns="18288" tIns="27432" bIns="0">
+            <a:spAutoFit/>
+          </a:bodyPr>
+          <a:lstStyle/>
+          <a:p>
+            <a:pPr>
+              <a:spcAft>
+                <a:spcPts val="1000"/>
+              </a:spcAft>
               <a:defRPr sz="1700" b="0">
                 <a:solidFill>
-                  <a:srgbClr val="2A3140"/>
-                </a:solidFill>
-                <a:latin typeface="Aptos"/>
-              </a:defRPr>
-            </a:pPr>
-            <a:r>
-              <a:t>Run identical analytical queries. Verify matching answers; record query time and storage bytes.</a:t>
-            </a:r>
-          </a:p>
-        </p:txBody>
-      </p:sp>
-      <p:sp>
-        <p:nvSpPr>
-          <p:cNvPr id="20" name="TextBox 19"/>
-          <p:cNvSpPr txBox="1"/>
-          <p:nvPr/>
-        </p:nvSpPr>
-        <p:spPr>
-          <a:xfrm>
-            <a:off x="685800" y="5760720"/>
-            <a:ext cx="10881360" cy="365760"/>
-          </a:xfrm>
-          <a:prstGeom prst="rect">
-            <a:avLst/>
-          </a:prstGeom>
-          <a:noFill/>
-        </p:spPr>
-        <p:txBody>
-          <a:bodyPr wrap="square" lIns="18288" rIns="18288" tIns="27432" bIns="0">
-            <a:spAutoFit/>
-          </a:bodyPr>
-          <a:lstStyle/>
+                  <a:srgbClr val="596678"/>
+                </a:solidFill>
+                <a:latin typeface="Aptos"/>
+              </a:defRPr>
+            </a:pPr>
+            <a:r>
+              <a:t>Hive comparison: identical answers are checked first, then query time and storage are compared.</a:t>
+            </a:r>
+          </a:p>
           <a:p>
             <a:pPr>
               <a:spcAft>
@@ -8502,7 +9827,7 @@
               </a:defRPr>
             </a:pPr>
             <a:r>
-              <a:t>Tables are reused across query repetitions; storage is measured separately from query time.</a:t>
+              <a:t>These results describe the laptop development run, not a completed physical lab run.</a:t>
             </a:r>
           </a:p>
         </p:txBody>
@@ -8610,7 +9935,7 @@
               </a:defRPr>
             </a:pPr>
             <a:r>
-              <a:t>TRACK B · PART 2</a:t>
+              <a:t>TRACK B EXTENSION · FLASK DASHBOARD</a:t>
             </a:r>
           </a:p>
         </p:txBody>
@@ -8649,7 +9974,7 @@
               </a:defRPr>
             </a:pPr>
             <a:r>
-              <a:t>A dashboard that makes the work visible</a:t>
+              <a:t>The demo shows the data, the answers and the proof</a:t>
             </a:r>
           </a:p>
         </p:txBody>
@@ -8777,44 +10102,40 @@
       </p:sp>
       <p:sp>
         <p:nvSpPr>
-          <p:cNvPr id="8" name="Rounded Rectangle 7"/>
-          <p:cNvSpPr/>
-          <p:nvPr/>
-        </p:nvSpPr>
-        <p:spPr>
-          <a:xfrm>
-            <a:off x="548640" y="1920240"/>
-            <a:ext cx="3566160" cy="3520440"/>
-          </a:xfrm>
-          <a:prstGeom prst="roundRect">
-            <a:avLst/>
-          </a:prstGeom>
-          <a:solidFill>
-            <a:srgbClr val="EDF3FA"/>
-          </a:solidFill>
-          <a:ln>
-            <a:noFill/>
-          </a:ln>
-        </p:spPr>
-        <p:style>
-          <a:lnRef idx="1">
-            <a:schemeClr val="accent1"/>
-          </a:lnRef>
-          <a:fillRef idx="3">
-            <a:schemeClr val="accent1"/>
-          </a:fillRef>
-          <a:effectRef idx="2">
-            <a:schemeClr val="accent1"/>
-          </a:effectRef>
-          <a:fontRef idx="minor">
-            <a:schemeClr val="lt1"/>
-          </a:fontRef>
-        </p:style>
-        <p:txBody>
-          <a:bodyPr rtlCol="0" anchor="ctr"/>
-          <a:lstStyle/>
-          <a:p>
-            <a:pPr algn="ctr"/>
+          <p:cNvPr id="8" name="TextBox 7"/>
+          <p:cNvSpPr txBox="1"/>
+          <p:nvPr/>
+        </p:nvSpPr>
+        <p:spPr>
+          <a:xfrm>
+            <a:off x="594360" y="1828800"/>
+            <a:ext cx="594360" cy="594360"/>
+          </a:xfrm>
+          <a:prstGeom prst="rect">
+            <a:avLst/>
+          </a:prstGeom>
+          <a:noFill/>
+        </p:spPr>
+        <p:txBody>
+          <a:bodyPr wrap="square" lIns="18288" rIns="18288" tIns="27432" bIns="0">
+            <a:spAutoFit/>
+          </a:bodyPr>
+          <a:lstStyle/>
+          <a:p>
+            <a:pPr>
+              <a:spcAft>
+                <a:spcPts val="1000"/>
+              </a:spcAft>
+              <a:defRPr sz="2700" b="1">
+                <a:solidFill>
+                  <a:srgbClr val="194F8E"/>
+                </a:solidFill>
+                <a:latin typeface="Aptos"/>
+              </a:defRPr>
+            </a:pPr>
+            <a:r>
+              <a:t>01</a:t>
+            </a:r>
           </a:p>
         </p:txBody>
       </p:sp>
@@ -8826,8 +10147,8 @@
         </p:nvSpPr>
         <p:spPr>
           <a:xfrm>
-            <a:off x="749808" y="2103120"/>
-            <a:ext cx="3163824" cy="320040"/>
+            <a:off x="1371600" y="1828800"/>
+            <a:ext cx="9875520" cy="457200"/>
           </a:xfrm>
           <a:prstGeom prst="rect">
             <a:avLst/>
@@ -8844,7 +10165,85 @@
               <a:spcAft>
                 <a:spcPts val="1000"/>
               </a:spcAft>
-              <a:defRPr sz="1100" b="1">
+              <a:defRPr sz="2400" b="1">
+                <a:solidFill>
+                  <a:srgbClr val="14284B"/>
+                </a:solidFill>
+                <a:latin typeface="Aptos"/>
+              </a:defRPr>
+            </a:pPr>
+            <a:r>
+              <a:t>Before analysis</a:t>
+            </a:r>
+          </a:p>
+        </p:txBody>
+      </p:sp>
+      <p:sp>
+        <p:nvSpPr>
+          <p:cNvPr id="10" name="TextBox 9"/>
+          <p:cNvSpPr txBox="1"/>
+          <p:nvPr/>
+        </p:nvSpPr>
+        <p:spPr>
+          <a:xfrm>
+            <a:off x="1371600" y="2441448"/>
+            <a:ext cx="9784080" cy="640080"/>
+          </a:xfrm>
+          <a:prstGeom prst="rect">
+            <a:avLst/>
+          </a:prstGeom>
+          <a:noFill/>
+        </p:spPr>
+        <p:txBody>
+          <a:bodyPr wrap="square" lIns="18288" rIns="18288" tIns="27432" bIns="0">
+            <a:spAutoFit/>
+          </a:bodyPr>
+          <a:lstStyle/>
+          <a:p>
+            <a:pPr>
+              <a:spcAft>
+                <a:spcPts val="1000"/>
+              </a:spcAft>
+              <a:defRPr sz="2000" b="0">
+                <a:solidFill>
+                  <a:srgbClr val="2A3140"/>
+                </a:solidFill>
+                <a:latin typeface="Aptos"/>
+              </a:defRPr>
+            </a:pPr>
+            <a:r>
+              <a:t>Show a few actual food documents and their linked nutrient records.</a:t>
+            </a:r>
+          </a:p>
+        </p:txBody>
+      </p:sp>
+      <p:sp>
+        <p:nvSpPr>
+          <p:cNvPr id="11" name="TextBox 10"/>
+          <p:cNvSpPr txBox="1"/>
+          <p:nvPr/>
+        </p:nvSpPr>
+        <p:spPr>
+          <a:xfrm>
+            <a:off x="594360" y="3127248"/>
+            <a:ext cx="594360" cy="594360"/>
+          </a:xfrm>
+          <a:prstGeom prst="rect">
+            <a:avLst/>
+          </a:prstGeom>
+          <a:noFill/>
+        </p:spPr>
+        <p:txBody>
+          <a:bodyPr wrap="square" lIns="18288" rIns="18288" tIns="27432" bIns="0">
+            <a:spAutoFit/>
+          </a:bodyPr>
+          <a:lstStyle/>
+          <a:p>
+            <a:pPr>
+              <a:spcAft>
+                <a:spcPts val="1000"/>
+              </a:spcAft>
+              <a:defRPr sz="2700" b="1">
                 <a:solidFill>
                   <a:srgbClr val="194F8E"/>
                 </a:solidFill>
@@ -8852,21 +10251,21 @@
               </a:defRPr>
             </a:pPr>
             <a:r>
-              <a:t>RUN</a:t>
-            </a:r>
-          </a:p>
-        </p:txBody>
-      </p:sp>
-      <p:sp>
-        <p:nvSpPr>
-          <p:cNvPr id="10" name="TextBox 9"/>
-          <p:cNvSpPr txBox="1"/>
-          <p:nvPr/>
-        </p:nvSpPr>
-        <p:spPr>
-          <a:xfrm>
-            <a:off x="749808" y="2514600"/>
-            <a:ext cx="3163824" cy="594360"/>
+              <a:t>02</a:t>
+            </a:r>
+          </a:p>
+        </p:txBody>
+      </p:sp>
+      <p:sp>
+        <p:nvSpPr>
+          <p:cNvPr id="12" name="TextBox 11"/>
+          <p:cNvSpPr txBox="1"/>
+          <p:nvPr/>
+        </p:nvSpPr>
+        <p:spPr>
+          <a:xfrm>
+            <a:off x="1371600" y="3127248"/>
+            <a:ext cx="9875520" cy="457200"/>
           </a:xfrm>
           <a:prstGeom prst="rect">
             <a:avLst/>
@@ -8883,7 +10282,7 @@
               <a:spcAft>
                 <a:spcPts val="1000"/>
               </a:spcAft>
-              <a:defRPr sz="2200" b="1">
+              <a:defRPr sz="2400" b="1">
                 <a:solidFill>
                   <a:srgbClr val="14284B"/>
                 </a:solidFill>
@@ -8891,21 +10290,21 @@
               </a:defRPr>
             </a:pPr>
             <a:r>
-              <a:t>Control the workflow</a:t>
-            </a:r>
-          </a:p>
-        </p:txBody>
-      </p:sp>
-      <p:sp>
-        <p:nvSpPr>
-          <p:cNvPr id="11" name="TextBox 10"/>
-          <p:cNvSpPr txBox="1"/>
-          <p:nvPr/>
-        </p:nvSpPr>
-        <p:spPr>
-          <a:xfrm>
-            <a:off x="749808" y="3383280"/>
-            <a:ext cx="3163824" cy="2011680"/>
+              <a:t>After analysis</a:t>
+            </a:r>
+          </a:p>
+        </p:txBody>
+      </p:sp>
+      <p:sp>
+        <p:nvSpPr>
+          <p:cNvPr id="13" name="TextBox 12"/>
+          <p:cNvSpPr txBox="1"/>
+          <p:nvPr/>
+        </p:nvSpPr>
+        <p:spPr>
+          <a:xfrm>
+            <a:off x="1371600" y="3739896"/>
+            <a:ext cx="9784080" cy="640080"/>
           </a:xfrm>
           <a:prstGeom prst="rect">
             <a:avLst/>
@@ -8922,374 +10321,171 @@
               <a:spcAft>
                 <a:spcPts val="1000"/>
               </a:spcAft>
+              <a:defRPr sz="2000" b="0">
+                <a:solidFill>
+                  <a:srgbClr val="2A3140"/>
+                </a:solidFill>
+                <a:latin typeface="Aptos"/>
+              </a:defRPr>
+            </a:pPr>
+            <a:r>
+              <a:t>Show food counts, nutrient summaries and Text vs RCFile comparisons.</a:t>
+            </a:r>
+          </a:p>
+        </p:txBody>
+      </p:sp>
+      <p:sp>
+        <p:nvSpPr>
+          <p:cNvPr id="14" name="TextBox 13"/>
+          <p:cNvSpPr txBox="1"/>
+          <p:nvPr/>
+        </p:nvSpPr>
+        <p:spPr>
+          <a:xfrm>
+            <a:off x="594360" y="4425696"/>
+            <a:ext cx="594360" cy="594360"/>
+          </a:xfrm>
+          <a:prstGeom prst="rect">
+            <a:avLst/>
+          </a:prstGeom>
+          <a:noFill/>
+        </p:spPr>
+        <p:txBody>
+          <a:bodyPr wrap="square" lIns="18288" rIns="18288" tIns="27432" bIns="0">
+            <a:spAutoFit/>
+          </a:bodyPr>
+          <a:lstStyle/>
+          <a:p>
+            <a:pPr>
+              <a:spcAft>
+                <a:spcPts val="1000"/>
+              </a:spcAft>
+              <a:defRPr sz="2700" b="1">
+                <a:solidFill>
+                  <a:srgbClr val="194F8E"/>
+                </a:solidFill>
+                <a:latin typeface="Aptos"/>
+              </a:defRPr>
+            </a:pPr>
+            <a:r>
+              <a:t>03</a:t>
+            </a:r>
+          </a:p>
+        </p:txBody>
+      </p:sp>
+      <p:sp>
+        <p:nvSpPr>
+          <p:cNvPr id="15" name="TextBox 14"/>
+          <p:cNvSpPr txBox="1"/>
+          <p:nvPr/>
+        </p:nvSpPr>
+        <p:spPr>
+          <a:xfrm>
+            <a:off x="1371600" y="4425696"/>
+            <a:ext cx="9875520" cy="457200"/>
+          </a:xfrm>
+          <a:prstGeom prst="rect">
+            <a:avLst/>
+          </a:prstGeom>
+          <a:noFill/>
+        </p:spPr>
+        <p:txBody>
+          <a:bodyPr wrap="square" lIns="18288" rIns="18288" tIns="27432" bIns="0">
+            <a:spAutoFit/>
+          </a:bodyPr>
+          <a:lstStyle/>
+          <a:p>
+            <a:pPr>
+              <a:spcAft>
+                <a:spcPts val="1000"/>
+              </a:spcAft>
+              <a:defRPr sz="2400" b="1">
+                <a:solidFill>
+                  <a:srgbClr val="14284B"/>
+                </a:solidFill>
+                <a:latin typeface="Aptos"/>
+              </a:defRPr>
+            </a:pPr>
+            <a:r>
+              <a:t>Verify the source</a:t>
+            </a:r>
+          </a:p>
+        </p:txBody>
+      </p:sp>
+      <p:sp>
+        <p:nvSpPr>
+          <p:cNvPr id="16" name="TextBox 15"/>
+          <p:cNvSpPr txBox="1"/>
+          <p:nvPr/>
+        </p:nvSpPr>
+        <p:spPr>
+          <a:xfrm>
+            <a:off x="1371600" y="5038344"/>
+            <a:ext cx="9784080" cy="640080"/>
+          </a:xfrm>
+          <a:prstGeom prst="rect">
+            <a:avLst/>
+          </a:prstGeom>
+          <a:noFill/>
+        </p:spPr>
+        <p:txBody>
+          <a:bodyPr wrap="square" lIns="18288" rIns="18288" tIns="27432" bIns="0">
+            <a:spAutoFit/>
+          </a:bodyPr>
+          <a:lstStyle/>
+          <a:p>
+            <a:pPr>
+              <a:spcAft>
+                <a:spcPts val="1000"/>
+              </a:spcAft>
+              <a:defRPr sz="2000" b="0">
+                <a:solidFill>
+                  <a:srgbClr val="2A3140"/>
+                </a:solidFill>
+                <a:latin typeface="Aptos"/>
+              </a:defRPr>
+            </a:pPr>
+            <a:r>
+              <a:t>Copy the command beside a result and inspect MongoDB or HDFS in a terminal.</a:t>
+            </a:r>
+          </a:p>
+        </p:txBody>
+      </p:sp>
+      <p:sp>
+        <p:nvSpPr>
+          <p:cNvPr id="17" name="TextBox 16"/>
+          <p:cNvSpPr txBox="1"/>
+          <p:nvPr/>
+        </p:nvSpPr>
+        <p:spPr>
+          <a:xfrm>
+            <a:off x="685800" y="5870448"/>
+            <a:ext cx="10789920" cy="320040"/>
+          </a:xfrm>
+          <a:prstGeom prst="rect">
+            <a:avLst/>
+          </a:prstGeom>
+          <a:noFill/>
+        </p:spPr>
+        <p:txBody>
+          <a:bodyPr wrap="square" lIns="18288" rIns="18288" tIns="27432" bIns="0">
+            <a:spAutoFit/>
+          </a:bodyPr>
+          <a:lstStyle/>
+          <a:p>
+            <a:pPr>
+              <a:spcAft>
+                <a:spcPts val="1000"/>
+              </a:spcAft>
               <a:defRPr sz="1700" b="0">
                 <a:solidFill>
-                  <a:srgbClr val="2A3140"/>
-                </a:solidFill>
-                <a:latin typeface="Aptos"/>
-              </a:defRPr>
-            </a:pPr>
-            <a:r>
-              <a:t>Select a development size or full dataset. Follow stage progress and technical logs.</a:t>
-            </a:r>
-          </a:p>
-        </p:txBody>
-      </p:sp>
-      <p:sp>
-        <p:nvSpPr>
-          <p:cNvPr id="12" name="Rounded Rectangle 11"/>
-          <p:cNvSpPr/>
-          <p:nvPr/>
-        </p:nvSpPr>
-        <p:spPr>
-          <a:xfrm>
-            <a:off x="4325112" y="1920240"/>
-            <a:ext cx="3566160" cy="3520440"/>
-          </a:xfrm>
-          <a:prstGeom prst="roundRect">
-            <a:avLst/>
-          </a:prstGeom>
-          <a:solidFill>
-            <a:srgbClr val="EDF3FA"/>
-          </a:solidFill>
-          <a:ln>
-            <a:noFill/>
-          </a:ln>
-        </p:spPr>
-        <p:style>
-          <a:lnRef idx="1">
-            <a:schemeClr val="accent1"/>
-          </a:lnRef>
-          <a:fillRef idx="3">
-            <a:schemeClr val="accent1"/>
-          </a:fillRef>
-          <a:effectRef idx="2">
-            <a:schemeClr val="accent1"/>
-          </a:effectRef>
-          <a:fontRef idx="minor">
-            <a:schemeClr val="lt1"/>
-          </a:fontRef>
-        </p:style>
-        <p:txBody>
-          <a:bodyPr rtlCol="0" anchor="ctr"/>
-          <a:lstStyle/>
-          <a:p>
-            <a:pPr algn="ctr"/>
-          </a:p>
-        </p:txBody>
-      </p:sp>
-      <p:sp>
-        <p:nvSpPr>
-          <p:cNvPr id="13" name="TextBox 12"/>
-          <p:cNvSpPr txBox="1"/>
-          <p:nvPr/>
-        </p:nvSpPr>
-        <p:spPr>
-          <a:xfrm>
-            <a:off x="4526280" y="2103120"/>
-            <a:ext cx="3163824" cy="320040"/>
-          </a:xfrm>
-          <a:prstGeom prst="rect">
-            <a:avLst/>
-          </a:prstGeom>
-          <a:noFill/>
-        </p:spPr>
-        <p:txBody>
-          <a:bodyPr wrap="square" lIns="18288" rIns="18288" tIns="27432" bIns="0">
-            <a:spAutoFit/>
-          </a:bodyPr>
-          <a:lstStyle/>
-          <a:p>
-            <a:pPr>
-              <a:spcAft>
-                <a:spcPts val="1000"/>
-              </a:spcAft>
-              <a:defRPr sz="1100" b="1">
-                <a:solidFill>
-                  <a:srgbClr val="194F8E"/>
-                </a:solidFill>
-                <a:latin typeface="Aptos"/>
-              </a:defRPr>
-            </a:pPr>
-            <a:r>
-              <a:t>VIEW</a:t>
-            </a:r>
-          </a:p>
-        </p:txBody>
-      </p:sp>
-      <p:sp>
-        <p:nvSpPr>
-          <p:cNvPr id="14" name="TextBox 13"/>
-          <p:cNvSpPr txBox="1"/>
-          <p:nvPr/>
-        </p:nvSpPr>
-        <p:spPr>
-          <a:xfrm>
-            <a:off x="4526280" y="2514600"/>
-            <a:ext cx="3163824" cy="594360"/>
-          </a:xfrm>
-          <a:prstGeom prst="rect">
-            <a:avLst/>
-          </a:prstGeom>
-          <a:noFill/>
-        </p:spPr>
-        <p:txBody>
-          <a:bodyPr wrap="square" lIns="18288" rIns="18288" tIns="27432" bIns="0">
-            <a:spAutoFit/>
-          </a:bodyPr>
-          <a:lstStyle/>
-          <a:p>
-            <a:pPr>
-              <a:spcAft>
-                <a:spcPts val="1000"/>
-              </a:spcAft>
-              <a:defRPr sz="2200" b="1">
-                <a:solidFill>
-                  <a:srgbClr val="14284B"/>
-                </a:solidFill>
-                <a:latin typeface="Aptos"/>
-              </a:defRPr>
-            </a:pPr>
-            <a:r>
-              <a:t>Explain each theme</a:t>
-            </a:r>
-          </a:p>
-        </p:txBody>
-      </p:sp>
-      <p:sp>
-        <p:nvSpPr>
-          <p:cNvPr id="15" name="TextBox 14"/>
-          <p:cNvSpPr txBox="1"/>
-          <p:nvPr/>
-        </p:nvSpPr>
-        <p:spPr>
-          <a:xfrm>
-            <a:off x="4526280" y="3383280"/>
-            <a:ext cx="3163824" cy="2011680"/>
-          </a:xfrm>
-          <a:prstGeom prst="rect">
-            <a:avLst/>
-          </a:prstGeom>
-          <a:noFill/>
-        </p:spPr>
-        <p:txBody>
-          <a:bodyPr wrap="square" lIns="18288" rIns="18288" tIns="27432" bIns="0">
-            <a:spAutoFit/>
-          </a:bodyPr>
-          <a:lstStyle/>
-          <a:p>
-            <a:pPr>
-              <a:spcAft>
-                <a:spcPts val="1000"/>
-              </a:spcAft>
-              <a:defRPr sz="1700" b="0">
-                <a:solidFill>
-                  <a:srgbClr val="2A3140"/>
-                </a:solidFill>
-                <a:latin typeface="Aptos"/>
-              </a:defRPr>
-            </a:pPr>
-            <a:r>
-              <a:t>See raw MongoDB samples, aggregation answers, HDFS outputs and Hive comparisons.</a:t>
-            </a:r>
-          </a:p>
-        </p:txBody>
-      </p:sp>
-      <p:sp>
-        <p:nvSpPr>
-          <p:cNvPr id="16" name="Rounded Rectangle 15"/>
-          <p:cNvSpPr/>
-          <p:nvPr/>
-        </p:nvSpPr>
-        <p:spPr>
-          <a:xfrm>
-            <a:off x="8101583" y="1920240"/>
-            <a:ext cx="3538728" cy="3520440"/>
-          </a:xfrm>
-          <a:prstGeom prst="roundRect">
-            <a:avLst/>
-          </a:prstGeom>
-          <a:solidFill>
-            <a:srgbClr val="EDF3FA"/>
-          </a:solidFill>
-          <a:ln>
-            <a:noFill/>
-          </a:ln>
-        </p:spPr>
-        <p:style>
-          <a:lnRef idx="1">
-            <a:schemeClr val="accent1"/>
-          </a:lnRef>
-          <a:fillRef idx="3">
-            <a:schemeClr val="accent1"/>
-          </a:fillRef>
-          <a:effectRef idx="2">
-            <a:schemeClr val="accent1"/>
-          </a:effectRef>
-          <a:fontRef idx="minor">
-            <a:schemeClr val="lt1"/>
-          </a:fontRef>
-        </p:style>
-        <p:txBody>
-          <a:bodyPr rtlCol="0" anchor="ctr"/>
-          <a:lstStyle/>
-          <a:p>
-            <a:pPr algn="ctr"/>
-          </a:p>
-        </p:txBody>
-      </p:sp>
-      <p:sp>
-        <p:nvSpPr>
-          <p:cNvPr id="17" name="TextBox 16"/>
-          <p:cNvSpPr txBox="1"/>
-          <p:nvPr/>
-        </p:nvSpPr>
-        <p:spPr>
-          <a:xfrm>
-            <a:off x="8302752" y="2103120"/>
-            <a:ext cx="3136392" cy="320040"/>
-          </a:xfrm>
-          <a:prstGeom prst="rect">
-            <a:avLst/>
-          </a:prstGeom>
-          <a:noFill/>
-        </p:spPr>
-        <p:txBody>
-          <a:bodyPr wrap="square" lIns="18288" rIns="18288" tIns="27432" bIns="0">
-            <a:spAutoFit/>
-          </a:bodyPr>
-          <a:lstStyle/>
-          <a:p>
-            <a:pPr>
-              <a:spcAft>
-                <a:spcPts val="1000"/>
-              </a:spcAft>
-              <a:defRPr sz="1100" b="1">
-                <a:solidFill>
-                  <a:srgbClr val="194F8E"/>
-                </a:solidFill>
-                <a:latin typeface="Aptos"/>
-              </a:defRPr>
-            </a:pPr>
-            <a:r>
-              <a:t>VERIFY</a:t>
-            </a:r>
-          </a:p>
-        </p:txBody>
-      </p:sp>
-      <p:sp>
-        <p:nvSpPr>
-          <p:cNvPr id="18" name="TextBox 17"/>
-          <p:cNvSpPr txBox="1"/>
-          <p:nvPr/>
-        </p:nvSpPr>
-        <p:spPr>
-          <a:xfrm>
-            <a:off x="8302752" y="2514600"/>
-            <a:ext cx="3136392" cy="594360"/>
-          </a:xfrm>
-          <a:prstGeom prst="rect">
-            <a:avLst/>
-          </a:prstGeom>
-          <a:noFill/>
-        </p:spPr>
-        <p:txBody>
-          <a:bodyPr wrap="square" lIns="18288" rIns="18288" tIns="27432" bIns="0">
-            <a:spAutoFit/>
-          </a:bodyPr>
-          <a:lstStyle/>
-          <a:p>
-            <a:pPr>
-              <a:spcAft>
-                <a:spcPts val="1000"/>
-              </a:spcAft>
-              <a:defRPr sz="2200" b="1">
-                <a:solidFill>
-                  <a:srgbClr val="14284B"/>
-                </a:solidFill>
-                <a:latin typeface="Aptos"/>
-              </a:defRPr>
-            </a:pPr>
-            <a:r>
-              <a:t>Show the actual stored data</a:t>
-            </a:r>
-          </a:p>
-        </p:txBody>
-      </p:sp>
-      <p:sp>
-        <p:nvSpPr>
-          <p:cNvPr id="19" name="TextBox 18"/>
-          <p:cNvSpPr txBox="1"/>
-          <p:nvPr/>
-        </p:nvSpPr>
-        <p:spPr>
-          <a:xfrm>
-            <a:off x="8302752" y="3383280"/>
-            <a:ext cx="3136392" cy="2011680"/>
-          </a:xfrm>
-          <a:prstGeom prst="rect">
-            <a:avLst/>
-          </a:prstGeom>
-          <a:noFill/>
-        </p:spPr>
-        <p:txBody>
-          <a:bodyPr wrap="square" lIns="18288" rIns="18288" tIns="27432" bIns="0">
-            <a:spAutoFit/>
-          </a:bodyPr>
-          <a:lstStyle/>
-          <a:p>
-            <a:pPr>
-              <a:spcAft>
-                <a:spcPts val="1000"/>
-              </a:spcAft>
-              <a:defRPr sz="1700" b="0">
-                <a:solidFill>
-                  <a:srgbClr val="2A3140"/>
-                </a:solidFill>
-                <a:latin typeface="Aptos"/>
-              </a:defRPr>
-            </a:pPr>
-            <a:r>
-              <a:t>Copy the command beside a result. Run it in a second terminal with that service running.</a:t>
-            </a:r>
-          </a:p>
-        </p:txBody>
-      </p:sp>
-      <p:sp>
-        <p:nvSpPr>
-          <p:cNvPr id="20" name="TextBox 19"/>
-          <p:cNvSpPr txBox="1"/>
-          <p:nvPr/>
-        </p:nvSpPr>
-        <p:spPr>
-          <a:xfrm>
-            <a:off x="685800" y="5715000"/>
-            <a:ext cx="10881360" cy="411480"/>
-          </a:xfrm>
-          <a:prstGeom prst="rect">
-            <a:avLst/>
-          </a:prstGeom>
-          <a:noFill/>
-        </p:spPr>
-        <p:txBody>
-          <a:bodyPr wrap="square" lIns="18288" rIns="18288" tIns="27432" bIns="0">
-            <a:spAutoFit/>
-          </a:bodyPr>
-          <a:lstStyle/>
-          <a:p>
-            <a:pPr>
-              <a:spcAft>
-                <a:spcPts val="1000"/>
-              </a:spcAft>
-              <a:defRPr sz="1700" b="0">
-                <a:solidFill>
                   <a:srgbClr val="596678"/>
                 </a:solidFill>
                 <a:latin typeface="Aptos"/>
               </a:defRPr>
             </a:pPr>
             <a:r>
-              <a:t>Saved results remain visible even when services are stopped. Live commands need the services running.</a:t>
+              <a:t>The dashboard also shows analysis progress, logs and the identity of the selected saved run.</a:t>
             </a:r>
           </a:p>
         </p:txBody>
@@ -9397,7 +10593,7 @@
               </a:defRPr>
             </a:pPr>
             <a:r>
-              <a:t>RECORDED RESULTS &amp; CONCLUSION</a:t>
+              <a:t>CONCLUSION</a:t>
             </a:r>
           </a:p>
         </p:txBody>
@@ -9436,7 +10632,7 @@
               </a:defRPr>
             </a:pPr>
             <a:r>
-              <a:t>50,000-food development run passed</a:t>
+              <a:t>One repeatable workflow—from food records to evidence</a:t>
             </a:r>
           </a:p>
         </p:txBody>
@@ -9564,44 +10760,40 @@
       </p:sp>
       <p:sp>
         <p:nvSpPr>
-          <p:cNvPr id="8" name="Rounded Rectangle 7"/>
-          <p:cNvSpPr/>
-          <p:nvPr/>
-        </p:nvSpPr>
-        <p:spPr>
-          <a:xfrm>
-            <a:off x="548640" y="1901952"/>
-            <a:ext cx="3566160" cy="2331720"/>
-          </a:xfrm>
-          <a:prstGeom prst="roundRect">
-            <a:avLst/>
-          </a:prstGeom>
-          <a:solidFill>
-            <a:srgbClr val="EDF3FA"/>
-          </a:solidFill>
-          <a:ln>
-            <a:noFill/>
-          </a:ln>
-        </p:spPr>
-        <p:style>
-          <a:lnRef idx="1">
-            <a:schemeClr val="accent1"/>
-          </a:lnRef>
-          <a:fillRef idx="3">
-            <a:schemeClr val="accent1"/>
-          </a:fillRef>
-          <a:effectRef idx="2">
-            <a:schemeClr val="accent1"/>
-          </a:effectRef>
-          <a:fontRef idx="minor">
-            <a:schemeClr val="lt1"/>
-          </a:fontRef>
-        </p:style>
-        <p:txBody>
-          <a:bodyPr rtlCol="0" anchor="ctr"/>
-          <a:lstStyle/>
-          <a:p>
-            <a:pPr algn="ctr"/>
+          <p:cNvPr id="8" name="TextBox 7"/>
+          <p:cNvSpPr txBox="1"/>
+          <p:nvPr/>
+        </p:nvSpPr>
+        <p:spPr>
+          <a:xfrm>
+            <a:off x="640080" y="1874519"/>
+            <a:ext cx="10789920" cy="731520"/>
+          </a:xfrm>
+          <a:prstGeom prst="rect">
+            <a:avLst/>
+          </a:prstGeom>
+          <a:noFill/>
+        </p:spPr>
+        <p:txBody>
+          <a:bodyPr wrap="square" lIns="18288" rIns="18288" tIns="27432" bIns="0">
+            <a:spAutoFit/>
+          </a:bodyPr>
+          <a:lstStyle/>
+          <a:p>
+            <a:pPr>
+              <a:spcAft>
+                <a:spcPts val="1000"/>
+              </a:spcAft>
+              <a:defRPr sz="2700" b="1">
+                <a:solidFill>
+                  <a:srgbClr val="14284B"/>
+                </a:solidFill>
+                <a:latin typeface="Aptos"/>
+              </a:defRPr>
+            </a:pPr>
+            <a:r>
+              <a:t>We connected food and nutrient data, processed it with multiple tools, and checked that the results agree.</a:t>
+            </a:r>
           </a:p>
         </p:txBody>
       </p:sp>
@@ -9613,8 +10805,8 @@
         </p:nvSpPr>
         <p:spPr>
           <a:xfrm>
-            <a:off x="749808" y="2084832"/>
-            <a:ext cx="3163824" cy="320040"/>
+            <a:off x="594360" y="3108960"/>
+            <a:ext cx="594360" cy="594360"/>
           </a:xfrm>
           <a:prstGeom prst="rect">
             <a:avLst/>
@@ -9631,7 +10823,7 @@
               <a:spcAft>
                 <a:spcPts val="1000"/>
               </a:spcAft>
-              <a:defRPr sz="1100" b="1">
+              <a:defRPr sz="2700" b="1">
                 <a:solidFill>
                   <a:srgbClr val="194F8E"/>
                 </a:solidFill>
@@ -9639,7 +10831,7 @@
               </a:defRPr>
             </a:pPr>
             <a:r>
-              <a:t>DATA PROCESSED</a:t>
+              <a:t>01</a:t>
             </a:r>
           </a:p>
         </p:txBody>
@@ -9652,8 +10844,8 @@
         </p:nvSpPr>
         <p:spPr>
           <a:xfrm>
-            <a:off x="749808" y="2496312"/>
-            <a:ext cx="3163824" cy="594360"/>
+            <a:off x="1371600" y="3108960"/>
+            <a:ext cx="9875520" cy="457200"/>
           </a:xfrm>
           <a:prstGeom prst="rect">
             <a:avLst/>
@@ -9670,7 +10862,7 @@
               <a:spcAft>
                 <a:spcPts val="1000"/>
               </a:spcAft>
-              <a:defRPr sz="2200" b="1">
+              <a:defRPr sz="2400" b="1">
                 <a:solidFill>
                   <a:srgbClr val="14284B"/>
                 </a:solidFill>
@@ -9678,7 +10870,7 @@
               </a:defRPr>
             </a:pPr>
             <a:r>
-              <a:t>50,000 foods</a:t>
+              <a:t>Data analytics</a:t>
             </a:r>
           </a:p>
         </p:txBody>
@@ -9691,8 +10883,8 @@
         </p:nvSpPr>
         <p:spPr>
           <a:xfrm>
-            <a:off x="749808" y="3364992"/>
-            <a:ext cx="3163824" cy="822959"/>
+            <a:off x="1371600" y="3721608"/>
+            <a:ext cx="9784080" cy="640080"/>
           </a:xfrm>
           <a:prstGeom prst="rect">
             <a:avLst/>
@@ -9709,7 +10901,7 @@
               <a:spcAft>
                 <a:spcPts val="1000"/>
               </a:spcAft>
-              <a:defRPr sz="1700" b="0">
+              <a:defRPr sz="2000" b="0">
                 <a:solidFill>
                   <a:srgbClr val="2A3140"/>
                 </a:solidFill>
@@ -9717,15 +10909,116 @@
               </a:defRPr>
             </a:pPr>
             <a:r>
-              <a:t>1,126,928 linked nutrient records</a:t>
-            </a:r>
-          </a:p>
+              <a:t>Food-type counts and nutrient count, total and mean summaries.</a:t>
+            </a:r>
+          </a:p>
+        </p:txBody>
+      </p:sp>
+      <p:sp>
+        <p:nvSpPr>
+          <p:cNvPr id="12" name="TextBox 11"/>
+          <p:cNvSpPr txBox="1"/>
+          <p:nvPr/>
+        </p:nvSpPr>
+        <p:spPr>
+          <a:xfrm>
+            <a:off x="594360" y="4160520"/>
+            <a:ext cx="594360" cy="594360"/>
+          </a:xfrm>
+          <a:prstGeom prst="rect">
+            <a:avLst/>
+          </a:prstGeom>
+          <a:noFill/>
+        </p:spPr>
+        <p:txBody>
+          <a:bodyPr wrap="square" lIns="18288" rIns="18288" tIns="27432" bIns="0">
+            <a:spAutoFit/>
+          </a:bodyPr>
+          <a:lstStyle/>
           <a:p>
             <a:pPr>
               <a:spcAft>
                 <a:spcPts val="1000"/>
               </a:spcAft>
-              <a:defRPr sz="1700" b="0">
+              <a:defRPr sz="2700" b="1">
+                <a:solidFill>
+                  <a:srgbClr val="194F8E"/>
+                </a:solidFill>
+                <a:latin typeface="Aptos"/>
+              </a:defRPr>
+            </a:pPr>
+            <a:r>
+              <a:t>02</a:t>
+            </a:r>
+          </a:p>
+        </p:txBody>
+      </p:sp>
+      <p:sp>
+        <p:nvSpPr>
+          <p:cNvPr id="13" name="TextBox 12"/>
+          <p:cNvSpPr txBox="1"/>
+          <p:nvPr/>
+        </p:nvSpPr>
+        <p:spPr>
+          <a:xfrm>
+            <a:off x="1371600" y="4160520"/>
+            <a:ext cx="9875520" cy="457200"/>
+          </a:xfrm>
+          <a:prstGeom prst="rect">
+            <a:avLst/>
+          </a:prstGeom>
+          <a:noFill/>
+        </p:spPr>
+        <p:txBody>
+          <a:bodyPr wrap="square" lIns="18288" rIns="18288" tIns="27432" bIns="0">
+            <a:spAutoFit/>
+          </a:bodyPr>
+          <a:lstStyle/>
+          <a:p>
+            <a:pPr>
+              <a:spcAft>
+                <a:spcPts val="1000"/>
+              </a:spcAft>
+              <a:defRPr sz="2400" b="1">
+                <a:solidFill>
+                  <a:srgbClr val="14284B"/>
+                </a:solidFill>
+                <a:latin typeface="Aptos"/>
+              </a:defRPr>
+            </a:pPr>
+            <a:r>
+              <a:t>Performance evidence</a:t>
+            </a:r>
+          </a:p>
+        </p:txBody>
+      </p:sp>
+      <p:sp>
+        <p:nvSpPr>
+          <p:cNvPr id="14" name="TextBox 13"/>
+          <p:cNvSpPr txBox="1"/>
+          <p:nvPr/>
+        </p:nvSpPr>
+        <p:spPr>
+          <a:xfrm>
+            <a:off x="1371600" y="4773168"/>
+            <a:ext cx="9784080" cy="640080"/>
+          </a:xfrm>
+          <a:prstGeom prst="rect">
+            <a:avLst/>
+          </a:prstGeom>
+          <a:noFill/>
+        </p:spPr>
+        <p:txBody>
+          <a:bodyPr wrap="square" lIns="18288" rIns="18288" tIns="27432" bIns="0">
+            <a:spAutoFit/>
+          </a:bodyPr>
+          <a:lstStyle/>
+          <a:p>
+            <a:pPr>
+              <a:spcAft>
+                <a:spcPts val="1000"/>
+              </a:spcAft>
+              <a:defRPr sz="2000" b="0">
                 <a:solidFill>
                   <a:srgbClr val="2A3140"/>
                 </a:solidFill>
@@ -9733,64 +11026,21 @@
               </a:defRPr>
             </a:pPr>
             <a:r>
-              <a:t>477 nutrient definitions</a:t>
-            </a:r>
-          </a:p>
-        </p:txBody>
-      </p:sp>
-      <p:sp>
-        <p:nvSpPr>
-          <p:cNvPr id="12" name="Rounded Rectangle 11"/>
-          <p:cNvSpPr/>
-          <p:nvPr/>
-        </p:nvSpPr>
-        <p:spPr>
-          <a:xfrm>
-            <a:off x="4325112" y="1901952"/>
-            <a:ext cx="3566160" cy="2331720"/>
-          </a:xfrm>
-          <a:prstGeom prst="roundRect">
-            <a:avLst/>
-          </a:prstGeom>
-          <a:solidFill>
-            <a:srgbClr val="EDF3FA"/>
-          </a:solidFill>
-          <a:ln>
-            <a:noFill/>
-          </a:ln>
-        </p:spPr>
-        <p:style>
-          <a:lnRef idx="1">
-            <a:schemeClr val="accent1"/>
-          </a:lnRef>
-          <a:fillRef idx="3">
-            <a:schemeClr val="accent1"/>
-          </a:fillRef>
-          <a:effectRef idx="2">
-            <a:schemeClr val="accent1"/>
-          </a:effectRef>
-          <a:fontRef idx="minor">
-            <a:schemeClr val="lt1"/>
-          </a:fontRef>
-        </p:style>
-        <p:txBody>
-          <a:bodyPr rtlCol="0" anchor="ctr"/>
-          <a:lstStyle/>
-          <a:p>
-            <a:pPr algn="ctr"/>
-          </a:p>
-        </p:txBody>
-      </p:sp>
-      <p:sp>
-        <p:nvSpPr>
-          <p:cNvPr id="13" name="TextBox 12"/>
-          <p:cNvSpPr txBox="1"/>
-          <p:nvPr/>
-        </p:nvSpPr>
-        <p:spPr>
-          <a:xfrm>
-            <a:off x="4526280" y="2084832"/>
-            <a:ext cx="3163824" cy="320040"/>
+              <a:t>MongoDB index profiling and Hive Text/RCFile comparisons.</a:t>
+            </a:r>
+          </a:p>
+        </p:txBody>
+      </p:sp>
+      <p:sp>
+        <p:nvSpPr>
+          <p:cNvPr id="15" name="TextBox 14"/>
+          <p:cNvSpPr txBox="1"/>
+          <p:nvPr/>
+        </p:nvSpPr>
+        <p:spPr>
+          <a:xfrm>
+            <a:off x="594360" y="5212080"/>
+            <a:ext cx="594360" cy="594360"/>
           </a:xfrm>
           <a:prstGeom prst="rect">
             <a:avLst/>
@@ -9807,7 +11057,7 @@
               <a:spcAft>
                 <a:spcPts val="1000"/>
               </a:spcAft>
-              <a:defRPr sz="1100" b="1">
+              <a:defRPr sz="2700" b="1">
                 <a:solidFill>
                   <a:srgbClr val="194F8E"/>
                 </a:solidFill>
@@ -9815,21 +11065,21 @@
               </a:defRPr>
             </a:pPr>
             <a:r>
-              <a:t>INDEX PROFILE</a:t>
-            </a:r>
-          </a:p>
-        </p:txBody>
-      </p:sp>
-      <p:sp>
-        <p:nvSpPr>
-          <p:cNvPr id="14" name="TextBox 13"/>
-          <p:cNvSpPr txBox="1"/>
-          <p:nvPr/>
-        </p:nvSpPr>
-        <p:spPr>
-          <a:xfrm>
-            <a:off x="4526280" y="2496312"/>
-            <a:ext cx="3163824" cy="594360"/>
+              <a:t>03</a:t>
+            </a:r>
+          </a:p>
+        </p:txBody>
+      </p:sp>
+      <p:sp>
+        <p:nvSpPr>
+          <p:cNvPr id="16" name="TextBox 15"/>
+          <p:cNvSpPr txBox="1"/>
+          <p:nvPr/>
+        </p:nvSpPr>
+        <p:spPr>
+          <a:xfrm>
+            <a:off x="1371600" y="5212080"/>
+            <a:ext cx="9875520" cy="457200"/>
           </a:xfrm>
           <a:prstGeom prst="rect">
             <a:avLst/>
@@ -9846,7 +11096,7 @@
               <a:spcAft>
                 <a:spcPts val="1000"/>
               </a:spcAft>
-              <a:defRPr sz="2200" b="1">
+              <a:defRPr sz="2400" b="1">
                 <a:solidFill>
                   <a:srgbClr val="14284B"/>
                 </a:solidFill>
@@ -9854,21 +11104,21 @@
               </a:defRPr>
             </a:pPr>
             <a:r>
-              <a:t>50,000 → 1</a:t>
-            </a:r>
-          </a:p>
-        </p:txBody>
-      </p:sp>
-      <p:sp>
-        <p:nvSpPr>
-          <p:cNvPr id="15" name="TextBox 14"/>
-          <p:cNvSpPr txBox="1"/>
-          <p:nvPr/>
-        </p:nvSpPr>
-        <p:spPr>
-          <a:xfrm>
-            <a:off x="4526280" y="3364992"/>
-            <a:ext cx="3163824" cy="822959"/>
+              <a:t>A demonstrable application</a:t>
+            </a:r>
+          </a:p>
+        </p:txBody>
+      </p:sp>
+      <p:sp>
+        <p:nvSpPr>
+          <p:cNvPr id="17" name="TextBox 16"/>
+          <p:cNvSpPr txBox="1"/>
+          <p:nvPr/>
+        </p:nvSpPr>
+        <p:spPr>
+          <a:xfrm>
+            <a:off x="1371600" y="5824728"/>
+            <a:ext cx="9784080" cy="640080"/>
           </a:xfrm>
           <a:prstGeom prst="rect">
             <a:avLst/>
@@ -9885,7 +11135,7 @@
               <a:spcAft>
                 <a:spcPts val="1000"/>
               </a:spcAft>
-              <a:defRPr sz="1700" b="0">
+              <a:defRPr sz="2000" b="0">
                 <a:solidFill>
                   <a:srgbClr val="2A3140"/>
                 </a:solidFill>
@@ -9893,64 +11143,21 @@
               </a:defRPr>
             </a:pPr>
             <a:r>
-              <a:t>Documents examined for the same lookup: collection scan vs index.</a:t>
-            </a:r>
-          </a:p>
-        </p:txBody>
-      </p:sp>
-      <p:sp>
-        <p:nvSpPr>
-          <p:cNvPr id="16" name="Rounded Rectangle 15"/>
-          <p:cNvSpPr/>
-          <p:nvPr/>
-        </p:nvSpPr>
-        <p:spPr>
-          <a:xfrm>
-            <a:off x="8101583" y="1901952"/>
-            <a:ext cx="3538728" cy="2331720"/>
-          </a:xfrm>
-          <a:prstGeom prst="roundRect">
-            <a:avLst/>
-          </a:prstGeom>
-          <a:solidFill>
-            <a:srgbClr val="EDF3FA"/>
-          </a:solidFill>
-          <a:ln>
-            <a:noFill/>
-          </a:ln>
-        </p:spPr>
-        <p:style>
-          <a:lnRef idx="1">
-            <a:schemeClr val="accent1"/>
-          </a:lnRef>
-          <a:fillRef idx="3">
-            <a:schemeClr val="accent1"/>
-          </a:fillRef>
-          <a:effectRef idx="2">
-            <a:schemeClr val="accent1"/>
-          </a:effectRef>
-          <a:fontRef idx="minor">
-            <a:schemeClr val="lt1"/>
-          </a:fontRef>
-        </p:style>
-        <p:txBody>
-          <a:bodyPr rtlCol="0" anchor="ctr"/>
-          <a:lstStyle/>
-          <a:p>
-            <a:pPr algn="ctr"/>
-          </a:p>
-        </p:txBody>
-      </p:sp>
-      <p:sp>
-        <p:nvSpPr>
-          <p:cNvPr id="17" name="TextBox 16"/>
-          <p:cNvSpPr txBox="1"/>
-          <p:nvPr/>
-        </p:nvSpPr>
-        <p:spPr>
-          <a:xfrm>
-            <a:off x="8302752" y="2084832"/>
-            <a:ext cx="3136392" cy="320040"/>
+              <a:t>Flask dashboard: results, progress and verification commands.</a:t>
+            </a:r>
+          </a:p>
+        </p:txBody>
+      </p:sp>
+      <p:sp>
+        <p:nvSpPr>
+          <p:cNvPr id="18" name="TextBox 17"/>
+          <p:cNvSpPr txBox="1"/>
+          <p:nvPr/>
+        </p:nvSpPr>
+        <p:spPr>
+          <a:xfrm>
+            <a:off x="658368" y="6117336"/>
+            <a:ext cx="10881360" cy="219456"/>
           </a:xfrm>
           <a:prstGeom prst="rect">
             <a:avLst/>
@@ -9967,163 +11174,7 @@
               <a:spcAft>
                 <a:spcPts val="1000"/>
               </a:spcAft>
-              <a:defRPr sz="1100" b="1">
-                <a:solidFill>
-                  <a:srgbClr val="194F8E"/>
-                </a:solidFill>
-                <a:latin typeface="Aptos"/>
-              </a:defRPr>
-            </a:pPr>
-            <a:r>
-              <a:t>CORRECTNESS</a:t>
-            </a:r>
-          </a:p>
-        </p:txBody>
-      </p:sp>
-      <p:sp>
-        <p:nvSpPr>
-          <p:cNvPr id="18" name="TextBox 17"/>
-          <p:cNvSpPr txBox="1"/>
-          <p:nvPr/>
-        </p:nvSpPr>
-        <p:spPr>
-          <a:xfrm>
-            <a:off x="8302752" y="2496312"/>
-            <a:ext cx="3136392" cy="594360"/>
-          </a:xfrm>
-          <a:prstGeom prst="rect">
-            <a:avLst/>
-          </a:prstGeom>
-          <a:noFill/>
-        </p:spPr>
-        <p:txBody>
-          <a:bodyPr wrap="square" lIns="18288" rIns="18288" tIns="27432" bIns="0">
-            <a:spAutoFit/>
-          </a:bodyPr>
-          <a:lstStyle/>
-          <a:p>
-            <a:pPr>
-              <a:spcAft>
-                <a:spcPts val="1000"/>
-              </a:spcAft>
-              <a:defRPr sz="2200" b="1">
-                <a:solidFill>
-                  <a:srgbClr val="14284B"/>
-                </a:solidFill>
-                <a:latin typeface="Aptos"/>
-              </a:defRPr>
-            </a:pPr>
-            <a:r>
-              <a:t>Cross-system checks</a:t>
-            </a:r>
-          </a:p>
-        </p:txBody>
-      </p:sp>
-      <p:sp>
-        <p:nvSpPr>
-          <p:cNvPr id="19" name="TextBox 18"/>
-          <p:cNvSpPr txBox="1"/>
-          <p:nvPr/>
-        </p:nvSpPr>
-        <p:spPr>
-          <a:xfrm>
-            <a:off x="8302752" y="3364992"/>
-            <a:ext cx="3136392" cy="822959"/>
-          </a:xfrm>
-          <a:prstGeom prst="rect">
-            <a:avLst/>
-          </a:prstGeom>
-          <a:noFill/>
-        </p:spPr>
-        <p:txBody>
-          <a:bodyPr wrap="square" lIns="18288" rIns="18288" tIns="27432" bIns="0">
-            <a:spAutoFit/>
-          </a:bodyPr>
-          <a:lstStyle/>
-          <a:p>
-            <a:pPr>
-              <a:spcAft>
-                <a:spcPts val="1000"/>
-              </a:spcAft>
-              <a:defRPr sz="1700" b="0">
-                <a:solidFill>
-                  <a:srgbClr val="2A3140"/>
-                </a:solidFill>
-                <a:latin typeface="Aptos"/>
-              </a:defRPr>
-            </a:pPr>
-            <a:r>
-              <a:t>Linked-subset answers passed reconciliation across the processing systems.</a:t>
-            </a:r>
-          </a:p>
-        </p:txBody>
-      </p:sp>
-      <p:sp>
-        <p:nvSpPr>
-          <p:cNvPr id="20" name="TextBox 19"/>
-          <p:cNvSpPr txBox="1"/>
-          <p:nvPr/>
-        </p:nvSpPr>
-        <p:spPr>
-          <a:xfrm>
-            <a:off x="685800" y="4526280"/>
-            <a:ext cx="10835640" cy="640080"/>
-          </a:xfrm>
-          <a:prstGeom prst="rect">
-            <a:avLst/>
-          </a:prstGeom>
-          <a:noFill/>
-        </p:spPr>
-        <p:txBody>
-          <a:bodyPr wrap="square" lIns="18288" rIns="18288" tIns="27432" bIns="0">
-            <a:spAutoFit/>
-          </a:bodyPr>
-          <a:lstStyle/>
-          <a:p>
-            <a:pPr>
-              <a:spcAft>
-                <a:spcPts val="1000"/>
-              </a:spcAft>
-              <a:defRPr sz="2400" b="1">
-                <a:solidFill>
-                  <a:srgbClr val="14284B"/>
-                </a:solidFill>
-                <a:latin typeface="Aptos"/>
-              </a:defRPr>
-            </a:pPr>
-            <a:r>
-              <a:t>Outcome: a repeatable analytics workflow with visible results and measurable performance.</a:t>
-            </a:r>
-          </a:p>
-        </p:txBody>
-      </p:sp>
-      <p:sp>
-        <p:nvSpPr>
-          <p:cNvPr id="21" name="TextBox 20"/>
-          <p:cNvSpPr txBox="1"/>
-          <p:nvPr/>
-        </p:nvSpPr>
-        <p:spPr>
-          <a:xfrm>
-            <a:off x="685800" y="5440680"/>
-            <a:ext cx="10835640" cy="548640"/>
-          </a:xfrm>
-          <a:prstGeom prst="rect">
-            <a:avLst/>
-          </a:prstGeom>
-          <a:noFill/>
-        </p:spPr>
-        <p:txBody>
-          <a:bodyPr wrap="square" lIns="18288" rIns="18288" tIns="27432" bIns="0">
-            <a:spAutoFit/>
-          </a:bodyPr>
-          <a:lstStyle/>
-          <a:p>
-            <a:pPr>
-              <a:spcAft>
-                <a:spcPts val="1000"/>
-              </a:spcAft>
-              <a:defRPr sz="1700" b="0">
+              <a:defRPr sz="1100" b="0">
                 <a:solidFill>
                   <a:srgbClr val="596678"/>
                 </a:solidFill>
@@ -10131,46 +11182,7 @@
               </a:defRPr>
             </a:pPr>
             <a:r>
-              <a:t>Scope: tested on one laptop with Docker workers; full-release analytics and the physical lab run are separate.</a:t>
-            </a:r>
-          </a:p>
-        </p:txBody>
-      </p:sp>
-      <p:sp>
-        <p:nvSpPr>
-          <p:cNvPr id="22" name="TextBox 21"/>
-          <p:cNvSpPr txBox="1"/>
-          <p:nvPr/>
-        </p:nvSpPr>
-        <p:spPr>
-          <a:xfrm>
-            <a:off x="685800" y="6035040"/>
-            <a:ext cx="10835640" cy="228600"/>
-          </a:xfrm>
-          <a:prstGeom prst="rect">
-            <a:avLst/>
-          </a:prstGeom>
-          <a:noFill/>
-        </p:spPr>
-        <p:txBody>
-          <a:bodyPr wrap="square" lIns="18288" rIns="18288" tIns="27432" bIns="0">
-            <a:spAutoFit/>
-          </a:bodyPr>
-          <a:lstStyle/>
-          <a:p>
-            <a:pPr>
-              <a:spcAft>
-                <a:spcPts val="1000"/>
-              </a:spcAft>
-              <a:defRPr sz="1100" b="0">
-                <a:solidFill>
-                  <a:srgbClr val="194F8E"/>
-                </a:solidFill>
-                <a:latin typeface="Aptos"/>
-              </a:defRPr>
-            </a:pPr>
-            <a:r>
-              <a:t>Source: fdc.nal.usda.gov/download-datasets/  ·  Code: github.com/Dhanush-singh-g/BDA-Assignment</a:t>
+              <a:t>USDA: fdc.nal.usda.gov/download-datasets/  |  github.com/Dhanush-singh-g/BDA-Assignment</a:t>
             </a:r>
           </a:p>
         </p:txBody>
